--- a/manual/manual.pptx
+++ b/manual/manual.pptx
@@ -15,14 +15,18 @@
     <p:sldId id="291" r:id="rId9"/>
     <p:sldId id="292" r:id="rId10"/>
     <p:sldId id="293" r:id="rId11"/>
-    <p:sldId id="277" r:id="rId12"/>
-    <p:sldId id="278" r:id="rId13"/>
-    <p:sldId id="279" r:id="rId14"/>
-    <p:sldId id="280" r:id="rId15"/>
-    <p:sldId id="281" r:id="rId16"/>
-    <p:sldId id="282" r:id="rId17"/>
-    <p:sldId id="283" r:id="rId18"/>
-    <p:sldId id="284" r:id="rId19"/>
+    <p:sldId id="294" r:id="rId12"/>
+    <p:sldId id="295" r:id="rId13"/>
+    <p:sldId id="296" r:id="rId14"/>
+    <p:sldId id="297" r:id="rId15"/>
+    <p:sldId id="277" r:id="rId16"/>
+    <p:sldId id="278" r:id="rId17"/>
+    <p:sldId id="279" r:id="rId18"/>
+    <p:sldId id="280" r:id="rId19"/>
+    <p:sldId id="281" r:id="rId20"/>
+    <p:sldId id="282" r:id="rId21"/>
+    <p:sldId id="283" r:id="rId22"/>
+    <p:sldId id="284" r:id="rId23"/>
   </p:sldIdLst>
   <p:sldSz cx="7199313" cy="9720263"/>
   <p:notesSz cx="6858000" cy="9144000"/>
@@ -3113,7 +3117,7 @@
         </p:blipFill>
         <p:spPr>
           <a:xfrm>
-            <a:off x="829868" y="2531363"/>
+            <a:off x="842060" y="2531363"/>
             <a:ext cx="1552792" cy="523948"/>
           </a:xfrm>
           <a:prstGeom prst="rect">
@@ -3143,7 +3147,7 @@
         </p:blipFill>
         <p:spPr>
           <a:xfrm>
-            <a:off x="835964" y="2996729"/>
+            <a:off x="848156" y="2996729"/>
             <a:ext cx="2715004" cy="533474"/>
           </a:xfrm>
           <a:prstGeom prst="rect">
@@ -3203,7 +3207,7 @@
         </p:blipFill>
         <p:spPr>
           <a:xfrm>
-            <a:off x="835964" y="4010641"/>
+            <a:off x="823772" y="4010641"/>
             <a:ext cx="1905266" cy="485843"/>
           </a:xfrm>
           <a:prstGeom prst="rect">
@@ -3233,7 +3237,7 @@
         </p:blipFill>
         <p:spPr>
           <a:xfrm>
-            <a:off x="835964" y="4478211"/>
+            <a:off x="823772" y="4478211"/>
             <a:ext cx="1057423" cy="504895"/>
           </a:xfrm>
           <a:prstGeom prst="rect">
@@ -3243,10 +3247,10 @@
       </p:pic>
       <p:pic>
         <p:nvPicPr>
-          <p:cNvPr id="43" name="Imagen 42">
-            <a:extLst>
-              <a:ext uri="{FF2B5EF4-FFF2-40B4-BE49-F238E27FC236}">
-                <a16:creationId xmlns:a16="http://schemas.microsoft.com/office/drawing/2014/main" id="{3E3F420E-8650-4340-915A-5548C7B1BF13}"/>
+          <p:cNvPr id="66" name="Imagen 65">
+            <a:extLst>
+              <a:ext uri="{FF2B5EF4-FFF2-40B4-BE49-F238E27FC236}">
+                <a16:creationId xmlns:a16="http://schemas.microsoft.com/office/drawing/2014/main" id="{948EFF59-D20C-4698-9E77-EB38165D0736}"/>
               </a:ext>
             </a:extLst>
           </p:cNvPr>
@@ -3263,8 +3267,8 @@
         </p:blipFill>
         <p:spPr>
           <a:xfrm>
-            <a:off x="822374" y="4994885"/>
-            <a:ext cx="1152686" cy="485843"/>
+            <a:off x="2630737" y="1931245"/>
+            <a:ext cx="1657581" cy="323895"/>
           </a:xfrm>
           <a:prstGeom prst="rect">
             <a:avLst/>
@@ -3273,10 +3277,10 @@
       </p:pic>
       <p:pic>
         <p:nvPicPr>
-          <p:cNvPr id="45" name="Imagen 44">
-            <a:extLst>
-              <a:ext uri="{FF2B5EF4-FFF2-40B4-BE49-F238E27FC236}">
-                <a16:creationId xmlns:a16="http://schemas.microsoft.com/office/drawing/2014/main" id="{3B300397-2D49-44D8-9355-0385D7D8A579}"/>
+          <p:cNvPr id="68" name="Imagen 67">
+            <a:extLst>
+              <a:ext uri="{FF2B5EF4-FFF2-40B4-BE49-F238E27FC236}">
+                <a16:creationId xmlns:a16="http://schemas.microsoft.com/office/drawing/2014/main" id="{9DB0CFA9-DD90-4F49-84FA-713EA8C12677}"/>
               </a:ext>
             </a:extLst>
           </p:cNvPr>
@@ -3293,8 +3297,8 @@
         </p:blipFill>
         <p:spPr>
           <a:xfrm>
-            <a:off x="3843696" y="2540889"/>
-            <a:ext cx="2419688" cy="514422"/>
+            <a:off x="842060" y="4986024"/>
+            <a:ext cx="2162477" cy="438211"/>
           </a:xfrm>
           <a:prstGeom prst="rect">
             <a:avLst/>
@@ -3303,10 +3307,10 @@
       </p:pic>
       <p:pic>
         <p:nvPicPr>
-          <p:cNvPr id="47" name="Imagen 46">
-            <a:extLst>
-              <a:ext uri="{FF2B5EF4-FFF2-40B4-BE49-F238E27FC236}">
-                <a16:creationId xmlns:a16="http://schemas.microsoft.com/office/drawing/2014/main" id="{44645C23-B6F7-48F5-9093-CE9FBA4D4165}"/>
+          <p:cNvPr id="70" name="Imagen 69">
+            <a:extLst>
+              <a:ext uri="{FF2B5EF4-FFF2-40B4-BE49-F238E27FC236}">
+                <a16:creationId xmlns:a16="http://schemas.microsoft.com/office/drawing/2014/main" id="{9A1F5718-E1B8-4FD7-A907-516356B792E0}"/>
               </a:ext>
             </a:extLst>
           </p:cNvPr>
@@ -3323,8 +3327,8 @@
         </p:blipFill>
         <p:spPr>
           <a:xfrm>
-            <a:off x="3900646" y="3015017"/>
-            <a:ext cx="1838582" cy="485843"/>
+            <a:off x="3925030" y="2553635"/>
+            <a:ext cx="1667108" cy="428685"/>
           </a:xfrm>
           <a:prstGeom prst="rect">
             <a:avLst/>
@@ -3333,10 +3337,10 @@
       </p:pic>
       <p:pic>
         <p:nvPicPr>
-          <p:cNvPr id="49" name="Imagen 48">
-            <a:extLst>
-              <a:ext uri="{FF2B5EF4-FFF2-40B4-BE49-F238E27FC236}">
-                <a16:creationId xmlns:a16="http://schemas.microsoft.com/office/drawing/2014/main" id="{C4710A99-557A-4F55-AB26-36081C3994B2}"/>
+          <p:cNvPr id="72" name="Imagen 71">
+            <a:extLst>
+              <a:ext uri="{FF2B5EF4-FFF2-40B4-BE49-F238E27FC236}">
+                <a16:creationId xmlns:a16="http://schemas.microsoft.com/office/drawing/2014/main" id="{4FF8732E-28B0-4A9F-AEDC-365D255C0010}"/>
               </a:ext>
             </a:extLst>
           </p:cNvPr>
@@ -3353,8 +3357,8 @@
         </p:blipFill>
         <p:spPr>
           <a:xfrm>
-            <a:off x="3918934" y="3491988"/>
-            <a:ext cx="2534004" cy="523948"/>
+            <a:off x="3918076" y="3002825"/>
+            <a:ext cx="2562583" cy="495369"/>
           </a:xfrm>
           <a:prstGeom prst="rect">
             <a:avLst/>
@@ -3363,10 +3367,10 @@
       </p:pic>
       <p:pic>
         <p:nvPicPr>
-          <p:cNvPr id="51" name="Imagen 50">
-            <a:extLst>
-              <a:ext uri="{FF2B5EF4-FFF2-40B4-BE49-F238E27FC236}">
-                <a16:creationId xmlns:a16="http://schemas.microsoft.com/office/drawing/2014/main" id="{BA3A0F1C-4F46-4AE5-90A8-04442053E8E3}"/>
+          <p:cNvPr id="74" name="Imagen 73">
+            <a:extLst>
+              <a:ext uri="{FF2B5EF4-FFF2-40B4-BE49-F238E27FC236}">
+                <a16:creationId xmlns:a16="http://schemas.microsoft.com/office/drawing/2014/main" id="{F3FC4BCA-DCEF-4164-9CDA-586E530B831A}"/>
               </a:ext>
             </a:extLst>
           </p:cNvPr>
@@ -3383,8 +3387,8 @@
         </p:blipFill>
         <p:spPr>
           <a:xfrm>
-            <a:off x="3943318" y="3974113"/>
-            <a:ext cx="2391109" cy="514422"/>
+            <a:off x="3912838" y="3481925"/>
+            <a:ext cx="2381582" cy="523948"/>
           </a:xfrm>
           <a:prstGeom prst="rect">
             <a:avLst/>
@@ -3393,10 +3397,10 @@
       </p:pic>
       <p:pic>
         <p:nvPicPr>
-          <p:cNvPr id="53" name="Imagen 52">
-            <a:extLst>
-              <a:ext uri="{FF2B5EF4-FFF2-40B4-BE49-F238E27FC236}">
-                <a16:creationId xmlns:a16="http://schemas.microsoft.com/office/drawing/2014/main" id="{780FB73C-16F5-40EE-8134-50500F69F5C1}"/>
+          <p:cNvPr id="76" name="Imagen 75">
+            <a:extLst>
+              <a:ext uri="{FF2B5EF4-FFF2-40B4-BE49-F238E27FC236}">
+                <a16:creationId xmlns:a16="http://schemas.microsoft.com/office/drawing/2014/main" id="{02F1EBAD-925C-42CB-8AD5-46F17C87F7FF}"/>
               </a:ext>
             </a:extLst>
           </p:cNvPr>
@@ -3413,8 +3417,8 @@
         </p:blipFill>
         <p:spPr>
           <a:xfrm>
-            <a:off x="3925030" y="4470901"/>
-            <a:ext cx="2248214" cy="495369"/>
+            <a:off x="3931126" y="3965102"/>
+            <a:ext cx="2286319" cy="523948"/>
           </a:xfrm>
           <a:prstGeom prst="rect">
             <a:avLst/>
@@ -3423,10 +3427,10 @@
       </p:pic>
       <p:pic>
         <p:nvPicPr>
-          <p:cNvPr id="55" name="Imagen 54">
-            <a:extLst>
-              <a:ext uri="{FF2B5EF4-FFF2-40B4-BE49-F238E27FC236}">
-                <a16:creationId xmlns:a16="http://schemas.microsoft.com/office/drawing/2014/main" id="{7E4152D4-57C9-4F3B-ACBE-7AF024D5D843}"/>
+          <p:cNvPr id="78" name="Imagen 77">
+            <a:extLst>
+              <a:ext uri="{FF2B5EF4-FFF2-40B4-BE49-F238E27FC236}">
+                <a16:creationId xmlns:a16="http://schemas.microsoft.com/office/drawing/2014/main" id="{F093B48E-B1FC-4C7C-B983-F7C03A54A572}"/>
               </a:ext>
             </a:extLst>
           </p:cNvPr>
@@ -3443,8 +3447,8 @@
         </p:blipFill>
         <p:spPr>
           <a:xfrm>
-            <a:off x="3943318" y="4943500"/>
-            <a:ext cx="2000529" cy="504895"/>
+            <a:off x="3950943" y="4468135"/>
+            <a:ext cx="2010056" cy="485843"/>
           </a:xfrm>
           <a:prstGeom prst="rect">
             <a:avLst/>
@@ -3453,10 +3457,10 @@
       </p:pic>
       <p:pic>
         <p:nvPicPr>
-          <p:cNvPr id="57" name="Imagen 56">
-            <a:extLst>
-              <a:ext uri="{FF2B5EF4-FFF2-40B4-BE49-F238E27FC236}">
-                <a16:creationId xmlns:a16="http://schemas.microsoft.com/office/drawing/2014/main" id="{7C811304-9CA1-4B57-8239-ED44594CCE34}"/>
+          <p:cNvPr id="80" name="Imagen 79">
+            <a:extLst>
+              <a:ext uri="{FF2B5EF4-FFF2-40B4-BE49-F238E27FC236}">
+                <a16:creationId xmlns:a16="http://schemas.microsoft.com/office/drawing/2014/main" id="{D69AEA22-FEE2-4936-846E-510F5BF62EA5}"/>
               </a:ext>
             </a:extLst>
           </p:cNvPr>
@@ -3473,65 +3477,20 @@
         </p:blipFill>
         <p:spPr>
           <a:xfrm>
-            <a:off x="3918934" y="5434775"/>
-            <a:ext cx="2457793" cy="485843"/>
+            <a:off x="3969231" y="4949381"/>
+            <a:ext cx="2419688" cy="504895"/>
           </a:xfrm>
           <a:prstGeom prst="rect">
             <a:avLst/>
           </a:prstGeom>
         </p:spPr>
       </p:pic>
-      <p:cxnSp>
-        <p:nvCxnSpPr>
-          <p:cNvPr id="60" name="Conector recto 59">
-            <a:extLst>
-              <a:ext uri="{FF2B5EF4-FFF2-40B4-BE49-F238E27FC236}">
-                <a16:creationId xmlns:a16="http://schemas.microsoft.com/office/drawing/2014/main" id="{8CD7F563-69D5-4D2B-9E7C-579F402ADFB5}"/>
-              </a:ext>
-            </a:extLst>
-          </p:cNvPr>
-          <p:cNvCxnSpPr>
-            <a:cxnSpLocks/>
-          </p:cNvCxnSpPr>
-          <p:nvPr/>
-        </p:nvCxnSpPr>
-        <p:spPr>
-          <a:xfrm>
-            <a:off x="316992" y="6261512"/>
-            <a:ext cx="6492240" cy="0"/>
-          </a:xfrm>
-          <a:prstGeom prst="line">
-            <a:avLst/>
-          </a:prstGeom>
-          <a:effectLst>
-            <a:outerShdw blurRad="50800" dist="38100" dir="2700000" algn="tl" rotWithShape="0">
-              <a:prstClr val="black">
-                <a:alpha val="40000"/>
-              </a:prstClr>
-            </a:outerShdw>
-          </a:effectLst>
-        </p:spPr>
-        <p:style>
-          <a:lnRef idx="2">
-            <a:schemeClr val="accent3"/>
-          </a:lnRef>
-          <a:fillRef idx="0">
-            <a:schemeClr val="accent3"/>
-          </a:fillRef>
-          <a:effectRef idx="1">
-            <a:schemeClr val="accent3"/>
-          </a:effectRef>
-          <a:fontRef idx="minor">
-            <a:schemeClr val="tx1"/>
-          </a:fontRef>
-        </p:style>
-      </p:cxnSp>
       <p:pic>
         <p:nvPicPr>
-          <p:cNvPr id="66" name="Imagen 65">
-            <a:extLst>
-              <a:ext uri="{FF2B5EF4-FFF2-40B4-BE49-F238E27FC236}">
-                <a16:creationId xmlns:a16="http://schemas.microsoft.com/office/drawing/2014/main" id="{948EFF59-D20C-4698-9E77-EB38165D0736}"/>
+          <p:cNvPr id="88" name="Imagen 87">
+            <a:extLst>
+              <a:ext uri="{FF2B5EF4-FFF2-40B4-BE49-F238E27FC236}">
+                <a16:creationId xmlns:a16="http://schemas.microsoft.com/office/drawing/2014/main" id="{44AA44DF-0A62-4D5D-BB15-8F7DC3A5C899}"/>
               </a:ext>
             </a:extLst>
           </p:cNvPr>
@@ -3541,15 +3500,57 @@
           <p:nvPr/>
         </p:nvPicPr>
         <p:blipFill>
-          <a:blip r:embed="rId16"/>
+          <a:blip r:embed="rId16">
+            <a:extLst>
+              <a:ext uri="{28A0092B-C50C-407E-A947-70E740481C1C}">
+                <a14:useLocalDpi xmlns:a14="http://schemas.microsoft.com/office/drawing/2010/main" val="0"/>
+              </a:ext>
+            </a:extLst>
+          </a:blip>
           <a:stretch>
             <a:fillRect/>
           </a:stretch>
         </p:blipFill>
         <p:spPr>
           <a:xfrm>
-            <a:off x="2630737" y="1931245"/>
-            <a:ext cx="1657581" cy="323895"/>
+            <a:off x="1951008" y="6431560"/>
+            <a:ext cx="3289675" cy="1606186"/>
+          </a:xfrm>
+          <a:prstGeom prst="rect">
+            <a:avLst/>
+          </a:prstGeom>
+        </p:spPr>
+      </p:pic>
+      <p:pic>
+        <p:nvPicPr>
+          <p:cNvPr id="92" name="Imagen 91">
+            <a:extLst>
+              <a:ext uri="{FF2B5EF4-FFF2-40B4-BE49-F238E27FC236}">
+                <a16:creationId xmlns:a16="http://schemas.microsoft.com/office/drawing/2014/main" id="{DFB2A19E-5375-4E20-BEF0-1F1022F70660}"/>
+              </a:ext>
+            </a:extLst>
+          </p:cNvPr>
+          <p:cNvPicPr>
+            <a:picLocks noChangeAspect="1"/>
+          </p:cNvPicPr>
+          <p:nvPr/>
+        </p:nvPicPr>
+        <p:blipFill>
+          <a:blip r:embed="rId17">
+            <a:extLst>
+              <a:ext uri="{28A0092B-C50C-407E-A947-70E740481C1C}">
+                <a14:useLocalDpi xmlns:a14="http://schemas.microsoft.com/office/drawing/2010/main" val="0"/>
+              </a:ext>
+            </a:extLst>
+          </a:blip>
+          <a:stretch>
+            <a:fillRect/>
+          </a:stretch>
+        </p:blipFill>
+        <p:spPr>
+          <a:xfrm>
+            <a:off x="6282228" y="365119"/>
+            <a:ext cx="573160" cy="257159"/>
           </a:xfrm>
           <a:prstGeom prst="rect">
             <a:avLst/>
@@ -3608,6 +3609,158 @@
 </file>
 
 <file path=ppt/slides/slide11.xml><?xml version="1.0" encoding="utf-8"?>
+<p:sld xmlns:a="http://schemas.openxmlformats.org/drawingml/2006/main" xmlns:r="http://schemas.openxmlformats.org/officeDocument/2006/relationships" xmlns:p="http://schemas.openxmlformats.org/presentationml/2006/main">
+  <p:cSld>
+    <p:bg>
+      <p:bgPr>
+        <a:solidFill>
+          <a:srgbClr val="F8FAFC"/>
+        </a:solidFill>
+        <a:effectLst/>
+      </p:bgPr>
+    </p:bg>
+    <p:spTree>
+      <p:nvGrpSpPr>
+        <p:cNvPr id="1" name=""/>
+        <p:cNvGrpSpPr/>
+        <p:nvPr/>
+      </p:nvGrpSpPr>
+      <p:grpSpPr>
+        <a:xfrm>
+          <a:off x="0" y="0"/>
+          <a:ext cx="0" cy="0"/>
+          <a:chOff x="0" y="0"/>
+          <a:chExt cx="0" cy="0"/>
+        </a:xfrm>
+      </p:grpSpPr>
+    </p:spTree>
+    <p:extLst>
+      <p:ext uri="{BB962C8B-B14F-4D97-AF65-F5344CB8AC3E}">
+        <p14:creationId xmlns:p14="http://schemas.microsoft.com/office/powerpoint/2010/main" val="299204732"/>
+      </p:ext>
+    </p:extLst>
+  </p:cSld>
+  <p:clrMapOvr>
+    <a:masterClrMapping/>
+  </p:clrMapOvr>
+</p:sld>
+</file>
+
+<file path=ppt/slides/slide12.xml><?xml version="1.0" encoding="utf-8"?>
+<p:sld xmlns:a="http://schemas.openxmlformats.org/drawingml/2006/main" xmlns:r="http://schemas.openxmlformats.org/officeDocument/2006/relationships" xmlns:p="http://schemas.openxmlformats.org/presentationml/2006/main">
+  <p:cSld>
+    <p:bg>
+      <p:bgPr>
+        <a:solidFill>
+          <a:srgbClr val="F8FAFC"/>
+        </a:solidFill>
+        <a:effectLst/>
+      </p:bgPr>
+    </p:bg>
+    <p:spTree>
+      <p:nvGrpSpPr>
+        <p:cNvPr id="1" name=""/>
+        <p:cNvGrpSpPr/>
+        <p:nvPr/>
+      </p:nvGrpSpPr>
+      <p:grpSpPr>
+        <a:xfrm>
+          <a:off x="0" y="0"/>
+          <a:ext cx="0" cy="0"/>
+          <a:chOff x="0" y="0"/>
+          <a:chExt cx="0" cy="0"/>
+        </a:xfrm>
+      </p:grpSpPr>
+    </p:spTree>
+    <p:extLst>
+      <p:ext uri="{BB962C8B-B14F-4D97-AF65-F5344CB8AC3E}">
+        <p14:creationId xmlns:p14="http://schemas.microsoft.com/office/powerpoint/2010/main" val="155825700"/>
+      </p:ext>
+    </p:extLst>
+  </p:cSld>
+  <p:clrMapOvr>
+    <a:masterClrMapping/>
+  </p:clrMapOvr>
+</p:sld>
+</file>
+
+<file path=ppt/slides/slide13.xml><?xml version="1.0" encoding="utf-8"?>
+<p:sld xmlns:a="http://schemas.openxmlformats.org/drawingml/2006/main" xmlns:r="http://schemas.openxmlformats.org/officeDocument/2006/relationships" xmlns:p="http://schemas.openxmlformats.org/presentationml/2006/main">
+  <p:cSld>
+    <p:bg>
+      <p:bgPr>
+        <a:solidFill>
+          <a:srgbClr val="F8FAFC"/>
+        </a:solidFill>
+        <a:effectLst/>
+      </p:bgPr>
+    </p:bg>
+    <p:spTree>
+      <p:nvGrpSpPr>
+        <p:cNvPr id="1" name=""/>
+        <p:cNvGrpSpPr/>
+        <p:nvPr/>
+      </p:nvGrpSpPr>
+      <p:grpSpPr>
+        <a:xfrm>
+          <a:off x="0" y="0"/>
+          <a:ext cx="0" cy="0"/>
+          <a:chOff x="0" y="0"/>
+          <a:chExt cx="0" cy="0"/>
+        </a:xfrm>
+      </p:grpSpPr>
+    </p:spTree>
+    <p:extLst>
+      <p:ext uri="{BB962C8B-B14F-4D97-AF65-F5344CB8AC3E}">
+        <p14:creationId xmlns:p14="http://schemas.microsoft.com/office/powerpoint/2010/main" val="2705076168"/>
+      </p:ext>
+    </p:extLst>
+  </p:cSld>
+  <p:clrMapOvr>
+    <a:masterClrMapping/>
+  </p:clrMapOvr>
+</p:sld>
+</file>
+
+<file path=ppt/slides/slide14.xml><?xml version="1.0" encoding="utf-8"?>
+<p:sld xmlns:a="http://schemas.openxmlformats.org/drawingml/2006/main" xmlns:r="http://schemas.openxmlformats.org/officeDocument/2006/relationships" xmlns:p="http://schemas.openxmlformats.org/presentationml/2006/main">
+  <p:cSld>
+    <p:bg>
+      <p:bgPr>
+        <a:solidFill>
+          <a:srgbClr val="F8FAFC"/>
+        </a:solidFill>
+        <a:effectLst/>
+      </p:bgPr>
+    </p:bg>
+    <p:spTree>
+      <p:nvGrpSpPr>
+        <p:cNvPr id="1" name=""/>
+        <p:cNvGrpSpPr/>
+        <p:nvPr/>
+      </p:nvGrpSpPr>
+      <p:grpSpPr>
+        <a:xfrm>
+          <a:off x="0" y="0"/>
+          <a:ext cx="0" cy="0"/>
+          <a:chOff x="0" y="0"/>
+          <a:chExt cx="0" cy="0"/>
+        </a:xfrm>
+      </p:grpSpPr>
+    </p:spTree>
+    <p:extLst>
+      <p:ext uri="{BB962C8B-B14F-4D97-AF65-F5344CB8AC3E}">
+        <p14:creationId xmlns:p14="http://schemas.microsoft.com/office/powerpoint/2010/main" val="4068736170"/>
+      </p:ext>
+    </p:extLst>
+  </p:cSld>
+  <p:clrMapOvr>
+    <a:masterClrMapping/>
+  </p:clrMapOvr>
+</p:sld>
+</file>
+
+<file path=ppt/slides/slide15.xml><?xml version="1.0" encoding="utf-8"?>
 <p:sld xmlns:a="http://schemas.openxmlformats.org/drawingml/2006/main" xmlns:r="http://schemas.openxmlformats.org/officeDocument/2006/relationships" xmlns:p="http://schemas.openxmlformats.org/presentationml/2006/main">
   <p:cSld>
     <p:spTree>
@@ -5514,7 +5667,7 @@
 </p:sld>
 </file>
 
-<file path=ppt/slides/slide12.xml><?xml version="1.0" encoding="utf-8"?>
+<file path=ppt/slides/slide16.xml><?xml version="1.0" encoding="utf-8"?>
 <p:sld xmlns:a="http://schemas.openxmlformats.org/drawingml/2006/main" xmlns:r="http://schemas.openxmlformats.org/officeDocument/2006/relationships" xmlns:p="http://schemas.openxmlformats.org/presentationml/2006/main">
   <p:cSld>
     <p:spTree>
@@ -7190,7 +7343,7 @@
 </p:sld>
 </file>
 
-<file path=ppt/slides/slide13.xml><?xml version="1.0" encoding="utf-8"?>
+<file path=ppt/slides/slide17.xml><?xml version="1.0" encoding="utf-8"?>
 <p:sld xmlns:a="http://schemas.openxmlformats.org/drawingml/2006/main" xmlns:r="http://schemas.openxmlformats.org/officeDocument/2006/relationships" xmlns:p="http://schemas.openxmlformats.org/presentationml/2006/main">
   <p:cSld>
     <p:spTree>
@@ -8758,7 +8911,7 @@
 </p:sld>
 </file>
 
-<file path=ppt/slides/slide14.xml><?xml version="1.0" encoding="utf-8"?>
+<file path=ppt/slides/slide18.xml><?xml version="1.0" encoding="utf-8"?>
 <p:sld xmlns:a="http://schemas.openxmlformats.org/drawingml/2006/main" xmlns:r="http://schemas.openxmlformats.org/officeDocument/2006/relationships" xmlns:p="http://schemas.openxmlformats.org/presentationml/2006/main">
   <p:cSld>
     <p:spTree>
@@ -10314,7 +10467,7 @@
 </p:sld>
 </file>
 
-<file path=ppt/slides/slide15.xml><?xml version="1.0" encoding="utf-8"?>
+<file path=ppt/slides/slide19.xml><?xml version="1.0" encoding="utf-8"?>
 <p:sld xmlns:a="http://schemas.openxmlformats.org/drawingml/2006/main" xmlns:r="http://schemas.openxmlformats.org/officeDocument/2006/relationships" xmlns:p="http://schemas.openxmlformats.org/presentationml/2006/main">
   <p:cSld>
     <p:spTree>
@@ -11054,7 +11207,605 @@
 </p:sld>
 </file>
 
-<file path=ppt/slides/slide16.xml><?xml version="1.0" encoding="utf-8"?>
+<file path=ppt/slides/slide2.xml><?xml version="1.0" encoding="utf-8"?>
+<p:sld xmlns:a="http://schemas.openxmlformats.org/drawingml/2006/main" xmlns:r="http://schemas.openxmlformats.org/officeDocument/2006/relationships" xmlns:p="http://schemas.openxmlformats.org/presentationml/2006/main">
+  <p:cSld>
+    <p:bg>
+      <p:bgPr>
+        <a:solidFill>
+          <a:srgbClr val="F8FAFC"/>
+        </a:solidFill>
+        <a:effectLst/>
+      </p:bgPr>
+    </p:bg>
+    <p:spTree>
+      <p:nvGrpSpPr>
+        <p:cNvPr id="1" name=""/>
+        <p:cNvGrpSpPr/>
+        <p:nvPr/>
+      </p:nvGrpSpPr>
+      <p:grpSpPr>
+        <a:xfrm>
+          <a:off x="0" y="0"/>
+          <a:ext cx="0" cy="0"/>
+          <a:chOff x="0" y="0"/>
+          <a:chExt cx="0" cy="0"/>
+        </a:xfrm>
+      </p:grpSpPr>
+      <p:pic>
+        <p:nvPicPr>
+          <p:cNvPr id="3" name="Imagen 2">
+            <a:extLst>
+              <a:ext uri="{FF2B5EF4-FFF2-40B4-BE49-F238E27FC236}">
+                <a16:creationId xmlns:a16="http://schemas.microsoft.com/office/drawing/2014/main" id="{2F54F4AC-9F92-43B3-B499-7AC2EF5AA988}"/>
+              </a:ext>
+            </a:extLst>
+          </p:cNvPr>
+          <p:cNvPicPr>
+            <a:picLocks noChangeAspect="1"/>
+          </p:cNvPicPr>
+          <p:nvPr/>
+        </p:nvPicPr>
+        <p:blipFill>
+          <a:blip r:embed="rId2"/>
+          <a:stretch>
+            <a:fillRect/>
+          </a:stretch>
+        </p:blipFill>
+        <p:spPr>
+          <a:xfrm>
+            <a:off x="633984" y="2067552"/>
+            <a:ext cx="5815520" cy="2845190"/>
+          </a:xfrm>
+          <a:prstGeom prst="rect">
+            <a:avLst/>
+          </a:prstGeom>
+        </p:spPr>
+      </p:pic>
+      <p:pic>
+        <p:nvPicPr>
+          <p:cNvPr id="22" name="Imagen 21">
+            <a:extLst>
+              <a:ext uri="{FF2B5EF4-FFF2-40B4-BE49-F238E27FC236}">
+                <a16:creationId xmlns:a16="http://schemas.microsoft.com/office/drawing/2014/main" id="{9FA2EB0D-A648-47A6-A00C-278C88C86C9E}"/>
+              </a:ext>
+            </a:extLst>
+          </p:cNvPr>
+          <p:cNvPicPr>
+            <a:picLocks noChangeAspect="1"/>
+          </p:cNvPicPr>
+          <p:nvPr/>
+        </p:nvPicPr>
+        <p:blipFill>
+          <a:blip r:embed="rId3"/>
+          <a:stretch>
+            <a:fillRect/>
+          </a:stretch>
+        </p:blipFill>
+        <p:spPr>
+          <a:xfrm>
+            <a:off x="256031" y="249936"/>
+            <a:ext cx="6742177" cy="1695673"/>
+          </a:xfrm>
+          <a:prstGeom prst="rect">
+            <a:avLst/>
+          </a:prstGeom>
+        </p:spPr>
+      </p:pic>
+      <p:pic>
+        <p:nvPicPr>
+          <p:cNvPr id="8" name="Imagen 7">
+            <a:extLst>
+              <a:ext uri="{FF2B5EF4-FFF2-40B4-BE49-F238E27FC236}">
+                <a16:creationId xmlns:a16="http://schemas.microsoft.com/office/drawing/2014/main" id="{4E96D241-1E04-4541-A8B8-DA6A9FB1116D}"/>
+              </a:ext>
+            </a:extLst>
+          </p:cNvPr>
+          <p:cNvPicPr>
+            <a:picLocks noChangeAspect="1"/>
+          </p:cNvPicPr>
+          <p:nvPr/>
+        </p:nvPicPr>
+        <p:blipFill>
+          <a:blip r:embed="rId4"/>
+          <a:stretch>
+            <a:fillRect/>
+          </a:stretch>
+        </p:blipFill>
+        <p:spPr>
+          <a:xfrm>
+            <a:off x="256031" y="5577165"/>
+            <a:ext cx="6742178" cy="1695674"/>
+          </a:xfrm>
+          <a:prstGeom prst="rect">
+            <a:avLst/>
+          </a:prstGeom>
+        </p:spPr>
+      </p:pic>
+      <p:cxnSp>
+        <p:nvCxnSpPr>
+          <p:cNvPr id="28" name="Conector recto 27">
+            <a:extLst>
+              <a:ext uri="{FF2B5EF4-FFF2-40B4-BE49-F238E27FC236}">
+                <a16:creationId xmlns:a16="http://schemas.microsoft.com/office/drawing/2014/main" id="{24D6C797-A950-45AC-9D22-18DA1EA07A8E}"/>
+              </a:ext>
+            </a:extLst>
+          </p:cNvPr>
+          <p:cNvCxnSpPr>
+            <a:cxnSpLocks/>
+          </p:cNvCxnSpPr>
+          <p:nvPr/>
+        </p:nvCxnSpPr>
+        <p:spPr>
+          <a:xfrm>
+            <a:off x="304800" y="5127656"/>
+            <a:ext cx="6492240" cy="0"/>
+          </a:xfrm>
+          <a:prstGeom prst="line">
+            <a:avLst/>
+          </a:prstGeom>
+          <a:effectLst>
+            <a:outerShdw blurRad="50800" dist="38100" dir="2700000" algn="tl" rotWithShape="0">
+              <a:prstClr val="black">
+                <a:alpha val="40000"/>
+              </a:prstClr>
+            </a:outerShdw>
+          </a:effectLst>
+        </p:spPr>
+        <p:style>
+          <a:lnRef idx="2">
+            <a:schemeClr val="accent3"/>
+          </a:lnRef>
+          <a:fillRef idx="0">
+            <a:schemeClr val="accent3"/>
+          </a:fillRef>
+          <a:effectRef idx="1">
+            <a:schemeClr val="accent3"/>
+          </a:effectRef>
+          <a:fontRef idx="minor">
+            <a:schemeClr val="tx1"/>
+          </a:fontRef>
+        </p:style>
+      </p:cxnSp>
+      <p:pic>
+        <p:nvPicPr>
+          <p:cNvPr id="12" name="Imagen 11">
+            <a:extLst>
+              <a:ext uri="{FF2B5EF4-FFF2-40B4-BE49-F238E27FC236}">
+                <a16:creationId xmlns:a16="http://schemas.microsoft.com/office/drawing/2014/main" id="{ABA41A7A-D602-4C5C-A689-58DF8144DE05}"/>
+              </a:ext>
+            </a:extLst>
+          </p:cNvPr>
+          <p:cNvPicPr>
+            <a:picLocks noChangeAspect="1"/>
+          </p:cNvPicPr>
+          <p:nvPr/>
+        </p:nvPicPr>
+        <p:blipFill>
+          <a:blip r:embed="rId5"/>
+          <a:stretch>
+            <a:fillRect/>
+          </a:stretch>
+        </p:blipFill>
+        <p:spPr>
+          <a:xfrm>
+            <a:off x="640080" y="7612619"/>
+            <a:ext cx="1622719" cy="1148768"/>
+          </a:xfrm>
+          <a:prstGeom prst="rect">
+            <a:avLst/>
+          </a:prstGeom>
+        </p:spPr>
+      </p:pic>
+      <p:pic>
+        <p:nvPicPr>
+          <p:cNvPr id="32" name="Imagen 31">
+            <a:extLst>
+              <a:ext uri="{FF2B5EF4-FFF2-40B4-BE49-F238E27FC236}">
+                <a16:creationId xmlns:a16="http://schemas.microsoft.com/office/drawing/2014/main" id="{78C4045F-ADA4-4686-8857-4D13F493F66E}"/>
+              </a:ext>
+            </a:extLst>
+          </p:cNvPr>
+          <p:cNvPicPr>
+            <a:picLocks noChangeAspect="1"/>
+          </p:cNvPicPr>
+          <p:nvPr/>
+        </p:nvPicPr>
+        <p:blipFill>
+          <a:blip r:embed="rId6">
+            <a:extLst>
+              <a:ext uri="{28A0092B-C50C-407E-A947-70E740481C1C}">
+                <a14:useLocalDpi xmlns:a14="http://schemas.microsoft.com/office/drawing/2010/main" val="0"/>
+              </a:ext>
+            </a:extLst>
+          </a:blip>
+          <a:stretch>
+            <a:fillRect/>
+          </a:stretch>
+        </p:blipFill>
+        <p:spPr>
+          <a:xfrm rot="19226722">
+            <a:off x="728471" y="8042422"/>
+            <a:ext cx="244706" cy="244706"/>
+          </a:xfrm>
+          <a:prstGeom prst="rect">
+            <a:avLst/>
+          </a:prstGeom>
+          <a:effectLst>
+            <a:glow rad="63500">
+              <a:schemeClr val="accent6">
+                <a:satMod val="175000"/>
+                <a:alpha val="40000"/>
+              </a:schemeClr>
+            </a:glow>
+            <a:outerShdw blurRad="50800" dist="38100" dir="2700000" algn="tl" rotWithShape="0">
+              <a:prstClr val="black">
+                <a:alpha val="40000"/>
+              </a:prstClr>
+            </a:outerShdw>
+          </a:effectLst>
+        </p:spPr>
+      </p:pic>
+      <p:pic>
+        <p:nvPicPr>
+          <p:cNvPr id="14" name="Imagen 13">
+            <a:extLst>
+              <a:ext uri="{FF2B5EF4-FFF2-40B4-BE49-F238E27FC236}">
+                <a16:creationId xmlns:a16="http://schemas.microsoft.com/office/drawing/2014/main" id="{E59C1B76-AA00-44EA-A797-13BD4CBE7397}"/>
+              </a:ext>
+            </a:extLst>
+          </p:cNvPr>
+          <p:cNvPicPr>
+            <a:picLocks noChangeAspect="1"/>
+          </p:cNvPicPr>
+          <p:nvPr/>
+        </p:nvPicPr>
+        <p:blipFill>
+          <a:blip r:embed="rId7"/>
+          <a:stretch>
+            <a:fillRect/>
+          </a:stretch>
+        </p:blipFill>
+        <p:spPr>
+          <a:xfrm>
+            <a:off x="2768767" y="7612620"/>
+            <a:ext cx="1640136" cy="1148768"/>
+          </a:xfrm>
+          <a:prstGeom prst="rect">
+            <a:avLst/>
+          </a:prstGeom>
+        </p:spPr>
+      </p:pic>
+      <p:pic>
+        <p:nvPicPr>
+          <p:cNvPr id="36" name="Imagen 35">
+            <a:extLst>
+              <a:ext uri="{FF2B5EF4-FFF2-40B4-BE49-F238E27FC236}">
+                <a16:creationId xmlns:a16="http://schemas.microsoft.com/office/drawing/2014/main" id="{B919CD8D-FE2F-4A4F-9D4C-2E0C7C87ABCC}"/>
+              </a:ext>
+            </a:extLst>
+          </p:cNvPr>
+          <p:cNvPicPr>
+            <a:picLocks noChangeAspect="1"/>
+          </p:cNvPicPr>
+          <p:nvPr/>
+        </p:nvPicPr>
+        <p:blipFill>
+          <a:blip r:embed="rId6">
+            <a:extLst>
+              <a:ext uri="{28A0092B-C50C-407E-A947-70E740481C1C}">
+                <a14:useLocalDpi xmlns:a14="http://schemas.microsoft.com/office/drawing/2010/main" val="0"/>
+              </a:ext>
+            </a:extLst>
+          </a:blip>
+          <a:stretch>
+            <a:fillRect/>
+          </a:stretch>
+        </p:blipFill>
+        <p:spPr>
+          <a:xfrm rot="19226722">
+            <a:off x="3655970" y="8064649"/>
+            <a:ext cx="244706" cy="244706"/>
+          </a:xfrm>
+          <a:prstGeom prst="rect">
+            <a:avLst/>
+          </a:prstGeom>
+          <a:effectLst>
+            <a:glow rad="63500">
+              <a:schemeClr val="accent6">
+                <a:satMod val="175000"/>
+                <a:alpha val="40000"/>
+              </a:schemeClr>
+            </a:glow>
+            <a:outerShdw blurRad="50800" dist="38100" dir="2700000" algn="tl" rotWithShape="0">
+              <a:prstClr val="black">
+                <a:alpha val="40000"/>
+              </a:prstClr>
+            </a:outerShdw>
+          </a:effectLst>
+        </p:spPr>
+      </p:pic>
+      <p:pic>
+        <p:nvPicPr>
+          <p:cNvPr id="40" name="Imagen 39">
+            <a:extLst>
+              <a:ext uri="{FF2B5EF4-FFF2-40B4-BE49-F238E27FC236}">
+                <a16:creationId xmlns:a16="http://schemas.microsoft.com/office/drawing/2014/main" id="{F3614D5F-7E0C-4220-BA67-CA9856EFE1E9}"/>
+              </a:ext>
+            </a:extLst>
+          </p:cNvPr>
+          <p:cNvPicPr>
+            <a:picLocks noChangeAspect="1"/>
+          </p:cNvPicPr>
+          <p:nvPr/>
+        </p:nvPicPr>
+        <p:blipFill>
+          <a:blip r:embed="rId7"/>
+          <a:stretch>
+            <a:fillRect/>
+          </a:stretch>
+        </p:blipFill>
+        <p:spPr>
+          <a:xfrm>
+            <a:off x="4892342" y="7612619"/>
+            <a:ext cx="1640136" cy="1148768"/>
+          </a:xfrm>
+          <a:prstGeom prst="rect">
+            <a:avLst/>
+          </a:prstGeom>
+        </p:spPr>
+      </p:pic>
+      <p:pic>
+        <p:nvPicPr>
+          <p:cNvPr id="42" name="Imagen 41">
+            <a:extLst>
+              <a:ext uri="{FF2B5EF4-FFF2-40B4-BE49-F238E27FC236}">
+                <a16:creationId xmlns:a16="http://schemas.microsoft.com/office/drawing/2014/main" id="{820CDF0A-2E11-425A-9584-03BE1EED838E}"/>
+              </a:ext>
+            </a:extLst>
+          </p:cNvPr>
+          <p:cNvPicPr>
+            <a:picLocks noChangeAspect="1"/>
+          </p:cNvPicPr>
+          <p:nvPr/>
+        </p:nvPicPr>
+        <p:blipFill>
+          <a:blip r:embed="rId6">
+            <a:extLst>
+              <a:ext uri="{28A0092B-C50C-407E-A947-70E740481C1C}">
+                <a14:useLocalDpi xmlns:a14="http://schemas.microsoft.com/office/drawing/2010/main" val="0"/>
+              </a:ext>
+            </a:extLst>
+          </a:blip>
+          <a:stretch>
+            <a:fillRect/>
+          </a:stretch>
+        </p:blipFill>
+        <p:spPr>
+          <a:xfrm rot="15003197">
+            <a:off x="4949765" y="8478594"/>
+            <a:ext cx="244706" cy="244706"/>
+          </a:xfrm>
+          <a:prstGeom prst="rect">
+            <a:avLst/>
+          </a:prstGeom>
+          <a:effectLst>
+            <a:glow rad="63500">
+              <a:schemeClr val="accent6">
+                <a:satMod val="175000"/>
+                <a:alpha val="40000"/>
+              </a:schemeClr>
+            </a:glow>
+            <a:outerShdw blurRad="50800" dist="38100" dir="2700000" algn="tl" rotWithShape="0">
+              <a:prstClr val="black">
+                <a:alpha val="40000"/>
+              </a:prstClr>
+            </a:outerShdw>
+          </a:effectLst>
+        </p:spPr>
+      </p:pic>
+      <p:pic>
+        <p:nvPicPr>
+          <p:cNvPr id="44" name="Imagen 43">
+            <a:extLst>
+              <a:ext uri="{FF2B5EF4-FFF2-40B4-BE49-F238E27FC236}">
+                <a16:creationId xmlns:a16="http://schemas.microsoft.com/office/drawing/2014/main" id="{17E89347-1DC0-45EC-9318-0572CA2FB756}"/>
+              </a:ext>
+            </a:extLst>
+          </p:cNvPr>
+          <p:cNvPicPr>
+            <a:picLocks noChangeAspect="1"/>
+          </p:cNvPicPr>
+          <p:nvPr/>
+        </p:nvPicPr>
+        <p:blipFill>
+          <a:blip r:embed="rId8">
+            <a:extLst>
+              <a:ext uri="{28A0092B-C50C-407E-A947-70E740481C1C}">
+                <a14:useLocalDpi xmlns:a14="http://schemas.microsoft.com/office/drawing/2010/main" val="0"/>
+              </a:ext>
+            </a:extLst>
+          </a:blip>
+          <a:stretch>
+            <a:fillRect/>
+          </a:stretch>
+        </p:blipFill>
+        <p:spPr>
+          <a:xfrm>
+            <a:off x="478149" y="7582446"/>
+            <a:ext cx="200422" cy="200422"/>
+          </a:xfrm>
+          <a:prstGeom prst="rect">
+            <a:avLst/>
+          </a:prstGeom>
+          <a:effectLst>
+            <a:outerShdw blurRad="50800" dist="38100" dir="2700000" algn="tl" rotWithShape="0">
+              <a:prstClr val="black">
+                <a:alpha val="40000"/>
+              </a:prstClr>
+            </a:outerShdw>
+          </a:effectLst>
+        </p:spPr>
+      </p:pic>
+      <p:pic>
+        <p:nvPicPr>
+          <p:cNvPr id="46" name="Imagen 45">
+            <a:extLst>
+              <a:ext uri="{FF2B5EF4-FFF2-40B4-BE49-F238E27FC236}">
+                <a16:creationId xmlns:a16="http://schemas.microsoft.com/office/drawing/2014/main" id="{A92BAA77-73BE-48A4-9965-D8BFBB65C850}"/>
+              </a:ext>
+            </a:extLst>
+          </p:cNvPr>
+          <p:cNvPicPr>
+            <a:picLocks noChangeAspect="1"/>
+          </p:cNvPicPr>
+          <p:nvPr/>
+        </p:nvPicPr>
+        <p:blipFill>
+          <a:blip r:embed="rId9">
+            <a:extLst>
+              <a:ext uri="{28A0092B-C50C-407E-A947-70E740481C1C}">
+                <a14:useLocalDpi xmlns:a14="http://schemas.microsoft.com/office/drawing/2010/main" val="0"/>
+              </a:ext>
+            </a:extLst>
+          </a:blip>
+          <a:stretch>
+            <a:fillRect/>
+          </a:stretch>
+        </p:blipFill>
+        <p:spPr>
+          <a:xfrm>
+            <a:off x="2588067" y="7585479"/>
+            <a:ext cx="197389" cy="197389"/>
+          </a:xfrm>
+          <a:prstGeom prst="rect">
+            <a:avLst/>
+          </a:prstGeom>
+          <a:effectLst>
+            <a:outerShdw blurRad="50800" dist="38100" dir="2700000" algn="tl" rotWithShape="0">
+              <a:prstClr val="black">
+                <a:alpha val="40000"/>
+              </a:prstClr>
+            </a:outerShdw>
+          </a:effectLst>
+        </p:spPr>
+      </p:pic>
+      <p:pic>
+        <p:nvPicPr>
+          <p:cNvPr id="48" name="Imagen 47">
+            <a:extLst>
+              <a:ext uri="{FF2B5EF4-FFF2-40B4-BE49-F238E27FC236}">
+                <a16:creationId xmlns:a16="http://schemas.microsoft.com/office/drawing/2014/main" id="{B13B02A0-32F0-493D-A736-69FAC055EB32}"/>
+              </a:ext>
+            </a:extLst>
+          </p:cNvPr>
+          <p:cNvPicPr>
+            <a:picLocks noChangeAspect="1"/>
+          </p:cNvPicPr>
+          <p:nvPr/>
+        </p:nvPicPr>
+        <p:blipFill>
+          <a:blip r:embed="rId10">
+            <a:extLst>
+              <a:ext uri="{28A0092B-C50C-407E-A947-70E740481C1C}">
+                <a14:useLocalDpi xmlns:a14="http://schemas.microsoft.com/office/drawing/2010/main" val="0"/>
+              </a:ext>
+            </a:extLst>
+          </a:blip>
+          <a:stretch>
+            <a:fillRect/>
+          </a:stretch>
+        </p:blipFill>
+        <p:spPr>
+          <a:xfrm>
+            <a:off x="4714448" y="7582445"/>
+            <a:ext cx="200423" cy="200423"/>
+          </a:xfrm>
+          <a:prstGeom prst="rect">
+            <a:avLst/>
+          </a:prstGeom>
+          <a:effectLst>
+            <a:outerShdw blurRad="50800" dist="38100" dir="2700000" algn="tl" rotWithShape="0">
+              <a:prstClr val="black">
+                <a:alpha val="40000"/>
+              </a:prstClr>
+            </a:outerShdw>
+          </a:effectLst>
+        </p:spPr>
+      </p:pic>
+      <p:sp>
+        <p:nvSpPr>
+          <p:cNvPr id="50" name="Marco 49">
+            <a:extLst>
+              <a:ext uri="{FF2B5EF4-FFF2-40B4-BE49-F238E27FC236}">
+                <a16:creationId xmlns:a16="http://schemas.microsoft.com/office/drawing/2014/main" id="{097DEB69-A343-41DE-BD07-A9599CF36BBE}"/>
+              </a:ext>
+            </a:extLst>
+          </p:cNvPr>
+          <p:cNvSpPr/>
+          <p:nvPr/>
+        </p:nvSpPr>
+        <p:spPr>
+          <a:xfrm>
+            <a:off x="633984" y="2050363"/>
+            <a:ext cx="5815520" cy="2876126"/>
+          </a:xfrm>
+          <a:prstGeom prst="frame">
+            <a:avLst>
+              <a:gd name="adj1" fmla="val 568"/>
+            </a:avLst>
+          </a:prstGeom>
+          <a:scene3d>
+            <a:camera prst="orthographicFront"/>
+            <a:lightRig rig="threePt" dir="t"/>
+          </a:scene3d>
+          <a:sp3d>
+            <a:bevelT prst="slope"/>
+          </a:sp3d>
+        </p:spPr>
+        <p:style>
+          <a:lnRef idx="2">
+            <a:schemeClr val="accent1">
+              <a:shade val="50000"/>
+            </a:schemeClr>
+          </a:lnRef>
+          <a:fillRef idx="1">
+            <a:schemeClr val="accent1"/>
+          </a:fillRef>
+          <a:effectRef idx="0">
+            <a:schemeClr val="accent1"/>
+          </a:effectRef>
+          <a:fontRef idx="minor">
+            <a:schemeClr val="lt1"/>
+          </a:fontRef>
+        </p:style>
+        <p:txBody>
+          <a:bodyPr rtlCol="0" anchor="ctr"/>
+          <a:lstStyle/>
+          <a:p>
+            <a:pPr algn="ctr"/>
+            <a:endParaRPr lang="es-ES">
+              <a:solidFill>
+                <a:schemeClr val="tx1"/>
+              </a:solidFill>
+            </a:endParaRPr>
+          </a:p>
+        </p:txBody>
+      </p:sp>
+    </p:spTree>
+    <p:extLst>
+      <p:ext uri="{BB962C8B-B14F-4D97-AF65-F5344CB8AC3E}">
+        <p14:creationId xmlns:p14="http://schemas.microsoft.com/office/powerpoint/2010/main" val="668992840"/>
+      </p:ext>
+    </p:extLst>
+  </p:cSld>
+  <p:clrMapOvr>
+    <a:masterClrMapping/>
+  </p:clrMapOvr>
+</p:sld>
+</file>
+
+<file path=ppt/slides/slide20.xml><?xml version="1.0" encoding="utf-8"?>
 <p:sld xmlns:a="http://schemas.openxmlformats.org/drawingml/2006/main" xmlns:r="http://schemas.openxmlformats.org/officeDocument/2006/relationships" xmlns:p="http://schemas.openxmlformats.org/presentationml/2006/main">
   <p:cSld>
     <p:spTree>
@@ -11978,7 +12729,7 @@
 </p:sld>
 </file>
 
-<file path=ppt/slides/slide17.xml><?xml version="1.0" encoding="utf-8"?>
+<file path=ppt/slides/slide21.xml><?xml version="1.0" encoding="utf-8"?>
 <p:sld xmlns:a="http://schemas.openxmlformats.org/drawingml/2006/main" xmlns:r="http://schemas.openxmlformats.org/officeDocument/2006/relationships" xmlns:p="http://schemas.openxmlformats.org/presentationml/2006/main">
   <p:cSld>
     <p:spTree>
@@ -13676,7 +14427,7 @@
 </p:sld>
 </file>
 
-<file path=ppt/slides/slide18.xml><?xml version="1.0" encoding="utf-8"?>
+<file path=ppt/slides/slide22.xml><?xml version="1.0" encoding="utf-8"?>
 <p:sld xmlns:a="http://schemas.openxmlformats.org/drawingml/2006/main" xmlns:r="http://schemas.openxmlformats.org/officeDocument/2006/relationships" xmlns:p="http://schemas.openxmlformats.org/presentationml/2006/main">
   <p:cSld>
     <p:spTree>
@@ -14239,545 +14990,6 @@
 </p:sld>
 </file>
 
-<file path=ppt/slides/slide2.xml><?xml version="1.0" encoding="utf-8"?>
-<p:sld xmlns:a="http://schemas.openxmlformats.org/drawingml/2006/main" xmlns:r="http://schemas.openxmlformats.org/officeDocument/2006/relationships" xmlns:p="http://schemas.openxmlformats.org/presentationml/2006/main">
-  <p:cSld>
-    <p:bg>
-      <p:bgPr>
-        <a:solidFill>
-          <a:srgbClr val="F8FAFC"/>
-        </a:solidFill>
-        <a:effectLst/>
-      </p:bgPr>
-    </p:bg>
-    <p:spTree>
-      <p:nvGrpSpPr>
-        <p:cNvPr id="1" name=""/>
-        <p:cNvGrpSpPr/>
-        <p:nvPr/>
-      </p:nvGrpSpPr>
-      <p:grpSpPr>
-        <a:xfrm>
-          <a:off x="0" y="0"/>
-          <a:ext cx="0" cy="0"/>
-          <a:chOff x="0" y="0"/>
-          <a:chExt cx="0" cy="0"/>
-        </a:xfrm>
-      </p:grpSpPr>
-      <p:pic>
-        <p:nvPicPr>
-          <p:cNvPr id="3" name="Imagen 2">
-            <a:extLst>
-              <a:ext uri="{FF2B5EF4-FFF2-40B4-BE49-F238E27FC236}">
-                <a16:creationId xmlns:a16="http://schemas.microsoft.com/office/drawing/2014/main" id="{2F54F4AC-9F92-43B3-B499-7AC2EF5AA988}"/>
-              </a:ext>
-            </a:extLst>
-          </p:cNvPr>
-          <p:cNvPicPr>
-            <a:picLocks noChangeAspect="1"/>
-          </p:cNvPicPr>
-          <p:nvPr/>
-        </p:nvPicPr>
-        <p:blipFill>
-          <a:blip r:embed="rId2"/>
-          <a:stretch>
-            <a:fillRect/>
-          </a:stretch>
-        </p:blipFill>
-        <p:spPr>
-          <a:xfrm>
-            <a:off x="633984" y="2067552"/>
-            <a:ext cx="5815520" cy="2845190"/>
-          </a:xfrm>
-          <a:prstGeom prst="rect">
-            <a:avLst/>
-          </a:prstGeom>
-        </p:spPr>
-      </p:pic>
-      <p:pic>
-        <p:nvPicPr>
-          <p:cNvPr id="22" name="Imagen 21">
-            <a:extLst>
-              <a:ext uri="{FF2B5EF4-FFF2-40B4-BE49-F238E27FC236}">
-                <a16:creationId xmlns:a16="http://schemas.microsoft.com/office/drawing/2014/main" id="{9FA2EB0D-A648-47A6-A00C-278C88C86C9E}"/>
-              </a:ext>
-            </a:extLst>
-          </p:cNvPr>
-          <p:cNvPicPr>
-            <a:picLocks noChangeAspect="1"/>
-          </p:cNvPicPr>
-          <p:nvPr/>
-        </p:nvPicPr>
-        <p:blipFill>
-          <a:blip r:embed="rId3"/>
-          <a:stretch>
-            <a:fillRect/>
-          </a:stretch>
-        </p:blipFill>
-        <p:spPr>
-          <a:xfrm>
-            <a:off x="256031" y="249936"/>
-            <a:ext cx="6742177" cy="1695673"/>
-          </a:xfrm>
-          <a:prstGeom prst="rect">
-            <a:avLst/>
-          </a:prstGeom>
-        </p:spPr>
-      </p:pic>
-      <p:pic>
-        <p:nvPicPr>
-          <p:cNvPr id="8" name="Imagen 7">
-            <a:extLst>
-              <a:ext uri="{FF2B5EF4-FFF2-40B4-BE49-F238E27FC236}">
-                <a16:creationId xmlns:a16="http://schemas.microsoft.com/office/drawing/2014/main" id="{4E96D241-1E04-4541-A8B8-DA6A9FB1116D}"/>
-              </a:ext>
-            </a:extLst>
-          </p:cNvPr>
-          <p:cNvPicPr>
-            <a:picLocks noChangeAspect="1"/>
-          </p:cNvPicPr>
-          <p:nvPr/>
-        </p:nvPicPr>
-        <p:blipFill>
-          <a:blip r:embed="rId4"/>
-          <a:stretch>
-            <a:fillRect/>
-          </a:stretch>
-        </p:blipFill>
-        <p:spPr>
-          <a:xfrm>
-            <a:off x="256031" y="5266269"/>
-            <a:ext cx="6742178" cy="1695674"/>
-          </a:xfrm>
-          <a:prstGeom prst="rect">
-            <a:avLst/>
-          </a:prstGeom>
-        </p:spPr>
-      </p:pic>
-      <p:cxnSp>
-        <p:nvCxnSpPr>
-          <p:cNvPr id="28" name="Conector recto 27">
-            <a:extLst>
-              <a:ext uri="{FF2B5EF4-FFF2-40B4-BE49-F238E27FC236}">
-                <a16:creationId xmlns:a16="http://schemas.microsoft.com/office/drawing/2014/main" id="{24D6C797-A950-45AC-9D22-18DA1EA07A8E}"/>
-              </a:ext>
-            </a:extLst>
-          </p:cNvPr>
-          <p:cNvCxnSpPr>
-            <a:cxnSpLocks/>
-          </p:cNvCxnSpPr>
-          <p:nvPr/>
-        </p:nvCxnSpPr>
-        <p:spPr>
-          <a:xfrm>
-            <a:off x="304800" y="5127656"/>
-            <a:ext cx="6492240" cy="0"/>
-          </a:xfrm>
-          <a:prstGeom prst="line">
-            <a:avLst/>
-          </a:prstGeom>
-          <a:effectLst>
-            <a:outerShdw blurRad="50800" dist="38100" dir="2700000" algn="tl" rotWithShape="0">
-              <a:prstClr val="black">
-                <a:alpha val="40000"/>
-              </a:prstClr>
-            </a:outerShdw>
-          </a:effectLst>
-        </p:spPr>
-        <p:style>
-          <a:lnRef idx="2">
-            <a:schemeClr val="accent3"/>
-          </a:lnRef>
-          <a:fillRef idx="0">
-            <a:schemeClr val="accent3"/>
-          </a:fillRef>
-          <a:effectRef idx="1">
-            <a:schemeClr val="accent3"/>
-          </a:effectRef>
-          <a:fontRef idx="minor">
-            <a:schemeClr val="tx1"/>
-          </a:fontRef>
-        </p:style>
-      </p:cxnSp>
-      <p:pic>
-        <p:nvPicPr>
-          <p:cNvPr id="12" name="Imagen 11">
-            <a:extLst>
-              <a:ext uri="{FF2B5EF4-FFF2-40B4-BE49-F238E27FC236}">
-                <a16:creationId xmlns:a16="http://schemas.microsoft.com/office/drawing/2014/main" id="{ABA41A7A-D602-4C5C-A689-58DF8144DE05}"/>
-              </a:ext>
-            </a:extLst>
-          </p:cNvPr>
-          <p:cNvPicPr>
-            <a:picLocks noChangeAspect="1"/>
-          </p:cNvPicPr>
-          <p:nvPr/>
-        </p:nvPicPr>
-        <p:blipFill>
-          <a:blip r:embed="rId5"/>
-          <a:stretch>
-            <a:fillRect/>
-          </a:stretch>
-        </p:blipFill>
-        <p:spPr>
-          <a:xfrm>
-            <a:off x="640080" y="7301723"/>
-            <a:ext cx="1622719" cy="1148768"/>
-          </a:xfrm>
-          <a:prstGeom prst="rect">
-            <a:avLst/>
-          </a:prstGeom>
-        </p:spPr>
-      </p:pic>
-      <p:pic>
-        <p:nvPicPr>
-          <p:cNvPr id="32" name="Imagen 31">
-            <a:extLst>
-              <a:ext uri="{FF2B5EF4-FFF2-40B4-BE49-F238E27FC236}">
-                <a16:creationId xmlns:a16="http://schemas.microsoft.com/office/drawing/2014/main" id="{78C4045F-ADA4-4686-8857-4D13F493F66E}"/>
-              </a:ext>
-            </a:extLst>
-          </p:cNvPr>
-          <p:cNvPicPr>
-            <a:picLocks noChangeAspect="1"/>
-          </p:cNvPicPr>
-          <p:nvPr/>
-        </p:nvPicPr>
-        <p:blipFill>
-          <a:blip r:embed="rId6">
-            <a:extLst>
-              <a:ext uri="{28A0092B-C50C-407E-A947-70E740481C1C}">
-                <a14:useLocalDpi xmlns:a14="http://schemas.microsoft.com/office/drawing/2010/main" val="0"/>
-              </a:ext>
-            </a:extLst>
-          </a:blip>
-          <a:stretch>
-            <a:fillRect/>
-          </a:stretch>
-        </p:blipFill>
-        <p:spPr>
-          <a:xfrm rot="19226722">
-            <a:off x="728471" y="7731526"/>
-            <a:ext cx="244706" cy="244706"/>
-          </a:xfrm>
-          <a:prstGeom prst="rect">
-            <a:avLst/>
-          </a:prstGeom>
-          <a:effectLst>
-            <a:glow rad="63500">
-              <a:schemeClr val="accent6">
-                <a:satMod val="175000"/>
-                <a:alpha val="40000"/>
-              </a:schemeClr>
-            </a:glow>
-            <a:outerShdw blurRad="50800" dist="38100" dir="2700000" algn="tl" rotWithShape="0">
-              <a:prstClr val="black">
-                <a:alpha val="40000"/>
-              </a:prstClr>
-            </a:outerShdw>
-          </a:effectLst>
-        </p:spPr>
-      </p:pic>
-      <p:pic>
-        <p:nvPicPr>
-          <p:cNvPr id="14" name="Imagen 13">
-            <a:extLst>
-              <a:ext uri="{FF2B5EF4-FFF2-40B4-BE49-F238E27FC236}">
-                <a16:creationId xmlns:a16="http://schemas.microsoft.com/office/drawing/2014/main" id="{E59C1B76-AA00-44EA-A797-13BD4CBE7397}"/>
-              </a:ext>
-            </a:extLst>
-          </p:cNvPr>
-          <p:cNvPicPr>
-            <a:picLocks noChangeAspect="1"/>
-          </p:cNvPicPr>
-          <p:nvPr/>
-        </p:nvPicPr>
-        <p:blipFill>
-          <a:blip r:embed="rId7"/>
-          <a:stretch>
-            <a:fillRect/>
-          </a:stretch>
-        </p:blipFill>
-        <p:spPr>
-          <a:xfrm>
-            <a:off x="2768767" y="7301724"/>
-            <a:ext cx="1640136" cy="1148768"/>
-          </a:xfrm>
-          <a:prstGeom prst="rect">
-            <a:avLst/>
-          </a:prstGeom>
-        </p:spPr>
-      </p:pic>
-      <p:pic>
-        <p:nvPicPr>
-          <p:cNvPr id="36" name="Imagen 35">
-            <a:extLst>
-              <a:ext uri="{FF2B5EF4-FFF2-40B4-BE49-F238E27FC236}">
-                <a16:creationId xmlns:a16="http://schemas.microsoft.com/office/drawing/2014/main" id="{B919CD8D-FE2F-4A4F-9D4C-2E0C7C87ABCC}"/>
-              </a:ext>
-            </a:extLst>
-          </p:cNvPr>
-          <p:cNvPicPr>
-            <a:picLocks noChangeAspect="1"/>
-          </p:cNvPicPr>
-          <p:nvPr/>
-        </p:nvPicPr>
-        <p:blipFill>
-          <a:blip r:embed="rId6">
-            <a:extLst>
-              <a:ext uri="{28A0092B-C50C-407E-A947-70E740481C1C}">
-                <a14:useLocalDpi xmlns:a14="http://schemas.microsoft.com/office/drawing/2010/main" val="0"/>
-              </a:ext>
-            </a:extLst>
-          </a:blip>
-          <a:stretch>
-            <a:fillRect/>
-          </a:stretch>
-        </p:blipFill>
-        <p:spPr>
-          <a:xfrm rot="19226722">
-            <a:off x="3655970" y="7753753"/>
-            <a:ext cx="244706" cy="244706"/>
-          </a:xfrm>
-          <a:prstGeom prst="rect">
-            <a:avLst/>
-          </a:prstGeom>
-          <a:effectLst>
-            <a:glow rad="63500">
-              <a:schemeClr val="accent6">
-                <a:satMod val="175000"/>
-                <a:alpha val="40000"/>
-              </a:schemeClr>
-            </a:glow>
-            <a:outerShdw blurRad="50800" dist="38100" dir="2700000" algn="tl" rotWithShape="0">
-              <a:prstClr val="black">
-                <a:alpha val="40000"/>
-              </a:prstClr>
-            </a:outerShdw>
-          </a:effectLst>
-        </p:spPr>
-      </p:pic>
-      <p:pic>
-        <p:nvPicPr>
-          <p:cNvPr id="40" name="Imagen 39">
-            <a:extLst>
-              <a:ext uri="{FF2B5EF4-FFF2-40B4-BE49-F238E27FC236}">
-                <a16:creationId xmlns:a16="http://schemas.microsoft.com/office/drawing/2014/main" id="{F3614D5F-7E0C-4220-BA67-CA9856EFE1E9}"/>
-              </a:ext>
-            </a:extLst>
-          </p:cNvPr>
-          <p:cNvPicPr>
-            <a:picLocks noChangeAspect="1"/>
-          </p:cNvPicPr>
-          <p:nvPr/>
-        </p:nvPicPr>
-        <p:blipFill>
-          <a:blip r:embed="rId7"/>
-          <a:stretch>
-            <a:fillRect/>
-          </a:stretch>
-        </p:blipFill>
-        <p:spPr>
-          <a:xfrm>
-            <a:off x="4892342" y="7301723"/>
-            <a:ext cx="1640136" cy="1148768"/>
-          </a:xfrm>
-          <a:prstGeom prst="rect">
-            <a:avLst/>
-          </a:prstGeom>
-        </p:spPr>
-      </p:pic>
-      <p:pic>
-        <p:nvPicPr>
-          <p:cNvPr id="42" name="Imagen 41">
-            <a:extLst>
-              <a:ext uri="{FF2B5EF4-FFF2-40B4-BE49-F238E27FC236}">
-                <a16:creationId xmlns:a16="http://schemas.microsoft.com/office/drawing/2014/main" id="{820CDF0A-2E11-425A-9584-03BE1EED838E}"/>
-              </a:ext>
-            </a:extLst>
-          </p:cNvPr>
-          <p:cNvPicPr>
-            <a:picLocks noChangeAspect="1"/>
-          </p:cNvPicPr>
-          <p:nvPr/>
-        </p:nvPicPr>
-        <p:blipFill>
-          <a:blip r:embed="rId6">
-            <a:extLst>
-              <a:ext uri="{28A0092B-C50C-407E-A947-70E740481C1C}">
-                <a14:useLocalDpi xmlns:a14="http://schemas.microsoft.com/office/drawing/2010/main" val="0"/>
-              </a:ext>
-            </a:extLst>
-          </a:blip>
-          <a:stretch>
-            <a:fillRect/>
-          </a:stretch>
-        </p:blipFill>
-        <p:spPr>
-          <a:xfrm rot="15003197">
-            <a:off x="4949765" y="8167698"/>
-            <a:ext cx="244706" cy="244706"/>
-          </a:xfrm>
-          <a:prstGeom prst="rect">
-            <a:avLst/>
-          </a:prstGeom>
-          <a:effectLst>
-            <a:glow rad="63500">
-              <a:schemeClr val="accent6">
-                <a:satMod val="175000"/>
-                <a:alpha val="40000"/>
-              </a:schemeClr>
-            </a:glow>
-            <a:outerShdw blurRad="50800" dist="38100" dir="2700000" algn="tl" rotWithShape="0">
-              <a:prstClr val="black">
-                <a:alpha val="40000"/>
-              </a:prstClr>
-            </a:outerShdw>
-          </a:effectLst>
-        </p:spPr>
-      </p:pic>
-      <p:pic>
-        <p:nvPicPr>
-          <p:cNvPr id="44" name="Imagen 43">
-            <a:extLst>
-              <a:ext uri="{FF2B5EF4-FFF2-40B4-BE49-F238E27FC236}">
-                <a16:creationId xmlns:a16="http://schemas.microsoft.com/office/drawing/2014/main" id="{17E89347-1DC0-45EC-9318-0572CA2FB756}"/>
-              </a:ext>
-            </a:extLst>
-          </p:cNvPr>
-          <p:cNvPicPr>
-            <a:picLocks noChangeAspect="1"/>
-          </p:cNvPicPr>
-          <p:nvPr/>
-        </p:nvPicPr>
-        <p:blipFill>
-          <a:blip r:embed="rId8">
-            <a:extLst>
-              <a:ext uri="{28A0092B-C50C-407E-A947-70E740481C1C}">
-                <a14:useLocalDpi xmlns:a14="http://schemas.microsoft.com/office/drawing/2010/main" val="0"/>
-              </a:ext>
-            </a:extLst>
-          </a:blip>
-          <a:stretch>
-            <a:fillRect/>
-          </a:stretch>
-        </p:blipFill>
-        <p:spPr>
-          <a:xfrm>
-            <a:off x="478149" y="7271550"/>
-            <a:ext cx="200422" cy="200422"/>
-          </a:xfrm>
-          <a:prstGeom prst="rect">
-            <a:avLst/>
-          </a:prstGeom>
-          <a:effectLst>
-            <a:outerShdw blurRad="50800" dist="38100" dir="2700000" algn="tl" rotWithShape="0">
-              <a:prstClr val="black">
-                <a:alpha val="40000"/>
-              </a:prstClr>
-            </a:outerShdw>
-          </a:effectLst>
-        </p:spPr>
-      </p:pic>
-      <p:pic>
-        <p:nvPicPr>
-          <p:cNvPr id="46" name="Imagen 45">
-            <a:extLst>
-              <a:ext uri="{FF2B5EF4-FFF2-40B4-BE49-F238E27FC236}">
-                <a16:creationId xmlns:a16="http://schemas.microsoft.com/office/drawing/2014/main" id="{A92BAA77-73BE-48A4-9965-D8BFBB65C850}"/>
-              </a:ext>
-            </a:extLst>
-          </p:cNvPr>
-          <p:cNvPicPr>
-            <a:picLocks noChangeAspect="1"/>
-          </p:cNvPicPr>
-          <p:nvPr/>
-        </p:nvPicPr>
-        <p:blipFill>
-          <a:blip r:embed="rId9">
-            <a:extLst>
-              <a:ext uri="{28A0092B-C50C-407E-A947-70E740481C1C}">
-                <a14:useLocalDpi xmlns:a14="http://schemas.microsoft.com/office/drawing/2010/main" val="0"/>
-              </a:ext>
-            </a:extLst>
-          </a:blip>
-          <a:stretch>
-            <a:fillRect/>
-          </a:stretch>
-        </p:blipFill>
-        <p:spPr>
-          <a:xfrm>
-            <a:off x="2588067" y="7274583"/>
-            <a:ext cx="197389" cy="197389"/>
-          </a:xfrm>
-          <a:prstGeom prst="rect">
-            <a:avLst/>
-          </a:prstGeom>
-          <a:effectLst>
-            <a:outerShdw blurRad="50800" dist="38100" dir="2700000" algn="tl" rotWithShape="0">
-              <a:prstClr val="black">
-                <a:alpha val="40000"/>
-              </a:prstClr>
-            </a:outerShdw>
-          </a:effectLst>
-        </p:spPr>
-      </p:pic>
-      <p:pic>
-        <p:nvPicPr>
-          <p:cNvPr id="48" name="Imagen 47">
-            <a:extLst>
-              <a:ext uri="{FF2B5EF4-FFF2-40B4-BE49-F238E27FC236}">
-                <a16:creationId xmlns:a16="http://schemas.microsoft.com/office/drawing/2014/main" id="{B13B02A0-32F0-493D-A736-69FAC055EB32}"/>
-              </a:ext>
-            </a:extLst>
-          </p:cNvPr>
-          <p:cNvPicPr>
-            <a:picLocks noChangeAspect="1"/>
-          </p:cNvPicPr>
-          <p:nvPr/>
-        </p:nvPicPr>
-        <p:blipFill>
-          <a:blip r:embed="rId10">
-            <a:extLst>
-              <a:ext uri="{28A0092B-C50C-407E-A947-70E740481C1C}">
-                <a14:useLocalDpi xmlns:a14="http://schemas.microsoft.com/office/drawing/2010/main" val="0"/>
-              </a:ext>
-            </a:extLst>
-          </a:blip>
-          <a:stretch>
-            <a:fillRect/>
-          </a:stretch>
-        </p:blipFill>
-        <p:spPr>
-          <a:xfrm>
-            <a:off x="4714448" y="7271549"/>
-            <a:ext cx="200423" cy="200423"/>
-          </a:xfrm>
-          <a:prstGeom prst="rect">
-            <a:avLst/>
-          </a:prstGeom>
-          <a:effectLst>
-            <a:outerShdw blurRad="50800" dist="38100" dir="2700000" algn="tl" rotWithShape="0">
-              <a:prstClr val="black">
-                <a:alpha val="40000"/>
-              </a:prstClr>
-            </a:outerShdw>
-          </a:effectLst>
-        </p:spPr>
-      </p:pic>
-    </p:spTree>
-    <p:extLst>
-      <p:ext uri="{BB962C8B-B14F-4D97-AF65-F5344CB8AC3E}">
-        <p14:creationId xmlns:p14="http://schemas.microsoft.com/office/powerpoint/2010/main" val="668992840"/>
-      </p:ext>
-    </p:extLst>
-  </p:cSld>
-  <p:clrMapOvr>
-    <a:masterClrMapping/>
-  </p:clrMapOvr>
-</p:sld>
-</file>
-
 <file path=ppt/slides/slide3.xml><?xml version="1.0" encoding="utf-8"?>
 <p:sld xmlns:a="http://schemas.openxmlformats.org/drawingml/2006/main" xmlns:r="http://schemas.openxmlformats.org/officeDocument/2006/relationships" xmlns:p="http://schemas.openxmlformats.org/presentationml/2006/main">
   <p:cSld>
@@ -15058,6 +15270,7 @@
           <a:prstGeom prst="rect">
             <a:avLst/>
           </a:prstGeom>
+          <a:effectLst/>
         </p:spPr>
       </p:pic>
       <p:pic>
@@ -15109,6 +15322,183 @@
           </a:effectLst>
         </p:spPr>
       </p:pic>
+      <p:sp>
+        <p:nvSpPr>
+          <p:cNvPr id="21" name="Marco 20">
+            <a:extLst>
+              <a:ext uri="{FF2B5EF4-FFF2-40B4-BE49-F238E27FC236}">
+                <a16:creationId xmlns:a16="http://schemas.microsoft.com/office/drawing/2014/main" id="{17CA6BFC-BBA8-4CA7-B3C2-543CEC1C3B5E}"/>
+              </a:ext>
+            </a:extLst>
+          </p:cNvPr>
+          <p:cNvSpPr/>
+          <p:nvPr/>
+        </p:nvSpPr>
+        <p:spPr>
+          <a:xfrm>
+            <a:off x="1075944" y="184986"/>
+            <a:ext cx="5105400" cy="3033699"/>
+          </a:xfrm>
+          <a:prstGeom prst="frame">
+            <a:avLst>
+              <a:gd name="adj1" fmla="val 568"/>
+            </a:avLst>
+          </a:prstGeom>
+          <a:scene3d>
+            <a:camera prst="orthographicFront"/>
+            <a:lightRig rig="threePt" dir="t"/>
+          </a:scene3d>
+          <a:sp3d>
+            <a:bevelT prst="slope"/>
+          </a:sp3d>
+        </p:spPr>
+        <p:style>
+          <a:lnRef idx="2">
+            <a:schemeClr val="accent1">
+              <a:shade val="50000"/>
+            </a:schemeClr>
+          </a:lnRef>
+          <a:fillRef idx="1">
+            <a:schemeClr val="accent1"/>
+          </a:fillRef>
+          <a:effectRef idx="0">
+            <a:schemeClr val="accent1"/>
+          </a:effectRef>
+          <a:fontRef idx="minor">
+            <a:schemeClr val="lt1"/>
+          </a:fontRef>
+        </p:style>
+        <p:txBody>
+          <a:bodyPr rtlCol="0" anchor="ctr"/>
+          <a:lstStyle/>
+          <a:p>
+            <a:pPr algn="ctr"/>
+            <a:endParaRPr lang="es-ES">
+              <a:solidFill>
+                <a:schemeClr val="tx1"/>
+              </a:solidFill>
+            </a:endParaRPr>
+          </a:p>
+        </p:txBody>
+      </p:sp>
+      <p:sp>
+        <p:nvSpPr>
+          <p:cNvPr id="22" name="Marco 21">
+            <a:extLst>
+              <a:ext uri="{FF2B5EF4-FFF2-40B4-BE49-F238E27FC236}">
+                <a16:creationId xmlns:a16="http://schemas.microsoft.com/office/drawing/2014/main" id="{6D5676FE-57E8-491F-89D6-6B9C9846F8E6}"/>
+              </a:ext>
+            </a:extLst>
+          </p:cNvPr>
+          <p:cNvSpPr/>
+          <p:nvPr/>
+        </p:nvSpPr>
+        <p:spPr>
+          <a:xfrm>
+            <a:off x="2351489" y="6222331"/>
+            <a:ext cx="4622335" cy="3056267"/>
+          </a:xfrm>
+          <a:prstGeom prst="frame">
+            <a:avLst>
+              <a:gd name="adj1" fmla="val 568"/>
+            </a:avLst>
+          </a:prstGeom>
+          <a:scene3d>
+            <a:camera prst="orthographicFront"/>
+            <a:lightRig rig="threePt" dir="t"/>
+          </a:scene3d>
+          <a:sp3d>
+            <a:bevelT prst="slope"/>
+          </a:sp3d>
+        </p:spPr>
+        <p:style>
+          <a:lnRef idx="2">
+            <a:schemeClr val="accent1">
+              <a:shade val="50000"/>
+            </a:schemeClr>
+          </a:lnRef>
+          <a:fillRef idx="1">
+            <a:schemeClr val="accent1"/>
+          </a:fillRef>
+          <a:effectRef idx="0">
+            <a:schemeClr val="accent1"/>
+          </a:effectRef>
+          <a:fontRef idx="minor">
+            <a:schemeClr val="lt1"/>
+          </a:fontRef>
+        </p:style>
+        <p:txBody>
+          <a:bodyPr rtlCol="0" anchor="ctr"/>
+          <a:lstStyle/>
+          <a:p>
+            <a:pPr algn="ctr"/>
+            <a:endParaRPr lang="es-ES">
+              <a:solidFill>
+                <a:schemeClr val="tx1"/>
+              </a:solidFill>
+            </a:endParaRPr>
+          </a:p>
+        </p:txBody>
+      </p:sp>
+      <p:sp>
+        <p:nvSpPr>
+          <p:cNvPr id="23" name="Marco 22">
+            <a:extLst>
+              <a:ext uri="{FF2B5EF4-FFF2-40B4-BE49-F238E27FC236}">
+                <a16:creationId xmlns:a16="http://schemas.microsoft.com/office/drawing/2014/main" id="{769839F8-124F-4A26-BFF0-9E17C57AB723}"/>
+              </a:ext>
+            </a:extLst>
+          </p:cNvPr>
+          <p:cNvSpPr/>
+          <p:nvPr/>
+        </p:nvSpPr>
+        <p:spPr>
+          <a:xfrm>
+            <a:off x="570408" y="6506237"/>
+            <a:ext cx="1505925" cy="380367"/>
+          </a:xfrm>
+          <a:prstGeom prst="frame">
+            <a:avLst>
+              <a:gd name="adj1" fmla="val 568"/>
+            </a:avLst>
+          </a:prstGeom>
+          <a:scene3d>
+            <a:camera prst="orthographicFront"/>
+            <a:lightRig rig="threePt" dir="t"/>
+          </a:scene3d>
+          <a:sp3d>
+            <a:bevelT prst="slope"/>
+          </a:sp3d>
+        </p:spPr>
+        <p:style>
+          <a:lnRef idx="2">
+            <a:schemeClr val="accent1">
+              <a:shade val="50000"/>
+            </a:schemeClr>
+          </a:lnRef>
+          <a:fillRef idx="1">
+            <a:schemeClr val="accent1"/>
+          </a:fillRef>
+          <a:effectRef idx="0">
+            <a:schemeClr val="accent1"/>
+          </a:effectRef>
+          <a:fontRef idx="minor">
+            <a:schemeClr val="lt1"/>
+          </a:fontRef>
+        </p:style>
+        <p:txBody>
+          <a:bodyPr rtlCol="0" anchor="ctr"/>
+          <a:lstStyle/>
+          <a:p>
+            <a:pPr algn="ctr"/>
+            <a:endParaRPr lang="es-ES">
+              <a:solidFill>
+                <a:schemeClr val="tx1"/>
+              </a:solidFill>
+            </a:endParaRPr>
+          </a:p>
+        </p:txBody>
+      </p:sp>
     </p:spTree>
     <p:extLst>
       <p:ext uri="{BB962C8B-B14F-4D97-AF65-F5344CB8AC3E}">
@@ -15147,6 +15537,858 @@
           <a:chExt cx="0" cy="0"/>
         </a:xfrm>
       </p:grpSpPr>
+      <p:pic>
+        <p:nvPicPr>
+          <p:cNvPr id="5" name="Imagen 4">
+            <a:extLst>
+              <a:ext uri="{FF2B5EF4-FFF2-40B4-BE49-F238E27FC236}">
+                <a16:creationId xmlns:a16="http://schemas.microsoft.com/office/drawing/2014/main" id="{2DD1BD7A-BBE1-4A6B-B956-14D8912AA622}"/>
+              </a:ext>
+            </a:extLst>
+          </p:cNvPr>
+          <p:cNvPicPr>
+            <a:picLocks noChangeAspect="1"/>
+          </p:cNvPicPr>
+          <p:nvPr/>
+        </p:nvPicPr>
+        <p:blipFill>
+          <a:blip r:embed="rId2"/>
+          <a:stretch>
+            <a:fillRect/>
+          </a:stretch>
+        </p:blipFill>
+        <p:spPr>
+          <a:xfrm>
+            <a:off x="292607" y="630088"/>
+            <a:ext cx="6906705" cy="669399"/>
+          </a:xfrm>
+          <a:prstGeom prst="rect">
+            <a:avLst/>
+          </a:prstGeom>
+        </p:spPr>
+      </p:pic>
+      <p:pic>
+        <p:nvPicPr>
+          <p:cNvPr id="7" name="Imagen 6">
+            <a:extLst>
+              <a:ext uri="{FF2B5EF4-FFF2-40B4-BE49-F238E27FC236}">
+                <a16:creationId xmlns:a16="http://schemas.microsoft.com/office/drawing/2014/main" id="{258D1301-D526-49DA-A1CA-5F29737C950B}"/>
+              </a:ext>
+            </a:extLst>
+          </p:cNvPr>
+          <p:cNvPicPr>
+            <a:picLocks noChangeAspect="1"/>
+          </p:cNvPicPr>
+          <p:nvPr/>
+        </p:nvPicPr>
+        <p:blipFill>
+          <a:blip r:embed="rId3"/>
+          <a:stretch>
+            <a:fillRect/>
+          </a:stretch>
+        </p:blipFill>
+        <p:spPr>
+          <a:xfrm>
+            <a:off x="2018285" y="1299487"/>
+            <a:ext cx="3162741" cy="476316"/>
+          </a:xfrm>
+          <a:prstGeom prst="rect">
+            <a:avLst/>
+          </a:prstGeom>
+        </p:spPr>
+      </p:pic>
+      <p:pic>
+        <p:nvPicPr>
+          <p:cNvPr id="8" name="Imagen 7">
+            <a:extLst>
+              <a:ext uri="{FF2B5EF4-FFF2-40B4-BE49-F238E27FC236}">
+                <a16:creationId xmlns:a16="http://schemas.microsoft.com/office/drawing/2014/main" id="{ED45566D-FD8A-41B8-AB83-DEF96EDCEC60}"/>
+              </a:ext>
+            </a:extLst>
+          </p:cNvPr>
+          <p:cNvPicPr>
+            <a:picLocks noChangeAspect="1"/>
+          </p:cNvPicPr>
+          <p:nvPr/>
+        </p:nvPicPr>
+        <p:blipFill>
+          <a:blip r:embed="rId4">
+            <a:extLst>
+              <a:ext uri="{28A0092B-C50C-407E-A947-70E740481C1C}">
+                <a14:useLocalDpi xmlns:a14="http://schemas.microsoft.com/office/drawing/2010/main" val="0"/>
+              </a:ext>
+            </a:extLst>
+          </a:blip>
+          <a:stretch>
+            <a:fillRect/>
+          </a:stretch>
+        </p:blipFill>
+        <p:spPr>
+          <a:xfrm rot="16200000">
+            <a:off x="1825751" y="1415292"/>
+            <a:ext cx="244706" cy="244706"/>
+          </a:xfrm>
+          <a:prstGeom prst="rect">
+            <a:avLst/>
+          </a:prstGeom>
+          <a:effectLst>
+            <a:glow rad="63500">
+              <a:schemeClr val="accent6">
+                <a:satMod val="175000"/>
+                <a:alpha val="40000"/>
+              </a:schemeClr>
+            </a:glow>
+            <a:outerShdw blurRad="50800" dist="38100" dir="2700000" algn="tl" rotWithShape="0">
+              <a:prstClr val="black">
+                <a:alpha val="40000"/>
+              </a:prstClr>
+            </a:outerShdw>
+          </a:effectLst>
+        </p:spPr>
+      </p:pic>
+      <p:sp>
+        <p:nvSpPr>
+          <p:cNvPr id="9" name="Marco 8">
+            <a:extLst>
+              <a:ext uri="{FF2B5EF4-FFF2-40B4-BE49-F238E27FC236}">
+                <a16:creationId xmlns:a16="http://schemas.microsoft.com/office/drawing/2014/main" id="{3C84420E-6DDE-4F33-8A56-499BB1B8237F}"/>
+              </a:ext>
+            </a:extLst>
+          </p:cNvPr>
+          <p:cNvSpPr/>
+          <p:nvPr/>
+        </p:nvSpPr>
+        <p:spPr>
+          <a:xfrm>
+            <a:off x="2070459" y="1347461"/>
+            <a:ext cx="3058398" cy="380367"/>
+          </a:xfrm>
+          <a:prstGeom prst="frame">
+            <a:avLst>
+              <a:gd name="adj1" fmla="val 568"/>
+            </a:avLst>
+          </a:prstGeom>
+          <a:scene3d>
+            <a:camera prst="orthographicFront"/>
+            <a:lightRig rig="threePt" dir="t"/>
+          </a:scene3d>
+          <a:sp3d>
+            <a:bevelT prst="slope"/>
+          </a:sp3d>
+        </p:spPr>
+        <p:style>
+          <a:lnRef idx="2">
+            <a:schemeClr val="accent1">
+              <a:shade val="50000"/>
+            </a:schemeClr>
+          </a:lnRef>
+          <a:fillRef idx="1">
+            <a:schemeClr val="accent1"/>
+          </a:fillRef>
+          <a:effectRef idx="0">
+            <a:schemeClr val="accent1"/>
+          </a:effectRef>
+          <a:fontRef idx="minor">
+            <a:schemeClr val="lt1"/>
+          </a:fontRef>
+        </p:style>
+        <p:txBody>
+          <a:bodyPr rtlCol="0" anchor="ctr"/>
+          <a:lstStyle/>
+          <a:p>
+            <a:pPr algn="ctr"/>
+            <a:endParaRPr lang="es-ES">
+              <a:solidFill>
+                <a:schemeClr val="tx1"/>
+              </a:solidFill>
+            </a:endParaRPr>
+          </a:p>
+        </p:txBody>
+      </p:sp>
+      <p:pic>
+        <p:nvPicPr>
+          <p:cNvPr id="11" name="Imagen 10">
+            <a:extLst>
+              <a:ext uri="{FF2B5EF4-FFF2-40B4-BE49-F238E27FC236}">
+                <a16:creationId xmlns:a16="http://schemas.microsoft.com/office/drawing/2014/main" id="{7F550286-19E5-4810-8C74-E5CE084CF394}"/>
+              </a:ext>
+            </a:extLst>
+          </p:cNvPr>
+          <p:cNvPicPr>
+            <a:picLocks noChangeAspect="1"/>
+          </p:cNvPicPr>
+          <p:nvPr/>
+        </p:nvPicPr>
+        <p:blipFill>
+          <a:blip r:embed="rId5"/>
+          <a:stretch>
+            <a:fillRect/>
+          </a:stretch>
+        </p:blipFill>
+        <p:spPr>
+          <a:xfrm>
+            <a:off x="292607" y="2126698"/>
+            <a:ext cx="6906706" cy="710159"/>
+          </a:xfrm>
+          <a:prstGeom prst="rect">
+            <a:avLst/>
+          </a:prstGeom>
+        </p:spPr>
+      </p:pic>
+      <p:pic>
+        <p:nvPicPr>
+          <p:cNvPr id="13" name="Imagen 12">
+            <a:extLst>
+              <a:ext uri="{FF2B5EF4-FFF2-40B4-BE49-F238E27FC236}">
+                <a16:creationId xmlns:a16="http://schemas.microsoft.com/office/drawing/2014/main" id="{CE282ECB-8D2F-405A-8163-DE7D03C8E438}"/>
+              </a:ext>
+            </a:extLst>
+          </p:cNvPr>
+          <p:cNvPicPr>
+            <a:picLocks noChangeAspect="1"/>
+          </p:cNvPicPr>
+          <p:nvPr/>
+        </p:nvPicPr>
+        <p:blipFill>
+          <a:blip r:embed="rId6"/>
+          <a:stretch>
+            <a:fillRect/>
+          </a:stretch>
+        </p:blipFill>
+        <p:spPr>
+          <a:xfrm>
+            <a:off x="2070905" y="2917781"/>
+            <a:ext cx="3057952" cy="466790"/>
+          </a:xfrm>
+          <a:prstGeom prst="rect">
+            <a:avLst/>
+          </a:prstGeom>
+        </p:spPr>
+      </p:pic>
+      <p:sp>
+        <p:nvSpPr>
+          <p:cNvPr id="14" name="Marco 13">
+            <a:extLst>
+              <a:ext uri="{FF2B5EF4-FFF2-40B4-BE49-F238E27FC236}">
+                <a16:creationId xmlns:a16="http://schemas.microsoft.com/office/drawing/2014/main" id="{32EF0A49-3880-4538-BD6D-27E4B786D34E}"/>
+              </a:ext>
+            </a:extLst>
+          </p:cNvPr>
+          <p:cNvSpPr/>
+          <p:nvPr/>
+        </p:nvSpPr>
+        <p:spPr>
+          <a:xfrm>
+            <a:off x="2088747" y="2904902"/>
+            <a:ext cx="3058398" cy="497957"/>
+          </a:xfrm>
+          <a:prstGeom prst="frame">
+            <a:avLst>
+              <a:gd name="adj1" fmla="val 568"/>
+            </a:avLst>
+          </a:prstGeom>
+          <a:scene3d>
+            <a:camera prst="orthographicFront"/>
+            <a:lightRig rig="threePt" dir="t"/>
+          </a:scene3d>
+          <a:sp3d>
+            <a:bevelT prst="slope"/>
+          </a:sp3d>
+        </p:spPr>
+        <p:style>
+          <a:lnRef idx="2">
+            <a:schemeClr val="accent1">
+              <a:shade val="50000"/>
+            </a:schemeClr>
+          </a:lnRef>
+          <a:fillRef idx="1">
+            <a:schemeClr val="accent1"/>
+          </a:fillRef>
+          <a:effectRef idx="0">
+            <a:schemeClr val="accent1"/>
+          </a:effectRef>
+          <a:fontRef idx="minor">
+            <a:schemeClr val="lt1"/>
+          </a:fontRef>
+        </p:style>
+        <p:txBody>
+          <a:bodyPr rtlCol="0" anchor="ctr"/>
+          <a:lstStyle/>
+          <a:p>
+            <a:pPr algn="ctr"/>
+            <a:endParaRPr lang="es-ES">
+              <a:solidFill>
+                <a:schemeClr val="tx1"/>
+              </a:solidFill>
+            </a:endParaRPr>
+          </a:p>
+        </p:txBody>
+      </p:sp>
+      <p:pic>
+        <p:nvPicPr>
+          <p:cNvPr id="15" name="Imagen 14">
+            <a:extLst>
+              <a:ext uri="{FF2B5EF4-FFF2-40B4-BE49-F238E27FC236}">
+                <a16:creationId xmlns:a16="http://schemas.microsoft.com/office/drawing/2014/main" id="{FD13679D-FCA8-4ACA-87EF-DF4E53635937}"/>
+              </a:ext>
+            </a:extLst>
+          </p:cNvPr>
+          <p:cNvPicPr>
+            <a:picLocks noChangeAspect="1"/>
+          </p:cNvPicPr>
+          <p:nvPr/>
+        </p:nvPicPr>
+        <p:blipFill>
+          <a:blip r:embed="rId4">
+            <a:extLst>
+              <a:ext uri="{28A0092B-C50C-407E-A947-70E740481C1C}">
+                <a14:useLocalDpi xmlns:a14="http://schemas.microsoft.com/office/drawing/2010/main" val="0"/>
+              </a:ext>
+            </a:extLst>
+          </a:blip>
+          <a:stretch>
+            <a:fillRect/>
+          </a:stretch>
+        </p:blipFill>
+        <p:spPr>
+          <a:xfrm rot="16200000">
+            <a:off x="1817921" y="3022275"/>
+            <a:ext cx="244706" cy="244706"/>
+          </a:xfrm>
+          <a:prstGeom prst="rect">
+            <a:avLst/>
+          </a:prstGeom>
+          <a:effectLst>
+            <a:glow rad="63500">
+              <a:schemeClr val="accent6">
+                <a:satMod val="175000"/>
+                <a:alpha val="40000"/>
+              </a:schemeClr>
+            </a:glow>
+            <a:outerShdw blurRad="50800" dist="38100" dir="2700000" algn="tl" rotWithShape="0">
+              <a:prstClr val="black">
+                <a:alpha val="40000"/>
+              </a:prstClr>
+            </a:outerShdw>
+          </a:effectLst>
+        </p:spPr>
+      </p:pic>
+      <p:pic>
+        <p:nvPicPr>
+          <p:cNvPr id="17" name="Imagen 16">
+            <a:extLst>
+              <a:ext uri="{FF2B5EF4-FFF2-40B4-BE49-F238E27FC236}">
+                <a16:creationId xmlns:a16="http://schemas.microsoft.com/office/drawing/2014/main" id="{AC936B3F-19CA-4661-8895-73062E9C2945}"/>
+              </a:ext>
+            </a:extLst>
+          </p:cNvPr>
+          <p:cNvPicPr>
+            <a:picLocks noChangeAspect="1"/>
+          </p:cNvPicPr>
+          <p:nvPr/>
+        </p:nvPicPr>
+        <p:blipFill>
+          <a:blip r:embed="rId7"/>
+          <a:stretch>
+            <a:fillRect/>
+          </a:stretch>
+        </p:blipFill>
+        <p:spPr>
+          <a:xfrm>
+            <a:off x="292607" y="3862548"/>
+            <a:ext cx="6906706" cy="1556254"/>
+          </a:xfrm>
+          <a:prstGeom prst="rect">
+            <a:avLst/>
+          </a:prstGeom>
+        </p:spPr>
+      </p:pic>
+      <p:pic>
+        <p:nvPicPr>
+          <p:cNvPr id="19" name="Imagen 18">
+            <a:extLst>
+              <a:ext uri="{FF2B5EF4-FFF2-40B4-BE49-F238E27FC236}">
+                <a16:creationId xmlns:a16="http://schemas.microsoft.com/office/drawing/2014/main" id="{60E49BE3-D456-44DE-B2B1-509B8DDD0966}"/>
+              </a:ext>
+            </a:extLst>
+          </p:cNvPr>
+          <p:cNvPicPr>
+            <a:picLocks noChangeAspect="1"/>
+          </p:cNvPicPr>
+          <p:nvPr/>
+        </p:nvPicPr>
+        <p:blipFill>
+          <a:blip r:embed="rId8"/>
+          <a:stretch>
+            <a:fillRect/>
+          </a:stretch>
+        </p:blipFill>
+        <p:spPr>
+          <a:xfrm>
+            <a:off x="2180233" y="5548369"/>
+            <a:ext cx="2838846" cy="562053"/>
+          </a:xfrm>
+          <a:prstGeom prst="rect">
+            <a:avLst/>
+          </a:prstGeom>
+        </p:spPr>
+      </p:pic>
+      <p:sp>
+        <p:nvSpPr>
+          <p:cNvPr id="20" name="Marco 19">
+            <a:extLst>
+              <a:ext uri="{FF2B5EF4-FFF2-40B4-BE49-F238E27FC236}">
+                <a16:creationId xmlns:a16="http://schemas.microsoft.com/office/drawing/2014/main" id="{39426E84-E75F-4705-8D4D-02526CBFBB42}"/>
+              </a:ext>
+            </a:extLst>
+          </p:cNvPr>
+          <p:cNvSpPr/>
+          <p:nvPr/>
+        </p:nvSpPr>
+        <p:spPr>
+          <a:xfrm>
+            <a:off x="2180233" y="5581046"/>
+            <a:ext cx="2838846" cy="497957"/>
+          </a:xfrm>
+          <a:prstGeom prst="frame">
+            <a:avLst>
+              <a:gd name="adj1" fmla="val 568"/>
+            </a:avLst>
+          </a:prstGeom>
+          <a:scene3d>
+            <a:camera prst="orthographicFront"/>
+            <a:lightRig rig="threePt" dir="t"/>
+          </a:scene3d>
+          <a:sp3d>
+            <a:bevelT prst="slope"/>
+          </a:sp3d>
+        </p:spPr>
+        <p:style>
+          <a:lnRef idx="2">
+            <a:schemeClr val="accent1">
+              <a:shade val="50000"/>
+            </a:schemeClr>
+          </a:lnRef>
+          <a:fillRef idx="1">
+            <a:schemeClr val="accent1"/>
+          </a:fillRef>
+          <a:effectRef idx="0">
+            <a:schemeClr val="accent1"/>
+          </a:effectRef>
+          <a:fontRef idx="minor">
+            <a:schemeClr val="lt1"/>
+          </a:fontRef>
+        </p:style>
+        <p:txBody>
+          <a:bodyPr rtlCol="0" anchor="ctr"/>
+          <a:lstStyle/>
+          <a:p>
+            <a:pPr algn="ctr"/>
+            <a:endParaRPr lang="es-ES">
+              <a:solidFill>
+                <a:schemeClr val="tx1"/>
+              </a:solidFill>
+            </a:endParaRPr>
+          </a:p>
+        </p:txBody>
+      </p:sp>
+      <p:pic>
+        <p:nvPicPr>
+          <p:cNvPr id="21" name="Imagen 20">
+            <a:extLst>
+              <a:ext uri="{FF2B5EF4-FFF2-40B4-BE49-F238E27FC236}">
+                <a16:creationId xmlns:a16="http://schemas.microsoft.com/office/drawing/2014/main" id="{DF235E47-6DA8-4EAF-BD19-D6A97E3150DF}"/>
+              </a:ext>
+            </a:extLst>
+          </p:cNvPr>
+          <p:cNvPicPr>
+            <a:picLocks noChangeAspect="1"/>
+          </p:cNvPicPr>
+          <p:nvPr/>
+        </p:nvPicPr>
+        <p:blipFill>
+          <a:blip r:embed="rId4">
+            <a:extLst>
+              <a:ext uri="{28A0092B-C50C-407E-A947-70E740481C1C}">
+                <a14:useLocalDpi xmlns:a14="http://schemas.microsoft.com/office/drawing/2010/main" val="0"/>
+              </a:ext>
+            </a:extLst>
+          </a:blip>
+          <a:stretch>
+            <a:fillRect/>
+          </a:stretch>
+        </p:blipFill>
+        <p:spPr>
+          <a:xfrm rot="16200000">
+            <a:off x="1825751" y="5719129"/>
+            <a:ext cx="244706" cy="244706"/>
+          </a:xfrm>
+          <a:prstGeom prst="rect">
+            <a:avLst/>
+          </a:prstGeom>
+          <a:effectLst>
+            <a:glow rad="63500">
+              <a:schemeClr val="accent6">
+                <a:satMod val="175000"/>
+                <a:alpha val="40000"/>
+              </a:schemeClr>
+            </a:glow>
+            <a:outerShdw blurRad="50800" dist="38100" dir="2700000" algn="tl" rotWithShape="0">
+              <a:prstClr val="black">
+                <a:alpha val="40000"/>
+              </a:prstClr>
+            </a:outerShdw>
+          </a:effectLst>
+        </p:spPr>
+      </p:pic>
+      <p:pic>
+        <p:nvPicPr>
+          <p:cNvPr id="23" name="Imagen 22">
+            <a:extLst>
+              <a:ext uri="{FF2B5EF4-FFF2-40B4-BE49-F238E27FC236}">
+                <a16:creationId xmlns:a16="http://schemas.microsoft.com/office/drawing/2014/main" id="{76F698DA-2A89-4DF5-AE43-ECD8C1DC37C0}"/>
+              </a:ext>
+            </a:extLst>
+          </p:cNvPr>
+          <p:cNvPicPr>
+            <a:picLocks noChangeAspect="1"/>
+          </p:cNvPicPr>
+          <p:nvPr/>
+        </p:nvPicPr>
+        <p:blipFill>
+          <a:blip r:embed="rId9"/>
+          <a:stretch>
+            <a:fillRect/>
+          </a:stretch>
+        </p:blipFill>
+        <p:spPr>
+          <a:xfrm>
+            <a:off x="292607" y="6514656"/>
+            <a:ext cx="6906706" cy="1153223"/>
+          </a:xfrm>
+          <a:prstGeom prst="rect">
+            <a:avLst/>
+          </a:prstGeom>
+        </p:spPr>
+      </p:pic>
+      <p:pic>
+        <p:nvPicPr>
+          <p:cNvPr id="25" name="Imagen 24">
+            <a:extLst>
+              <a:ext uri="{FF2B5EF4-FFF2-40B4-BE49-F238E27FC236}">
+                <a16:creationId xmlns:a16="http://schemas.microsoft.com/office/drawing/2014/main" id="{C7DE61EB-F2A9-4EC6-9596-D83D735FF247}"/>
+              </a:ext>
+            </a:extLst>
+          </p:cNvPr>
+          <p:cNvPicPr>
+            <a:picLocks noChangeAspect="1"/>
+          </p:cNvPicPr>
+          <p:nvPr/>
+        </p:nvPicPr>
+        <p:blipFill>
+          <a:blip r:embed="rId10"/>
+          <a:stretch>
+            <a:fillRect/>
+          </a:stretch>
+        </p:blipFill>
+        <p:spPr>
+          <a:xfrm>
+            <a:off x="2385049" y="7781034"/>
+            <a:ext cx="2429214" cy="485843"/>
+          </a:xfrm>
+          <a:prstGeom prst="rect">
+            <a:avLst/>
+          </a:prstGeom>
+        </p:spPr>
+      </p:pic>
+      <p:sp>
+        <p:nvSpPr>
+          <p:cNvPr id="26" name="Marco 25">
+            <a:extLst>
+              <a:ext uri="{FF2B5EF4-FFF2-40B4-BE49-F238E27FC236}">
+                <a16:creationId xmlns:a16="http://schemas.microsoft.com/office/drawing/2014/main" id="{C35C4637-A775-4C77-BEF7-33F8A9B6FC3B}"/>
+              </a:ext>
+            </a:extLst>
+          </p:cNvPr>
+          <p:cNvSpPr/>
+          <p:nvPr/>
+        </p:nvSpPr>
+        <p:spPr>
+          <a:xfrm>
+            <a:off x="2385049" y="7775606"/>
+            <a:ext cx="2429214" cy="491271"/>
+          </a:xfrm>
+          <a:prstGeom prst="frame">
+            <a:avLst>
+              <a:gd name="adj1" fmla="val 568"/>
+            </a:avLst>
+          </a:prstGeom>
+          <a:scene3d>
+            <a:camera prst="orthographicFront"/>
+            <a:lightRig rig="threePt" dir="t"/>
+          </a:scene3d>
+          <a:sp3d>
+            <a:bevelT prst="slope"/>
+          </a:sp3d>
+        </p:spPr>
+        <p:style>
+          <a:lnRef idx="2">
+            <a:schemeClr val="accent1">
+              <a:shade val="50000"/>
+            </a:schemeClr>
+          </a:lnRef>
+          <a:fillRef idx="1">
+            <a:schemeClr val="accent1"/>
+          </a:fillRef>
+          <a:effectRef idx="0">
+            <a:schemeClr val="accent1"/>
+          </a:effectRef>
+          <a:fontRef idx="minor">
+            <a:schemeClr val="lt1"/>
+          </a:fontRef>
+        </p:style>
+        <p:txBody>
+          <a:bodyPr rtlCol="0" anchor="ctr"/>
+          <a:lstStyle/>
+          <a:p>
+            <a:pPr algn="ctr"/>
+            <a:endParaRPr lang="es-ES">
+              <a:solidFill>
+                <a:schemeClr val="tx1"/>
+              </a:solidFill>
+            </a:endParaRPr>
+          </a:p>
+        </p:txBody>
+      </p:sp>
+      <p:pic>
+        <p:nvPicPr>
+          <p:cNvPr id="27" name="Imagen 26">
+            <a:extLst>
+              <a:ext uri="{FF2B5EF4-FFF2-40B4-BE49-F238E27FC236}">
+                <a16:creationId xmlns:a16="http://schemas.microsoft.com/office/drawing/2014/main" id="{D6D0109B-2E2B-4F20-B4E3-54EB7D80832D}"/>
+              </a:ext>
+            </a:extLst>
+          </p:cNvPr>
+          <p:cNvPicPr>
+            <a:picLocks noChangeAspect="1"/>
+          </p:cNvPicPr>
+          <p:nvPr/>
+        </p:nvPicPr>
+        <p:blipFill>
+          <a:blip r:embed="rId4">
+            <a:extLst>
+              <a:ext uri="{28A0092B-C50C-407E-A947-70E740481C1C}">
+                <a14:useLocalDpi xmlns:a14="http://schemas.microsoft.com/office/drawing/2010/main" val="0"/>
+              </a:ext>
+            </a:extLst>
+          </a:blip>
+          <a:stretch>
+            <a:fillRect/>
+          </a:stretch>
+        </p:blipFill>
+        <p:spPr>
+          <a:xfrm rot="16200000">
+            <a:off x="2051303" y="7919786"/>
+            <a:ext cx="244706" cy="244706"/>
+          </a:xfrm>
+          <a:prstGeom prst="rect">
+            <a:avLst/>
+          </a:prstGeom>
+          <a:effectLst>
+            <a:glow rad="63500">
+              <a:schemeClr val="accent6">
+                <a:satMod val="175000"/>
+                <a:alpha val="40000"/>
+              </a:schemeClr>
+            </a:glow>
+            <a:outerShdw blurRad="50800" dist="38100" dir="2700000" algn="tl" rotWithShape="0">
+              <a:prstClr val="black">
+                <a:alpha val="40000"/>
+              </a:prstClr>
+            </a:outerShdw>
+          </a:effectLst>
+        </p:spPr>
+      </p:pic>
+      <p:cxnSp>
+        <p:nvCxnSpPr>
+          <p:cNvPr id="28" name="Conector recto 27">
+            <a:extLst>
+              <a:ext uri="{FF2B5EF4-FFF2-40B4-BE49-F238E27FC236}">
+                <a16:creationId xmlns:a16="http://schemas.microsoft.com/office/drawing/2014/main" id="{90AB4B97-377E-43EE-9000-DFEECB099C20}"/>
+              </a:ext>
+            </a:extLst>
+          </p:cNvPr>
+          <p:cNvCxnSpPr>
+            <a:cxnSpLocks/>
+          </p:cNvCxnSpPr>
+          <p:nvPr/>
+        </p:nvCxnSpPr>
+        <p:spPr>
+          <a:xfrm>
+            <a:off x="353536" y="1896776"/>
+            <a:ext cx="6492240" cy="0"/>
+          </a:xfrm>
+          <a:prstGeom prst="line">
+            <a:avLst/>
+          </a:prstGeom>
+          <a:effectLst>
+            <a:outerShdw blurRad="50800" dist="38100" dir="2700000" algn="tl" rotWithShape="0">
+              <a:prstClr val="black">
+                <a:alpha val="40000"/>
+              </a:prstClr>
+            </a:outerShdw>
+          </a:effectLst>
+        </p:spPr>
+        <p:style>
+          <a:lnRef idx="2">
+            <a:schemeClr val="accent3"/>
+          </a:lnRef>
+          <a:fillRef idx="0">
+            <a:schemeClr val="accent3"/>
+          </a:fillRef>
+          <a:effectRef idx="1">
+            <a:schemeClr val="accent3"/>
+          </a:effectRef>
+          <a:fontRef idx="minor">
+            <a:schemeClr val="tx1"/>
+          </a:fontRef>
+        </p:style>
+      </p:cxnSp>
+      <p:cxnSp>
+        <p:nvCxnSpPr>
+          <p:cNvPr id="29" name="Conector recto 28">
+            <a:extLst>
+              <a:ext uri="{FF2B5EF4-FFF2-40B4-BE49-F238E27FC236}">
+                <a16:creationId xmlns:a16="http://schemas.microsoft.com/office/drawing/2014/main" id="{203D1400-DEE0-44C6-8DEA-3A34470BE054}"/>
+              </a:ext>
+            </a:extLst>
+          </p:cNvPr>
+          <p:cNvCxnSpPr>
+            <a:cxnSpLocks/>
+          </p:cNvCxnSpPr>
+          <p:nvPr/>
+        </p:nvCxnSpPr>
+        <p:spPr>
+          <a:xfrm>
+            <a:off x="353536" y="3701192"/>
+            <a:ext cx="6492240" cy="0"/>
+          </a:xfrm>
+          <a:prstGeom prst="line">
+            <a:avLst/>
+          </a:prstGeom>
+          <a:effectLst>
+            <a:outerShdw blurRad="50800" dist="38100" dir="2700000" algn="tl" rotWithShape="0">
+              <a:prstClr val="black">
+                <a:alpha val="40000"/>
+              </a:prstClr>
+            </a:outerShdw>
+          </a:effectLst>
+        </p:spPr>
+        <p:style>
+          <a:lnRef idx="2">
+            <a:schemeClr val="accent3"/>
+          </a:lnRef>
+          <a:fillRef idx="0">
+            <a:schemeClr val="accent3"/>
+          </a:fillRef>
+          <a:effectRef idx="1">
+            <a:schemeClr val="accent3"/>
+          </a:effectRef>
+          <a:fontRef idx="minor">
+            <a:schemeClr val="tx1"/>
+          </a:fontRef>
+        </p:style>
+      </p:cxnSp>
+      <p:cxnSp>
+        <p:nvCxnSpPr>
+          <p:cNvPr id="30" name="Conector recto 29">
+            <a:extLst>
+              <a:ext uri="{FF2B5EF4-FFF2-40B4-BE49-F238E27FC236}">
+                <a16:creationId xmlns:a16="http://schemas.microsoft.com/office/drawing/2014/main" id="{45213F8C-F2A4-4B8F-8C9C-AAD598798656}"/>
+              </a:ext>
+            </a:extLst>
+          </p:cNvPr>
+          <p:cNvCxnSpPr>
+            <a:cxnSpLocks/>
+          </p:cNvCxnSpPr>
+          <p:nvPr/>
+        </p:nvCxnSpPr>
+        <p:spPr>
+          <a:xfrm>
+            <a:off x="353536" y="6365144"/>
+            <a:ext cx="6492240" cy="0"/>
+          </a:xfrm>
+          <a:prstGeom prst="line">
+            <a:avLst/>
+          </a:prstGeom>
+          <a:effectLst>
+            <a:outerShdw blurRad="50800" dist="38100" dir="2700000" algn="tl" rotWithShape="0">
+              <a:prstClr val="black">
+                <a:alpha val="40000"/>
+              </a:prstClr>
+            </a:outerShdw>
+          </a:effectLst>
+        </p:spPr>
+        <p:style>
+          <a:lnRef idx="2">
+            <a:schemeClr val="accent3"/>
+          </a:lnRef>
+          <a:fillRef idx="0">
+            <a:schemeClr val="accent3"/>
+          </a:fillRef>
+          <a:effectRef idx="1">
+            <a:schemeClr val="accent3"/>
+          </a:effectRef>
+          <a:fontRef idx="minor">
+            <a:schemeClr val="tx1"/>
+          </a:fontRef>
+        </p:style>
+      </p:cxnSp>
+      <p:cxnSp>
+        <p:nvCxnSpPr>
+          <p:cNvPr id="31" name="Conector recto 30">
+            <a:extLst>
+              <a:ext uri="{FF2B5EF4-FFF2-40B4-BE49-F238E27FC236}">
+                <a16:creationId xmlns:a16="http://schemas.microsoft.com/office/drawing/2014/main" id="{FC112706-0A6D-433C-A205-2C37BAE8227F}"/>
+              </a:ext>
+            </a:extLst>
+          </p:cNvPr>
+          <p:cNvCxnSpPr>
+            <a:cxnSpLocks/>
+          </p:cNvCxnSpPr>
+          <p:nvPr/>
+        </p:nvCxnSpPr>
+        <p:spPr>
+          <a:xfrm>
+            <a:off x="353536" y="8584088"/>
+            <a:ext cx="6492240" cy="0"/>
+          </a:xfrm>
+          <a:prstGeom prst="line">
+            <a:avLst/>
+          </a:prstGeom>
+          <a:effectLst>
+            <a:outerShdw blurRad="50800" dist="38100" dir="2700000" algn="tl" rotWithShape="0">
+              <a:prstClr val="black">
+                <a:alpha val="40000"/>
+              </a:prstClr>
+            </a:outerShdw>
+          </a:effectLst>
+        </p:spPr>
+        <p:style>
+          <a:lnRef idx="2">
+            <a:schemeClr val="accent3"/>
+          </a:lnRef>
+          <a:fillRef idx="0">
+            <a:schemeClr val="accent3"/>
+          </a:fillRef>
+          <a:effectRef idx="1">
+            <a:schemeClr val="accent3"/>
+          </a:effectRef>
+          <a:fontRef idx="minor">
+            <a:schemeClr val="tx1"/>
+          </a:fontRef>
+        </p:style>
+      </p:cxnSp>
     </p:spTree>
     <p:extLst>
       <p:ext uri="{BB962C8B-B14F-4D97-AF65-F5344CB8AC3E}">
@@ -15185,6 +16427,888 @@
           <a:chExt cx="0" cy="0"/>
         </a:xfrm>
       </p:grpSpPr>
+      <p:pic>
+        <p:nvPicPr>
+          <p:cNvPr id="3" name="Imagen 2">
+            <a:extLst>
+              <a:ext uri="{FF2B5EF4-FFF2-40B4-BE49-F238E27FC236}">
+                <a16:creationId xmlns:a16="http://schemas.microsoft.com/office/drawing/2014/main" id="{2CCCD0CF-EFD2-402E-8CE8-18FD5681CDDC}"/>
+              </a:ext>
+            </a:extLst>
+          </p:cNvPr>
+          <p:cNvPicPr>
+            <a:picLocks noChangeAspect="1"/>
+          </p:cNvPicPr>
+          <p:nvPr/>
+        </p:nvPicPr>
+        <p:blipFill>
+          <a:blip r:embed="rId2"/>
+          <a:stretch>
+            <a:fillRect/>
+          </a:stretch>
+        </p:blipFill>
+        <p:spPr>
+          <a:xfrm>
+            <a:off x="353568" y="3587541"/>
+            <a:ext cx="6845745" cy="752956"/>
+          </a:xfrm>
+          <a:prstGeom prst="rect">
+            <a:avLst/>
+          </a:prstGeom>
+        </p:spPr>
+      </p:pic>
+      <p:pic>
+        <p:nvPicPr>
+          <p:cNvPr id="7" name="Imagen 6">
+            <a:extLst>
+              <a:ext uri="{FF2B5EF4-FFF2-40B4-BE49-F238E27FC236}">
+                <a16:creationId xmlns:a16="http://schemas.microsoft.com/office/drawing/2014/main" id="{26F19768-5C42-4ACD-8676-7E4641EB5742}"/>
+              </a:ext>
+            </a:extLst>
+          </p:cNvPr>
+          <p:cNvPicPr>
+            <a:picLocks noChangeAspect="1"/>
+          </p:cNvPicPr>
+          <p:nvPr/>
+        </p:nvPicPr>
+        <p:blipFill>
+          <a:blip r:embed="rId3"/>
+          <a:stretch>
+            <a:fillRect/>
+          </a:stretch>
+        </p:blipFill>
+        <p:spPr>
+          <a:xfrm>
+            <a:off x="2199286" y="2337306"/>
+            <a:ext cx="2800741" cy="485843"/>
+          </a:xfrm>
+          <a:prstGeom prst="rect">
+            <a:avLst/>
+          </a:prstGeom>
+        </p:spPr>
+      </p:pic>
+      <p:sp>
+        <p:nvSpPr>
+          <p:cNvPr id="8" name="Marco 7">
+            <a:extLst>
+              <a:ext uri="{FF2B5EF4-FFF2-40B4-BE49-F238E27FC236}">
+                <a16:creationId xmlns:a16="http://schemas.microsoft.com/office/drawing/2014/main" id="{D91395C6-D82F-4085-944B-73B76F399FFF}"/>
+              </a:ext>
+            </a:extLst>
+          </p:cNvPr>
+          <p:cNvSpPr/>
+          <p:nvPr/>
+        </p:nvSpPr>
+        <p:spPr>
+          <a:xfrm>
+            <a:off x="2199285" y="2353301"/>
+            <a:ext cx="2800741" cy="433272"/>
+          </a:xfrm>
+          <a:prstGeom prst="frame">
+            <a:avLst>
+              <a:gd name="adj1" fmla="val 568"/>
+            </a:avLst>
+          </a:prstGeom>
+          <a:scene3d>
+            <a:camera prst="orthographicFront"/>
+            <a:lightRig rig="threePt" dir="t"/>
+          </a:scene3d>
+          <a:sp3d>
+            <a:bevelT prst="slope"/>
+          </a:sp3d>
+        </p:spPr>
+        <p:style>
+          <a:lnRef idx="2">
+            <a:schemeClr val="accent1">
+              <a:shade val="50000"/>
+            </a:schemeClr>
+          </a:lnRef>
+          <a:fillRef idx="1">
+            <a:schemeClr val="accent1"/>
+          </a:fillRef>
+          <a:effectRef idx="0">
+            <a:schemeClr val="accent1"/>
+          </a:effectRef>
+          <a:fontRef idx="minor">
+            <a:schemeClr val="lt1"/>
+          </a:fontRef>
+        </p:style>
+        <p:txBody>
+          <a:bodyPr rtlCol="0" anchor="ctr"/>
+          <a:lstStyle/>
+          <a:p>
+            <a:pPr algn="ctr"/>
+            <a:endParaRPr lang="es-ES">
+              <a:solidFill>
+                <a:schemeClr val="tx1"/>
+              </a:solidFill>
+            </a:endParaRPr>
+          </a:p>
+        </p:txBody>
+      </p:sp>
+      <p:pic>
+        <p:nvPicPr>
+          <p:cNvPr id="9" name="Imagen 8">
+            <a:extLst>
+              <a:ext uri="{FF2B5EF4-FFF2-40B4-BE49-F238E27FC236}">
+                <a16:creationId xmlns:a16="http://schemas.microsoft.com/office/drawing/2014/main" id="{AF004764-C0BF-4549-BAF6-747BA49939A4}"/>
+              </a:ext>
+            </a:extLst>
+          </p:cNvPr>
+          <p:cNvPicPr>
+            <a:picLocks noChangeAspect="1"/>
+          </p:cNvPicPr>
+          <p:nvPr/>
+        </p:nvPicPr>
+        <p:blipFill>
+          <a:blip r:embed="rId4">
+            <a:extLst>
+              <a:ext uri="{28A0092B-C50C-407E-A947-70E740481C1C}">
+                <a14:useLocalDpi xmlns:a14="http://schemas.microsoft.com/office/drawing/2010/main" val="0"/>
+              </a:ext>
+            </a:extLst>
+          </a:blip>
+          <a:stretch>
+            <a:fillRect/>
+          </a:stretch>
+        </p:blipFill>
+        <p:spPr>
+          <a:xfrm rot="16200000">
+            <a:off x="1832226" y="2426716"/>
+            <a:ext cx="244706" cy="244706"/>
+          </a:xfrm>
+          <a:prstGeom prst="rect">
+            <a:avLst/>
+          </a:prstGeom>
+          <a:effectLst>
+            <a:glow rad="63500">
+              <a:schemeClr val="accent6">
+                <a:satMod val="175000"/>
+                <a:alpha val="40000"/>
+              </a:schemeClr>
+            </a:glow>
+            <a:outerShdw blurRad="50800" dist="38100" dir="2700000" algn="tl" rotWithShape="0">
+              <a:prstClr val="black">
+                <a:alpha val="40000"/>
+              </a:prstClr>
+            </a:outerShdw>
+          </a:effectLst>
+        </p:spPr>
+      </p:pic>
+      <p:pic>
+        <p:nvPicPr>
+          <p:cNvPr id="11" name="Imagen 10">
+            <a:extLst>
+              <a:ext uri="{FF2B5EF4-FFF2-40B4-BE49-F238E27FC236}">
+                <a16:creationId xmlns:a16="http://schemas.microsoft.com/office/drawing/2014/main" id="{DCE072C3-C920-47C0-8888-A4B47E129036}"/>
+              </a:ext>
+            </a:extLst>
+          </p:cNvPr>
+          <p:cNvPicPr>
+            <a:picLocks noChangeAspect="1"/>
+          </p:cNvPicPr>
+          <p:nvPr/>
+        </p:nvPicPr>
+        <p:blipFill>
+          <a:blip r:embed="rId5"/>
+          <a:stretch>
+            <a:fillRect/>
+          </a:stretch>
+        </p:blipFill>
+        <p:spPr>
+          <a:xfrm>
+            <a:off x="2870892" y="4479099"/>
+            <a:ext cx="1457528" cy="457264"/>
+          </a:xfrm>
+          <a:prstGeom prst="rect">
+            <a:avLst/>
+          </a:prstGeom>
+        </p:spPr>
+      </p:pic>
+      <p:sp>
+        <p:nvSpPr>
+          <p:cNvPr id="12" name="Marco 11">
+            <a:extLst>
+              <a:ext uri="{FF2B5EF4-FFF2-40B4-BE49-F238E27FC236}">
+                <a16:creationId xmlns:a16="http://schemas.microsoft.com/office/drawing/2014/main" id="{EEB16E0F-D0AC-4FD3-9416-ED972D52B520}"/>
+              </a:ext>
+            </a:extLst>
+          </p:cNvPr>
+          <p:cNvSpPr/>
+          <p:nvPr/>
+        </p:nvSpPr>
+        <p:spPr>
+          <a:xfrm>
+            <a:off x="2870892" y="4465478"/>
+            <a:ext cx="1457528" cy="491271"/>
+          </a:xfrm>
+          <a:prstGeom prst="frame">
+            <a:avLst>
+              <a:gd name="adj1" fmla="val 568"/>
+            </a:avLst>
+          </a:prstGeom>
+          <a:scene3d>
+            <a:camera prst="orthographicFront"/>
+            <a:lightRig rig="threePt" dir="t"/>
+          </a:scene3d>
+          <a:sp3d>
+            <a:bevelT prst="slope"/>
+          </a:sp3d>
+        </p:spPr>
+        <p:style>
+          <a:lnRef idx="2">
+            <a:schemeClr val="accent1">
+              <a:shade val="50000"/>
+            </a:schemeClr>
+          </a:lnRef>
+          <a:fillRef idx="1">
+            <a:schemeClr val="accent1"/>
+          </a:fillRef>
+          <a:effectRef idx="0">
+            <a:schemeClr val="accent1"/>
+          </a:effectRef>
+          <a:fontRef idx="minor">
+            <a:schemeClr val="lt1"/>
+          </a:fontRef>
+        </p:style>
+        <p:txBody>
+          <a:bodyPr rtlCol="0" anchor="ctr"/>
+          <a:lstStyle/>
+          <a:p>
+            <a:pPr algn="ctr"/>
+            <a:endParaRPr lang="es-ES">
+              <a:solidFill>
+                <a:schemeClr val="tx1"/>
+              </a:solidFill>
+            </a:endParaRPr>
+          </a:p>
+        </p:txBody>
+      </p:sp>
+      <p:pic>
+        <p:nvPicPr>
+          <p:cNvPr id="13" name="Imagen 12">
+            <a:extLst>
+              <a:ext uri="{FF2B5EF4-FFF2-40B4-BE49-F238E27FC236}">
+                <a16:creationId xmlns:a16="http://schemas.microsoft.com/office/drawing/2014/main" id="{3AD4ED02-BD76-438B-977A-B0008EB61C4D}"/>
+              </a:ext>
+            </a:extLst>
+          </p:cNvPr>
+          <p:cNvPicPr>
+            <a:picLocks noChangeAspect="1"/>
+          </p:cNvPicPr>
+          <p:nvPr/>
+        </p:nvPicPr>
+        <p:blipFill>
+          <a:blip r:embed="rId4">
+            <a:extLst>
+              <a:ext uri="{28A0092B-C50C-407E-A947-70E740481C1C}">
+                <a14:useLocalDpi xmlns:a14="http://schemas.microsoft.com/office/drawing/2010/main" val="0"/>
+              </a:ext>
+            </a:extLst>
+          </a:blip>
+          <a:stretch>
+            <a:fillRect/>
+          </a:stretch>
+        </p:blipFill>
+        <p:spPr>
+          <a:xfrm rot="16200000">
+            <a:off x="2502786" y="4585378"/>
+            <a:ext cx="244706" cy="244706"/>
+          </a:xfrm>
+          <a:prstGeom prst="rect">
+            <a:avLst/>
+          </a:prstGeom>
+          <a:effectLst>
+            <a:glow rad="63500">
+              <a:schemeClr val="accent6">
+                <a:satMod val="175000"/>
+                <a:alpha val="40000"/>
+              </a:schemeClr>
+            </a:glow>
+            <a:outerShdw blurRad="50800" dist="38100" dir="2700000" algn="tl" rotWithShape="0">
+              <a:prstClr val="black">
+                <a:alpha val="40000"/>
+              </a:prstClr>
+            </a:outerShdw>
+          </a:effectLst>
+        </p:spPr>
+      </p:pic>
+      <p:pic>
+        <p:nvPicPr>
+          <p:cNvPr id="15" name="Imagen 14">
+            <a:extLst>
+              <a:ext uri="{FF2B5EF4-FFF2-40B4-BE49-F238E27FC236}">
+                <a16:creationId xmlns:a16="http://schemas.microsoft.com/office/drawing/2014/main" id="{555EE4B5-5DCF-4F6F-A8D7-21A861A2556C}"/>
+              </a:ext>
+            </a:extLst>
+          </p:cNvPr>
+          <p:cNvPicPr>
+            <a:picLocks noChangeAspect="1"/>
+          </p:cNvPicPr>
+          <p:nvPr/>
+        </p:nvPicPr>
+        <p:blipFill>
+          <a:blip r:embed="rId6"/>
+          <a:stretch>
+            <a:fillRect/>
+          </a:stretch>
+        </p:blipFill>
+        <p:spPr>
+          <a:xfrm>
+            <a:off x="353567" y="5441341"/>
+            <a:ext cx="6845746" cy="1361325"/>
+          </a:xfrm>
+          <a:prstGeom prst="rect">
+            <a:avLst/>
+          </a:prstGeom>
+        </p:spPr>
+      </p:pic>
+      <p:pic>
+        <p:nvPicPr>
+          <p:cNvPr id="17" name="Imagen 16">
+            <a:extLst>
+              <a:ext uri="{FF2B5EF4-FFF2-40B4-BE49-F238E27FC236}">
+                <a16:creationId xmlns:a16="http://schemas.microsoft.com/office/drawing/2014/main" id="{247F3A6E-4B1A-427A-A0B8-10C126CF5E57}"/>
+              </a:ext>
+            </a:extLst>
+          </p:cNvPr>
+          <p:cNvPicPr>
+            <a:picLocks noChangeAspect="1"/>
+          </p:cNvPicPr>
+          <p:nvPr/>
+        </p:nvPicPr>
+        <p:blipFill>
+          <a:blip r:embed="rId7"/>
+          <a:stretch>
+            <a:fillRect/>
+          </a:stretch>
+        </p:blipFill>
+        <p:spPr>
+          <a:xfrm>
+            <a:off x="2689890" y="6954848"/>
+            <a:ext cx="1819529" cy="466790"/>
+          </a:xfrm>
+          <a:prstGeom prst="rect">
+            <a:avLst/>
+          </a:prstGeom>
+        </p:spPr>
+      </p:pic>
+      <p:sp>
+        <p:nvSpPr>
+          <p:cNvPr id="18" name="Marco 17">
+            <a:extLst>
+              <a:ext uri="{FF2B5EF4-FFF2-40B4-BE49-F238E27FC236}">
+                <a16:creationId xmlns:a16="http://schemas.microsoft.com/office/drawing/2014/main" id="{3BDB1C92-93A8-4DCE-8227-756B87068BF9}"/>
+              </a:ext>
+            </a:extLst>
+          </p:cNvPr>
+          <p:cNvSpPr/>
+          <p:nvPr/>
+        </p:nvSpPr>
+        <p:spPr>
+          <a:xfrm>
+            <a:off x="2689891" y="6930367"/>
+            <a:ext cx="1819528" cy="491271"/>
+          </a:xfrm>
+          <a:prstGeom prst="frame">
+            <a:avLst>
+              <a:gd name="adj1" fmla="val 568"/>
+            </a:avLst>
+          </a:prstGeom>
+          <a:scene3d>
+            <a:camera prst="orthographicFront"/>
+            <a:lightRig rig="threePt" dir="t"/>
+          </a:scene3d>
+          <a:sp3d>
+            <a:bevelT prst="slope"/>
+          </a:sp3d>
+        </p:spPr>
+        <p:style>
+          <a:lnRef idx="2">
+            <a:schemeClr val="accent1">
+              <a:shade val="50000"/>
+            </a:schemeClr>
+          </a:lnRef>
+          <a:fillRef idx="1">
+            <a:schemeClr val="accent1"/>
+          </a:fillRef>
+          <a:effectRef idx="0">
+            <a:schemeClr val="accent1"/>
+          </a:effectRef>
+          <a:fontRef idx="minor">
+            <a:schemeClr val="lt1"/>
+          </a:fontRef>
+        </p:style>
+        <p:txBody>
+          <a:bodyPr rtlCol="0" anchor="ctr"/>
+          <a:lstStyle/>
+          <a:p>
+            <a:pPr algn="ctr"/>
+            <a:endParaRPr lang="es-ES">
+              <a:solidFill>
+                <a:schemeClr val="tx1"/>
+              </a:solidFill>
+            </a:endParaRPr>
+          </a:p>
+        </p:txBody>
+      </p:sp>
+      <p:pic>
+        <p:nvPicPr>
+          <p:cNvPr id="19" name="Imagen 18">
+            <a:extLst>
+              <a:ext uri="{FF2B5EF4-FFF2-40B4-BE49-F238E27FC236}">
+                <a16:creationId xmlns:a16="http://schemas.microsoft.com/office/drawing/2014/main" id="{CC1E4385-5EDD-4F1E-B6FA-1419E24C2F4B}"/>
+              </a:ext>
+            </a:extLst>
+          </p:cNvPr>
+          <p:cNvPicPr>
+            <a:picLocks noChangeAspect="1"/>
+          </p:cNvPicPr>
+          <p:nvPr/>
+        </p:nvPicPr>
+        <p:blipFill>
+          <a:blip r:embed="rId4">
+            <a:extLst>
+              <a:ext uri="{28A0092B-C50C-407E-A947-70E740481C1C}">
+                <a14:useLocalDpi xmlns:a14="http://schemas.microsoft.com/office/drawing/2010/main" val="0"/>
+              </a:ext>
+            </a:extLst>
+          </a:blip>
+          <a:stretch>
+            <a:fillRect/>
+          </a:stretch>
+        </p:blipFill>
+        <p:spPr>
+          <a:xfrm rot="16200000">
+            <a:off x="2348150" y="7053649"/>
+            <a:ext cx="244706" cy="244706"/>
+          </a:xfrm>
+          <a:prstGeom prst="rect">
+            <a:avLst/>
+          </a:prstGeom>
+          <a:effectLst>
+            <a:glow rad="63500">
+              <a:schemeClr val="accent6">
+                <a:satMod val="175000"/>
+                <a:alpha val="40000"/>
+              </a:schemeClr>
+            </a:glow>
+            <a:outerShdw blurRad="50800" dist="38100" dir="2700000" algn="tl" rotWithShape="0">
+              <a:prstClr val="black">
+                <a:alpha val="40000"/>
+              </a:prstClr>
+            </a:outerShdw>
+          </a:effectLst>
+        </p:spPr>
+      </p:pic>
+      <p:pic>
+        <p:nvPicPr>
+          <p:cNvPr id="21" name="Imagen 20">
+            <a:extLst>
+              <a:ext uri="{FF2B5EF4-FFF2-40B4-BE49-F238E27FC236}">
+                <a16:creationId xmlns:a16="http://schemas.microsoft.com/office/drawing/2014/main" id="{D032518D-0B56-4684-960E-89F6B2B50743}"/>
+              </a:ext>
+            </a:extLst>
+          </p:cNvPr>
+          <p:cNvPicPr>
+            <a:picLocks noChangeAspect="1"/>
+          </p:cNvPicPr>
+          <p:nvPr/>
+        </p:nvPicPr>
+        <p:blipFill>
+          <a:blip r:embed="rId8"/>
+          <a:stretch>
+            <a:fillRect/>
+          </a:stretch>
+        </p:blipFill>
+        <p:spPr>
+          <a:xfrm>
+            <a:off x="353567" y="7873746"/>
+            <a:ext cx="6845746" cy="532066"/>
+          </a:xfrm>
+          <a:prstGeom prst="rect">
+            <a:avLst/>
+          </a:prstGeom>
+        </p:spPr>
+      </p:pic>
+      <p:pic>
+        <p:nvPicPr>
+          <p:cNvPr id="23" name="Imagen 22">
+            <a:extLst>
+              <a:ext uri="{FF2B5EF4-FFF2-40B4-BE49-F238E27FC236}">
+                <a16:creationId xmlns:a16="http://schemas.microsoft.com/office/drawing/2014/main" id="{1C7A5205-2794-4C56-8737-3A4725068608}"/>
+              </a:ext>
+            </a:extLst>
+          </p:cNvPr>
+          <p:cNvPicPr>
+            <a:picLocks noChangeAspect="1"/>
+          </p:cNvPicPr>
+          <p:nvPr/>
+        </p:nvPicPr>
+        <p:blipFill>
+          <a:blip r:embed="rId9"/>
+          <a:stretch>
+            <a:fillRect/>
+          </a:stretch>
+        </p:blipFill>
+        <p:spPr>
+          <a:xfrm>
+            <a:off x="2775629" y="8508555"/>
+            <a:ext cx="1648055" cy="457264"/>
+          </a:xfrm>
+          <a:prstGeom prst="rect">
+            <a:avLst/>
+          </a:prstGeom>
+        </p:spPr>
+      </p:pic>
+      <p:sp>
+        <p:nvSpPr>
+          <p:cNvPr id="24" name="Marco 23">
+            <a:extLst>
+              <a:ext uri="{FF2B5EF4-FFF2-40B4-BE49-F238E27FC236}">
+                <a16:creationId xmlns:a16="http://schemas.microsoft.com/office/drawing/2014/main" id="{3BA080E0-DE01-46A5-AFF2-A5D5092A8648}"/>
+              </a:ext>
+            </a:extLst>
+          </p:cNvPr>
+          <p:cNvSpPr/>
+          <p:nvPr/>
+        </p:nvSpPr>
+        <p:spPr>
+          <a:xfrm>
+            <a:off x="2775629" y="8497039"/>
+            <a:ext cx="1648055" cy="491271"/>
+          </a:xfrm>
+          <a:prstGeom prst="frame">
+            <a:avLst>
+              <a:gd name="adj1" fmla="val 568"/>
+            </a:avLst>
+          </a:prstGeom>
+          <a:scene3d>
+            <a:camera prst="orthographicFront"/>
+            <a:lightRig rig="threePt" dir="t"/>
+          </a:scene3d>
+          <a:sp3d>
+            <a:bevelT prst="slope"/>
+          </a:sp3d>
+        </p:spPr>
+        <p:style>
+          <a:lnRef idx="2">
+            <a:schemeClr val="accent1">
+              <a:shade val="50000"/>
+            </a:schemeClr>
+          </a:lnRef>
+          <a:fillRef idx="1">
+            <a:schemeClr val="accent1"/>
+          </a:fillRef>
+          <a:effectRef idx="0">
+            <a:schemeClr val="accent1"/>
+          </a:effectRef>
+          <a:fontRef idx="minor">
+            <a:schemeClr val="lt1"/>
+          </a:fontRef>
+        </p:style>
+        <p:txBody>
+          <a:bodyPr rtlCol="0" anchor="ctr"/>
+          <a:lstStyle/>
+          <a:p>
+            <a:pPr algn="ctr"/>
+            <a:endParaRPr lang="es-ES">
+              <a:solidFill>
+                <a:schemeClr val="tx1"/>
+              </a:solidFill>
+            </a:endParaRPr>
+          </a:p>
+        </p:txBody>
+      </p:sp>
+      <p:pic>
+        <p:nvPicPr>
+          <p:cNvPr id="25" name="Imagen 24">
+            <a:extLst>
+              <a:ext uri="{FF2B5EF4-FFF2-40B4-BE49-F238E27FC236}">
+                <a16:creationId xmlns:a16="http://schemas.microsoft.com/office/drawing/2014/main" id="{DE771639-1A9A-4B59-A4CC-6BFA11AAD360}"/>
+              </a:ext>
+            </a:extLst>
+          </p:cNvPr>
+          <p:cNvPicPr>
+            <a:picLocks noChangeAspect="1"/>
+          </p:cNvPicPr>
+          <p:nvPr/>
+        </p:nvPicPr>
+        <p:blipFill>
+          <a:blip r:embed="rId4">
+            <a:extLst>
+              <a:ext uri="{28A0092B-C50C-407E-A947-70E740481C1C}">
+                <a14:useLocalDpi xmlns:a14="http://schemas.microsoft.com/office/drawing/2010/main" val="0"/>
+              </a:ext>
+            </a:extLst>
+          </a:blip>
+          <a:stretch>
+            <a:fillRect/>
+          </a:stretch>
+        </p:blipFill>
+        <p:spPr>
+          <a:xfrm rot="16200000">
+            <a:off x="2449978" y="8614834"/>
+            <a:ext cx="244706" cy="244706"/>
+          </a:xfrm>
+          <a:prstGeom prst="rect">
+            <a:avLst/>
+          </a:prstGeom>
+          <a:effectLst>
+            <a:glow rad="63500">
+              <a:schemeClr val="accent6">
+                <a:satMod val="175000"/>
+                <a:alpha val="40000"/>
+              </a:schemeClr>
+            </a:glow>
+            <a:outerShdw blurRad="50800" dist="38100" dir="2700000" algn="tl" rotWithShape="0">
+              <a:prstClr val="black">
+                <a:alpha val="40000"/>
+              </a:prstClr>
+            </a:outerShdw>
+          </a:effectLst>
+        </p:spPr>
+      </p:pic>
+      <p:pic>
+        <p:nvPicPr>
+          <p:cNvPr id="27" name="Imagen 26">
+            <a:extLst>
+              <a:ext uri="{FF2B5EF4-FFF2-40B4-BE49-F238E27FC236}">
+                <a16:creationId xmlns:a16="http://schemas.microsoft.com/office/drawing/2014/main" id="{346E4155-4CCC-43C1-9E94-87F2F5BF408D}"/>
+              </a:ext>
+            </a:extLst>
+          </p:cNvPr>
+          <p:cNvPicPr>
+            <a:picLocks noChangeAspect="1"/>
+          </p:cNvPicPr>
+          <p:nvPr/>
+        </p:nvPicPr>
+        <p:blipFill>
+          <a:blip r:embed="rId10"/>
+          <a:stretch>
+            <a:fillRect/>
+          </a:stretch>
+        </p:blipFill>
+        <p:spPr>
+          <a:xfrm>
+            <a:off x="353567" y="2970262"/>
+            <a:ext cx="6510529" cy="390363"/>
+          </a:xfrm>
+          <a:prstGeom prst="rect">
+            <a:avLst/>
+          </a:prstGeom>
+        </p:spPr>
+      </p:pic>
+      <p:cxnSp>
+        <p:nvCxnSpPr>
+          <p:cNvPr id="28" name="Conector recto 27">
+            <a:extLst>
+              <a:ext uri="{FF2B5EF4-FFF2-40B4-BE49-F238E27FC236}">
+                <a16:creationId xmlns:a16="http://schemas.microsoft.com/office/drawing/2014/main" id="{932CC674-8EDC-4217-9317-5CE63C89A646}"/>
+              </a:ext>
+            </a:extLst>
+          </p:cNvPr>
+          <p:cNvCxnSpPr>
+            <a:cxnSpLocks/>
+          </p:cNvCxnSpPr>
+          <p:nvPr/>
+        </p:nvCxnSpPr>
+        <p:spPr>
+          <a:xfrm>
+            <a:off x="353536" y="3414680"/>
+            <a:ext cx="6492240" cy="0"/>
+          </a:xfrm>
+          <a:prstGeom prst="line">
+            <a:avLst/>
+          </a:prstGeom>
+          <a:effectLst>
+            <a:outerShdw blurRad="50800" dist="38100" dir="2700000" algn="tl" rotWithShape="0">
+              <a:prstClr val="black">
+                <a:alpha val="40000"/>
+              </a:prstClr>
+            </a:outerShdw>
+          </a:effectLst>
+        </p:spPr>
+        <p:style>
+          <a:lnRef idx="2">
+            <a:schemeClr val="accent3"/>
+          </a:lnRef>
+          <a:fillRef idx="0">
+            <a:schemeClr val="accent3"/>
+          </a:fillRef>
+          <a:effectRef idx="1">
+            <a:schemeClr val="accent3"/>
+          </a:effectRef>
+          <a:fontRef idx="minor">
+            <a:schemeClr val="tx1"/>
+          </a:fontRef>
+        </p:style>
+      </p:cxnSp>
+      <p:cxnSp>
+        <p:nvCxnSpPr>
+          <p:cNvPr id="29" name="Conector recto 28">
+            <a:extLst>
+              <a:ext uri="{FF2B5EF4-FFF2-40B4-BE49-F238E27FC236}">
+                <a16:creationId xmlns:a16="http://schemas.microsoft.com/office/drawing/2014/main" id="{12DB5BC0-D063-464C-865B-C5516C0A75B0}"/>
+              </a:ext>
+            </a:extLst>
+          </p:cNvPr>
+          <p:cNvCxnSpPr>
+            <a:cxnSpLocks/>
+          </p:cNvCxnSpPr>
+          <p:nvPr/>
+        </p:nvCxnSpPr>
+        <p:spPr>
+          <a:xfrm>
+            <a:off x="353536" y="5237384"/>
+            <a:ext cx="6492240" cy="0"/>
+          </a:xfrm>
+          <a:prstGeom prst="line">
+            <a:avLst/>
+          </a:prstGeom>
+          <a:effectLst>
+            <a:outerShdw blurRad="50800" dist="38100" dir="2700000" algn="tl" rotWithShape="0">
+              <a:prstClr val="black">
+                <a:alpha val="40000"/>
+              </a:prstClr>
+            </a:outerShdw>
+          </a:effectLst>
+        </p:spPr>
+        <p:style>
+          <a:lnRef idx="2">
+            <a:schemeClr val="accent3"/>
+          </a:lnRef>
+          <a:fillRef idx="0">
+            <a:schemeClr val="accent3"/>
+          </a:fillRef>
+          <a:effectRef idx="1">
+            <a:schemeClr val="accent3"/>
+          </a:effectRef>
+          <a:fontRef idx="minor">
+            <a:schemeClr val="tx1"/>
+          </a:fontRef>
+        </p:style>
+      </p:cxnSp>
+      <p:cxnSp>
+        <p:nvCxnSpPr>
+          <p:cNvPr id="30" name="Conector recto 29">
+            <a:extLst>
+              <a:ext uri="{FF2B5EF4-FFF2-40B4-BE49-F238E27FC236}">
+                <a16:creationId xmlns:a16="http://schemas.microsoft.com/office/drawing/2014/main" id="{DCFF082B-07F4-4362-85C6-EFF4C9D00E00}"/>
+              </a:ext>
+            </a:extLst>
+          </p:cNvPr>
+          <p:cNvCxnSpPr>
+            <a:cxnSpLocks/>
+          </p:cNvCxnSpPr>
+          <p:nvPr/>
+        </p:nvCxnSpPr>
+        <p:spPr>
+          <a:xfrm>
+            <a:off x="353536" y="7694072"/>
+            <a:ext cx="6492240" cy="0"/>
+          </a:xfrm>
+          <a:prstGeom prst="line">
+            <a:avLst/>
+          </a:prstGeom>
+          <a:effectLst>
+            <a:outerShdw blurRad="50800" dist="38100" dir="2700000" algn="tl" rotWithShape="0">
+              <a:prstClr val="black">
+                <a:alpha val="40000"/>
+              </a:prstClr>
+            </a:outerShdw>
+          </a:effectLst>
+        </p:spPr>
+        <p:style>
+          <a:lnRef idx="2">
+            <a:schemeClr val="accent3"/>
+          </a:lnRef>
+          <a:fillRef idx="0">
+            <a:schemeClr val="accent3"/>
+          </a:fillRef>
+          <a:effectRef idx="1">
+            <a:schemeClr val="accent3"/>
+          </a:effectRef>
+          <a:fontRef idx="minor">
+            <a:schemeClr val="tx1"/>
+          </a:fontRef>
+        </p:style>
+      </p:cxnSp>
+      <p:cxnSp>
+        <p:nvCxnSpPr>
+          <p:cNvPr id="31" name="Conector recto 30">
+            <a:extLst>
+              <a:ext uri="{FF2B5EF4-FFF2-40B4-BE49-F238E27FC236}">
+                <a16:creationId xmlns:a16="http://schemas.microsoft.com/office/drawing/2014/main" id="{D00E8A8B-0AE5-4872-BC3D-8D2CCEFB18F4}"/>
+              </a:ext>
+            </a:extLst>
+          </p:cNvPr>
+          <p:cNvCxnSpPr>
+            <a:cxnSpLocks/>
+          </p:cNvCxnSpPr>
+          <p:nvPr/>
+        </p:nvCxnSpPr>
+        <p:spPr>
+          <a:xfrm>
+            <a:off x="353536" y="9297320"/>
+            <a:ext cx="6492240" cy="0"/>
+          </a:xfrm>
+          <a:prstGeom prst="line">
+            <a:avLst/>
+          </a:prstGeom>
+          <a:effectLst>
+            <a:outerShdw blurRad="50800" dist="38100" dir="2700000" algn="tl" rotWithShape="0">
+              <a:prstClr val="black">
+                <a:alpha val="40000"/>
+              </a:prstClr>
+            </a:outerShdw>
+          </a:effectLst>
+        </p:spPr>
+        <p:style>
+          <a:lnRef idx="2">
+            <a:schemeClr val="accent3"/>
+          </a:lnRef>
+          <a:fillRef idx="0">
+            <a:schemeClr val="accent3"/>
+          </a:fillRef>
+          <a:effectRef idx="1">
+            <a:schemeClr val="accent3"/>
+          </a:effectRef>
+          <a:fontRef idx="minor">
+            <a:schemeClr val="tx1"/>
+          </a:fontRef>
+        </p:style>
+      </p:cxnSp>
+      <p:pic>
+        <p:nvPicPr>
+          <p:cNvPr id="33" name="Imagen 32">
+            <a:extLst>
+              <a:ext uri="{FF2B5EF4-FFF2-40B4-BE49-F238E27FC236}">
+                <a16:creationId xmlns:a16="http://schemas.microsoft.com/office/drawing/2014/main" id="{5271DACA-3BD2-4E5D-9D73-8AD895A191D4}"/>
+              </a:ext>
+            </a:extLst>
+          </p:cNvPr>
+          <p:cNvPicPr>
+            <a:picLocks noChangeAspect="1"/>
+          </p:cNvPicPr>
+          <p:nvPr/>
+        </p:nvPicPr>
+        <p:blipFill>
+          <a:blip r:embed="rId11"/>
+          <a:stretch>
+            <a:fillRect/>
+          </a:stretch>
+        </p:blipFill>
+        <p:spPr>
+          <a:xfrm>
+            <a:off x="353536" y="272010"/>
+            <a:ext cx="6845777" cy="1932788"/>
+          </a:xfrm>
+          <a:prstGeom prst="rect">
+            <a:avLst/>
+          </a:prstGeom>
+        </p:spPr>
+      </p:pic>
     </p:spTree>
     <p:extLst>
       <p:ext uri="{BB962C8B-B14F-4D97-AF65-F5344CB8AC3E}">
@@ -15223,6 +17347,644 @@
           <a:chExt cx="0" cy="0"/>
         </a:xfrm>
       </p:grpSpPr>
+      <p:pic>
+        <p:nvPicPr>
+          <p:cNvPr id="3" name="Imagen 2">
+            <a:extLst>
+              <a:ext uri="{FF2B5EF4-FFF2-40B4-BE49-F238E27FC236}">
+                <a16:creationId xmlns:a16="http://schemas.microsoft.com/office/drawing/2014/main" id="{A1D2094F-708D-458E-B619-123F42754700}"/>
+              </a:ext>
+            </a:extLst>
+          </p:cNvPr>
+          <p:cNvPicPr>
+            <a:picLocks noChangeAspect="1"/>
+          </p:cNvPicPr>
+          <p:nvPr/>
+        </p:nvPicPr>
+        <p:blipFill>
+          <a:blip r:embed="rId2"/>
+          <a:stretch>
+            <a:fillRect/>
+          </a:stretch>
+        </p:blipFill>
+        <p:spPr>
+          <a:xfrm>
+            <a:off x="2171720" y="1409018"/>
+            <a:ext cx="2962688" cy="438211"/>
+          </a:xfrm>
+          <a:prstGeom prst="rect">
+            <a:avLst/>
+          </a:prstGeom>
+        </p:spPr>
+      </p:pic>
+      <p:sp>
+        <p:nvSpPr>
+          <p:cNvPr id="6" name="Marco 5">
+            <a:extLst>
+              <a:ext uri="{FF2B5EF4-FFF2-40B4-BE49-F238E27FC236}">
+                <a16:creationId xmlns:a16="http://schemas.microsoft.com/office/drawing/2014/main" id="{503DB65C-06DF-4C17-9CD9-EFA5DDFE98F2}"/>
+              </a:ext>
+            </a:extLst>
+          </p:cNvPr>
+          <p:cNvSpPr/>
+          <p:nvPr/>
+        </p:nvSpPr>
+        <p:spPr>
+          <a:xfrm>
+            <a:off x="2171720" y="1379774"/>
+            <a:ext cx="2962688" cy="467455"/>
+          </a:xfrm>
+          <a:prstGeom prst="frame">
+            <a:avLst>
+              <a:gd name="adj1" fmla="val 568"/>
+            </a:avLst>
+          </a:prstGeom>
+          <a:scene3d>
+            <a:camera prst="orthographicFront"/>
+            <a:lightRig rig="threePt" dir="t"/>
+          </a:scene3d>
+          <a:sp3d>
+            <a:bevelT prst="slope"/>
+          </a:sp3d>
+        </p:spPr>
+        <p:style>
+          <a:lnRef idx="2">
+            <a:schemeClr val="accent1">
+              <a:shade val="50000"/>
+            </a:schemeClr>
+          </a:lnRef>
+          <a:fillRef idx="1">
+            <a:schemeClr val="accent1"/>
+          </a:fillRef>
+          <a:effectRef idx="0">
+            <a:schemeClr val="accent1"/>
+          </a:effectRef>
+          <a:fontRef idx="minor">
+            <a:schemeClr val="lt1"/>
+          </a:fontRef>
+        </p:style>
+        <p:txBody>
+          <a:bodyPr rtlCol="0" anchor="ctr"/>
+          <a:lstStyle/>
+          <a:p>
+            <a:pPr algn="ctr"/>
+            <a:endParaRPr lang="es-ES">
+              <a:solidFill>
+                <a:schemeClr val="tx1"/>
+              </a:solidFill>
+            </a:endParaRPr>
+          </a:p>
+        </p:txBody>
+      </p:sp>
+      <p:pic>
+        <p:nvPicPr>
+          <p:cNvPr id="7" name="Imagen 6">
+            <a:extLst>
+              <a:ext uri="{FF2B5EF4-FFF2-40B4-BE49-F238E27FC236}">
+                <a16:creationId xmlns:a16="http://schemas.microsoft.com/office/drawing/2014/main" id="{10D3C80B-8B38-45AB-9780-B54FFBD270F9}"/>
+              </a:ext>
+            </a:extLst>
+          </p:cNvPr>
+          <p:cNvPicPr>
+            <a:picLocks noChangeAspect="1"/>
+          </p:cNvPicPr>
+          <p:nvPr/>
+        </p:nvPicPr>
+        <p:blipFill>
+          <a:blip r:embed="rId3">
+            <a:extLst>
+              <a:ext uri="{28A0092B-C50C-407E-A947-70E740481C1C}">
+                <a14:useLocalDpi xmlns:a14="http://schemas.microsoft.com/office/drawing/2010/main" val="0"/>
+              </a:ext>
+            </a:extLst>
+          </a:blip>
+          <a:stretch>
+            <a:fillRect/>
+          </a:stretch>
+        </p:blipFill>
+        <p:spPr>
+          <a:xfrm rot="19946515">
+            <a:off x="3129216" y="1197748"/>
+            <a:ext cx="244706" cy="244706"/>
+          </a:xfrm>
+          <a:prstGeom prst="rect">
+            <a:avLst/>
+          </a:prstGeom>
+          <a:effectLst>
+            <a:glow rad="63500">
+              <a:schemeClr val="accent6">
+                <a:satMod val="175000"/>
+                <a:alpha val="40000"/>
+              </a:schemeClr>
+            </a:glow>
+            <a:outerShdw blurRad="50800" dist="38100" dir="2700000" algn="tl" rotWithShape="0">
+              <a:prstClr val="black">
+                <a:alpha val="40000"/>
+              </a:prstClr>
+            </a:outerShdw>
+          </a:effectLst>
+        </p:spPr>
+      </p:pic>
+      <p:pic>
+        <p:nvPicPr>
+          <p:cNvPr id="31" name="Imagen 30">
+            <a:extLst>
+              <a:ext uri="{FF2B5EF4-FFF2-40B4-BE49-F238E27FC236}">
+                <a16:creationId xmlns:a16="http://schemas.microsoft.com/office/drawing/2014/main" id="{9C3467EB-9BFE-454A-8C9E-F99B6CE85871}"/>
+              </a:ext>
+            </a:extLst>
+          </p:cNvPr>
+          <p:cNvPicPr>
+            <a:picLocks noChangeAspect="1"/>
+          </p:cNvPicPr>
+          <p:nvPr/>
+        </p:nvPicPr>
+        <p:blipFill>
+          <a:blip r:embed="rId4"/>
+          <a:stretch>
+            <a:fillRect/>
+          </a:stretch>
+        </p:blipFill>
+        <p:spPr>
+          <a:xfrm>
+            <a:off x="353536" y="452526"/>
+            <a:ext cx="6845777" cy="634378"/>
+          </a:xfrm>
+          <a:prstGeom prst="rect">
+            <a:avLst/>
+          </a:prstGeom>
+        </p:spPr>
+      </p:pic>
+      <p:pic>
+        <p:nvPicPr>
+          <p:cNvPr id="35" name="Imagen 34">
+            <a:extLst>
+              <a:ext uri="{FF2B5EF4-FFF2-40B4-BE49-F238E27FC236}">
+                <a16:creationId xmlns:a16="http://schemas.microsoft.com/office/drawing/2014/main" id="{753D86A7-8692-455B-A6DF-74E17F8E327F}"/>
+              </a:ext>
+            </a:extLst>
+          </p:cNvPr>
+          <p:cNvPicPr>
+            <a:picLocks noChangeAspect="1"/>
+          </p:cNvPicPr>
+          <p:nvPr/>
+        </p:nvPicPr>
+        <p:blipFill>
+          <a:blip r:embed="rId5"/>
+          <a:stretch>
+            <a:fillRect/>
+          </a:stretch>
+        </p:blipFill>
+        <p:spPr>
+          <a:xfrm>
+            <a:off x="384048" y="2140765"/>
+            <a:ext cx="6815265" cy="901387"/>
+          </a:xfrm>
+          <a:prstGeom prst="rect">
+            <a:avLst/>
+          </a:prstGeom>
+        </p:spPr>
+      </p:pic>
+      <p:pic>
+        <p:nvPicPr>
+          <p:cNvPr id="37" name="Imagen 36">
+            <a:extLst>
+              <a:ext uri="{FF2B5EF4-FFF2-40B4-BE49-F238E27FC236}">
+                <a16:creationId xmlns:a16="http://schemas.microsoft.com/office/drawing/2014/main" id="{FDBAD47C-3924-4FBB-BDE6-738CAB79FA73}"/>
+              </a:ext>
+            </a:extLst>
+          </p:cNvPr>
+          <p:cNvPicPr>
+            <a:picLocks noChangeAspect="1"/>
+          </p:cNvPicPr>
+          <p:nvPr/>
+        </p:nvPicPr>
+        <p:blipFill>
+          <a:blip r:embed="rId6"/>
+          <a:stretch>
+            <a:fillRect/>
+          </a:stretch>
+        </p:blipFill>
+        <p:spPr>
+          <a:xfrm>
+            <a:off x="3057529" y="3122855"/>
+            <a:ext cx="895475" cy="352474"/>
+          </a:xfrm>
+          <a:prstGeom prst="rect">
+            <a:avLst/>
+          </a:prstGeom>
+        </p:spPr>
+      </p:pic>
+      <p:sp>
+        <p:nvSpPr>
+          <p:cNvPr id="38" name="Marco 37">
+            <a:extLst>
+              <a:ext uri="{FF2B5EF4-FFF2-40B4-BE49-F238E27FC236}">
+                <a16:creationId xmlns:a16="http://schemas.microsoft.com/office/drawing/2014/main" id="{C9A4509F-9E39-4565-A0BB-8CFC7F416B9A}"/>
+              </a:ext>
+            </a:extLst>
+          </p:cNvPr>
+          <p:cNvSpPr/>
+          <p:nvPr/>
+        </p:nvSpPr>
+        <p:spPr>
+          <a:xfrm>
+            <a:off x="3058306" y="3122856"/>
+            <a:ext cx="894698" cy="352474"/>
+          </a:xfrm>
+          <a:prstGeom prst="frame">
+            <a:avLst>
+              <a:gd name="adj1" fmla="val 568"/>
+            </a:avLst>
+          </a:prstGeom>
+          <a:scene3d>
+            <a:camera prst="orthographicFront"/>
+            <a:lightRig rig="threePt" dir="t"/>
+          </a:scene3d>
+          <a:sp3d>
+            <a:bevelT prst="slope"/>
+          </a:sp3d>
+        </p:spPr>
+        <p:style>
+          <a:lnRef idx="2">
+            <a:schemeClr val="accent1">
+              <a:shade val="50000"/>
+            </a:schemeClr>
+          </a:lnRef>
+          <a:fillRef idx="1">
+            <a:schemeClr val="accent1"/>
+          </a:fillRef>
+          <a:effectRef idx="0">
+            <a:schemeClr val="accent1"/>
+          </a:effectRef>
+          <a:fontRef idx="minor">
+            <a:schemeClr val="lt1"/>
+          </a:fontRef>
+        </p:style>
+        <p:txBody>
+          <a:bodyPr rtlCol="0" anchor="ctr"/>
+          <a:lstStyle/>
+          <a:p>
+            <a:pPr algn="ctr"/>
+            <a:endParaRPr lang="es-ES">
+              <a:solidFill>
+                <a:schemeClr val="tx1"/>
+              </a:solidFill>
+            </a:endParaRPr>
+          </a:p>
+        </p:txBody>
+      </p:sp>
+      <p:pic>
+        <p:nvPicPr>
+          <p:cNvPr id="39" name="Imagen 38">
+            <a:extLst>
+              <a:ext uri="{FF2B5EF4-FFF2-40B4-BE49-F238E27FC236}">
+                <a16:creationId xmlns:a16="http://schemas.microsoft.com/office/drawing/2014/main" id="{254FA0D3-6C40-4B6E-BE08-423ABF1A4DE0}"/>
+              </a:ext>
+            </a:extLst>
+          </p:cNvPr>
+          <p:cNvPicPr>
+            <a:picLocks noChangeAspect="1"/>
+          </p:cNvPicPr>
+          <p:nvPr/>
+        </p:nvPicPr>
+        <p:blipFill>
+          <a:blip r:embed="rId3">
+            <a:extLst>
+              <a:ext uri="{28A0092B-C50C-407E-A947-70E740481C1C}">
+                <a14:useLocalDpi xmlns:a14="http://schemas.microsoft.com/office/drawing/2010/main" val="0"/>
+              </a:ext>
+            </a:extLst>
+          </a:blip>
+          <a:stretch>
+            <a:fillRect/>
+          </a:stretch>
+        </p:blipFill>
+        <p:spPr>
+          <a:xfrm rot="16200000">
+            <a:off x="2718566" y="3185054"/>
+            <a:ext cx="244706" cy="244706"/>
+          </a:xfrm>
+          <a:prstGeom prst="rect">
+            <a:avLst/>
+          </a:prstGeom>
+          <a:effectLst>
+            <a:glow rad="63500">
+              <a:schemeClr val="accent6">
+                <a:satMod val="175000"/>
+                <a:alpha val="40000"/>
+              </a:schemeClr>
+            </a:glow>
+            <a:outerShdw blurRad="50800" dist="38100" dir="2700000" algn="tl" rotWithShape="0">
+              <a:prstClr val="black">
+                <a:alpha val="40000"/>
+              </a:prstClr>
+            </a:outerShdw>
+          </a:effectLst>
+        </p:spPr>
+      </p:pic>
+      <p:pic>
+        <p:nvPicPr>
+          <p:cNvPr id="43" name="Imagen 42">
+            <a:extLst>
+              <a:ext uri="{FF2B5EF4-FFF2-40B4-BE49-F238E27FC236}">
+                <a16:creationId xmlns:a16="http://schemas.microsoft.com/office/drawing/2014/main" id="{C6581D66-8D44-4E4C-8F94-D84085379DCE}"/>
+              </a:ext>
+            </a:extLst>
+          </p:cNvPr>
+          <p:cNvPicPr>
+            <a:picLocks noChangeAspect="1"/>
+          </p:cNvPicPr>
+          <p:nvPr/>
+        </p:nvPicPr>
+        <p:blipFill>
+          <a:blip r:embed="rId7"/>
+          <a:stretch>
+            <a:fillRect/>
+          </a:stretch>
+        </p:blipFill>
+        <p:spPr>
+          <a:xfrm>
+            <a:off x="768095" y="3636210"/>
+            <a:ext cx="5827777" cy="2441502"/>
+          </a:xfrm>
+          <a:prstGeom prst="rect">
+            <a:avLst/>
+          </a:prstGeom>
+        </p:spPr>
+      </p:pic>
+      <p:sp>
+        <p:nvSpPr>
+          <p:cNvPr id="44" name="Marco 43">
+            <a:extLst>
+              <a:ext uri="{FF2B5EF4-FFF2-40B4-BE49-F238E27FC236}">
+                <a16:creationId xmlns:a16="http://schemas.microsoft.com/office/drawing/2014/main" id="{5EFE193D-47BE-4F18-85AE-7E5A7FA966EF}"/>
+              </a:ext>
+            </a:extLst>
+          </p:cNvPr>
+          <p:cNvSpPr/>
+          <p:nvPr/>
+        </p:nvSpPr>
+        <p:spPr>
+          <a:xfrm>
+            <a:off x="813618" y="3620915"/>
+            <a:ext cx="5782254" cy="2456797"/>
+          </a:xfrm>
+          <a:prstGeom prst="frame">
+            <a:avLst>
+              <a:gd name="adj1" fmla="val 568"/>
+            </a:avLst>
+          </a:prstGeom>
+          <a:scene3d>
+            <a:camera prst="orthographicFront"/>
+            <a:lightRig rig="threePt" dir="t"/>
+          </a:scene3d>
+          <a:sp3d>
+            <a:bevelT prst="slope"/>
+          </a:sp3d>
+        </p:spPr>
+        <p:style>
+          <a:lnRef idx="2">
+            <a:schemeClr val="accent1">
+              <a:shade val="50000"/>
+            </a:schemeClr>
+          </a:lnRef>
+          <a:fillRef idx="1">
+            <a:schemeClr val="accent1"/>
+          </a:fillRef>
+          <a:effectRef idx="0">
+            <a:schemeClr val="accent1"/>
+          </a:effectRef>
+          <a:fontRef idx="minor">
+            <a:schemeClr val="lt1"/>
+          </a:fontRef>
+        </p:style>
+        <p:txBody>
+          <a:bodyPr rtlCol="0" anchor="ctr"/>
+          <a:lstStyle/>
+          <a:p>
+            <a:pPr algn="ctr"/>
+            <a:endParaRPr lang="es-ES">
+              <a:solidFill>
+                <a:schemeClr val="tx1"/>
+              </a:solidFill>
+            </a:endParaRPr>
+          </a:p>
+        </p:txBody>
+      </p:sp>
+      <p:pic>
+        <p:nvPicPr>
+          <p:cNvPr id="46" name="Imagen 45">
+            <a:extLst>
+              <a:ext uri="{FF2B5EF4-FFF2-40B4-BE49-F238E27FC236}">
+                <a16:creationId xmlns:a16="http://schemas.microsoft.com/office/drawing/2014/main" id="{9467803F-FCB5-4DAE-A4E1-589359176137}"/>
+              </a:ext>
+            </a:extLst>
+          </p:cNvPr>
+          <p:cNvPicPr>
+            <a:picLocks noChangeAspect="1"/>
+          </p:cNvPicPr>
+          <p:nvPr/>
+        </p:nvPicPr>
+        <p:blipFill>
+          <a:blip r:embed="rId8"/>
+          <a:stretch>
+            <a:fillRect/>
+          </a:stretch>
+        </p:blipFill>
+        <p:spPr>
+          <a:xfrm>
+            <a:off x="384048" y="6453993"/>
+            <a:ext cx="6528815" cy="738100"/>
+          </a:xfrm>
+          <a:prstGeom prst="rect">
+            <a:avLst/>
+          </a:prstGeom>
+        </p:spPr>
+      </p:pic>
+      <p:pic>
+        <p:nvPicPr>
+          <p:cNvPr id="48" name="Imagen 47">
+            <a:extLst>
+              <a:ext uri="{FF2B5EF4-FFF2-40B4-BE49-F238E27FC236}">
+                <a16:creationId xmlns:a16="http://schemas.microsoft.com/office/drawing/2014/main" id="{704C1912-95DA-455E-8AB9-EFD29FDC4AD2}"/>
+              </a:ext>
+            </a:extLst>
+          </p:cNvPr>
+          <p:cNvPicPr>
+            <a:picLocks noChangeAspect="1"/>
+          </p:cNvPicPr>
+          <p:nvPr/>
+        </p:nvPicPr>
+        <p:blipFill>
+          <a:blip r:embed="rId9"/>
+          <a:stretch>
+            <a:fillRect/>
+          </a:stretch>
+        </p:blipFill>
+        <p:spPr>
+          <a:xfrm>
+            <a:off x="2025723" y="7430610"/>
+            <a:ext cx="2959085" cy="459821"/>
+          </a:xfrm>
+          <a:prstGeom prst="rect">
+            <a:avLst/>
+          </a:prstGeom>
+        </p:spPr>
+      </p:pic>
+      <p:sp>
+        <p:nvSpPr>
+          <p:cNvPr id="49" name="Marco 48">
+            <a:extLst>
+              <a:ext uri="{FF2B5EF4-FFF2-40B4-BE49-F238E27FC236}">
+                <a16:creationId xmlns:a16="http://schemas.microsoft.com/office/drawing/2014/main" id="{A19292F2-8FC6-4F97-BAD3-937C9AD1C366}"/>
+              </a:ext>
+            </a:extLst>
+          </p:cNvPr>
+          <p:cNvSpPr/>
+          <p:nvPr/>
+        </p:nvSpPr>
+        <p:spPr>
+          <a:xfrm>
+            <a:off x="2022120" y="7446041"/>
+            <a:ext cx="2962688" cy="393416"/>
+          </a:xfrm>
+          <a:prstGeom prst="frame">
+            <a:avLst>
+              <a:gd name="adj1" fmla="val 568"/>
+            </a:avLst>
+          </a:prstGeom>
+          <a:scene3d>
+            <a:camera prst="orthographicFront"/>
+            <a:lightRig rig="threePt" dir="t"/>
+          </a:scene3d>
+          <a:sp3d>
+            <a:bevelT prst="slope"/>
+          </a:sp3d>
+        </p:spPr>
+        <p:style>
+          <a:lnRef idx="2">
+            <a:schemeClr val="accent1">
+              <a:shade val="50000"/>
+            </a:schemeClr>
+          </a:lnRef>
+          <a:fillRef idx="1">
+            <a:schemeClr val="accent1"/>
+          </a:fillRef>
+          <a:effectRef idx="0">
+            <a:schemeClr val="accent1"/>
+          </a:effectRef>
+          <a:fontRef idx="minor">
+            <a:schemeClr val="lt1"/>
+          </a:fontRef>
+        </p:style>
+        <p:txBody>
+          <a:bodyPr rtlCol="0" anchor="ctr"/>
+          <a:lstStyle/>
+          <a:p>
+            <a:pPr algn="ctr"/>
+            <a:endParaRPr lang="es-ES">
+              <a:solidFill>
+                <a:schemeClr val="tx1"/>
+              </a:solidFill>
+            </a:endParaRPr>
+          </a:p>
+        </p:txBody>
+      </p:sp>
+      <p:pic>
+        <p:nvPicPr>
+          <p:cNvPr id="50" name="Imagen 49">
+            <a:extLst>
+              <a:ext uri="{FF2B5EF4-FFF2-40B4-BE49-F238E27FC236}">
+                <a16:creationId xmlns:a16="http://schemas.microsoft.com/office/drawing/2014/main" id="{4212BC92-CA25-414A-B869-DB485DC7230B}"/>
+              </a:ext>
+            </a:extLst>
+          </p:cNvPr>
+          <p:cNvPicPr>
+            <a:picLocks noChangeAspect="1"/>
+          </p:cNvPicPr>
+          <p:nvPr/>
+        </p:nvPicPr>
+        <p:blipFill>
+          <a:blip r:embed="rId3">
+            <a:extLst>
+              <a:ext uri="{28A0092B-C50C-407E-A947-70E740481C1C}">
+                <a14:useLocalDpi xmlns:a14="http://schemas.microsoft.com/office/drawing/2010/main" val="0"/>
+              </a:ext>
+            </a:extLst>
+          </a:blip>
+          <a:stretch>
+            <a:fillRect/>
+          </a:stretch>
+        </p:blipFill>
+        <p:spPr>
+          <a:xfrm rot="2810314">
+            <a:off x="4794379" y="7200924"/>
+            <a:ext cx="380857" cy="380857"/>
+          </a:xfrm>
+          <a:prstGeom prst="rect">
+            <a:avLst/>
+          </a:prstGeom>
+          <a:effectLst>
+            <a:glow rad="63500">
+              <a:schemeClr val="accent6">
+                <a:satMod val="175000"/>
+                <a:alpha val="40000"/>
+              </a:schemeClr>
+            </a:glow>
+            <a:outerShdw blurRad="50800" dist="38100" dir="2700000" algn="tl" rotWithShape="0">
+              <a:prstClr val="black">
+                <a:alpha val="40000"/>
+              </a:prstClr>
+            </a:outerShdw>
+          </a:effectLst>
+        </p:spPr>
+      </p:pic>
+      <p:cxnSp>
+        <p:nvCxnSpPr>
+          <p:cNvPr id="51" name="Conector recto 50">
+            <a:extLst>
+              <a:ext uri="{FF2B5EF4-FFF2-40B4-BE49-F238E27FC236}">
+                <a16:creationId xmlns:a16="http://schemas.microsoft.com/office/drawing/2014/main" id="{70655457-5EB2-4E66-B100-664A58FD27B6}"/>
+              </a:ext>
+            </a:extLst>
+          </p:cNvPr>
+          <p:cNvCxnSpPr>
+            <a:cxnSpLocks/>
+          </p:cNvCxnSpPr>
+          <p:nvPr/>
+        </p:nvCxnSpPr>
+        <p:spPr>
+          <a:xfrm>
+            <a:off x="353536" y="8273192"/>
+            <a:ext cx="6492240" cy="0"/>
+          </a:xfrm>
+          <a:prstGeom prst="line">
+            <a:avLst/>
+          </a:prstGeom>
+          <a:effectLst>
+            <a:outerShdw blurRad="50800" dist="38100" dir="2700000" algn="tl" rotWithShape="0">
+              <a:prstClr val="black">
+                <a:alpha val="40000"/>
+              </a:prstClr>
+            </a:outerShdw>
+          </a:effectLst>
+        </p:spPr>
+        <p:style>
+          <a:lnRef idx="2">
+            <a:schemeClr val="accent3"/>
+          </a:lnRef>
+          <a:fillRef idx="0">
+            <a:schemeClr val="accent3"/>
+          </a:fillRef>
+          <a:effectRef idx="1">
+            <a:schemeClr val="accent3"/>
+          </a:effectRef>
+          <a:fontRef idx="minor">
+            <a:schemeClr val="tx1"/>
+          </a:fontRef>
+        </p:style>
+      </p:cxnSp>
     </p:spTree>
     <p:extLst>
       <p:ext uri="{BB962C8B-B14F-4D97-AF65-F5344CB8AC3E}">
@@ -15261,6 +18023,674 @@
           <a:chExt cx="0" cy="0"/>
         </a:xfrm>
       </p:grpSpPr>
+      <p:pic>
+        <p:nvPicPr>
+          <p:cNvPr id="2" name="Imagen 1">
+            <a:extLst>
+              <a:ext uri="{FF2B5EF4-FFF2-40B4-BE49-F238E27FC236}">
+                <a16:creationId xmlns:a16="http://schemas.microsoft.com/office/drawing/2014/main" id="{3AC05894-263F-4EFE-BFAB-758B071B8F75}"/>
+              </a:ext>
+            </a:extLst>
+          </p:cNvPr>
+          <p:cNvPicPr>
+            <a:picLocks noChangeAspect="1"/>
+          </p:cNvPicPr>
+          <p:nvPr/>
+        </p:nvPicPr>
+        <p:blipFill>
+          <a:blip r:embed="rId2"/>
+          <a:stretch>
+            <a:fillRect/>
+          </a:stretch>
+        </p:blipFill>
+        <p:spPr>
+          <a:xfrm>
+            <a:off x="384048" y="6083739"/>
+            <a:ext cx="6815265" cy="893393"/>
+          </a:xfrm>
+          <a:prstGeom prst="rect">
+            <a:avLst/>
+          </a:prstGeom>
+        </p:spPr>
+      </p:pic>
+      <p:pic>
+        <p:nvPicPr>
+          <p:cNvPr id="3" name="Imagen 2">
+            <a:extLst>
+              <a:ext uri="{FF2B5EF4-FFF2-40B4-BE49-F238E27FC236}">
+                <a16:creationId xmlns:a16="http://schemas.microsoft.com/office/drawing/2014/main" id="{F5B30FD2-D893-4389-9D6A-4C432D27FE15}"/>
+              </a:ext>
+            </a:extLst>
+          </p:cNvPr>
+          <p:cNvPicPr>
+            <a:picLocks noChangeAspect="1"/>
+          </p:cNvPicPr>
+          <p:nvPr/>
+        </p:nvPicPr>
+        <p:blipFill>
+          <a:blip r:embed="rId3"/>
+          <a:stretch>
+            <a:fillRect/>
+          </a:stretch>
+        </p:blipFill>
+        <p:spPr>
+          <a:xfrm>
+            <a:off x="384048" y="6983976"/>
+            <a:ext cx="6815265" cy="744984"/>
+          </a:xfrm>
+          <a:prstGeom prst="rect">
+            <a:avLst/>
+          </a:prstGeom>
+        </p:spPr>
+      </p:pic>
+      <p:pic>
+        <p:nvPicPr>
+          <p:cNvPr id="4" name="Imagen 3">
+            <a:extLst>
+              <a:ext uri="{FF2B5EF4-FFF2-40B4-BE49-F238E27FC236}">
+                <a16:creationId xmlns:a16="http://schemas.microsoft.com/office/drawing/2014/main" id="{2BE612A8-0478-46DD-BD18-951C82F60B1B}"/>
+              </a:ext>
+            </a:extLst>
+          </p:cNvPr>
+          <p:cNvPicPr>
+            <a:picLocks noChangeAspect="1"/>
+          </p:cNvPicPr>
+          <p:nvPr/>
+        </p:nvPicPr>
+        <p:blipFill>
+          <a:blip r:embed="rId4"/>
+          <a:stretch>
+            <a:fillRect/>
+          </a:stretch>
+        </p:blipFill>
+        <p:spPr>
+          <a:xfrm>
+            <a:off x="1556259" y="7841426"/>
+            <a:ext cx="4086795" cy="438211"/>
+          </a:xfrm>
+          <a:prstGeom prst="rect">
+            <a:avLst/>
+          </a:prstGeom>
+        </p:spPr>
+      </p:pic>
+      <p:sp>
+        <p:nvSpPr>
+          <p:cNvPr id="5" name="Marco 4">
+            <a:extLst>
+              <a:ext uri="{FF2B5EF4-FFF2-40B4-BE49-F238E27FC236}">
+                <a16:creationId xmlns:a16="http://schemas.microsoft.com/office/drawing/2014/main" id="{37BDD4ED-4E1D-41FA-AFDE-CABB6A66E5AD}"/>
+              </a:ext>
+            </a:extLst>
+          </p:cNvPr>
+          <p:cNvSpPr/>
+          <p:nvPr/>
+        </p:nvSpPr>
+        <p:spPr>
+          <a:xfrm>
+            <a:off x="1556258" y="7812182"/>
+            <a:ext cx="4086795" cy="467455"/>
+          </a:xfrm>
+          <a:prstGeom prst="frame">
+            <a:avLst>
+              <a:gd name="adj1" fmla="val 568"/>
+            </a:avLst>
+          </a:prstGeom>
+          <a:scene3d>
+            <a:camera prst="orthographicFront"/>
+            <a:lightRig rig="threePt" dir="t"/>
+          </a:scene3d>
+          <a:sp3d>
+            <a:bevelT prst="slope"/>
+          </a:sp3d>
+        </p:spPr>
+        <p:style>
+          <a:lnRef idx="2">
+            <a:schemeClr val="accent1">
+              <a:shade val="50000"/>
+            </a:schemeClr>
+          </a:lnRef>
+          <a:fillRef idx="1">
+            <a:schemeClr val="accent1"/>
+          </a:fillRef>
+          <a:effectRef idx="0">
+            <a:schemeClr val="accent1"/>
+          </a:effectRef>
+          <a:fontRef idx="minor">
+            <a:schemeClr val="lt1"/>
+          </a:fontRef>
+        </p:style>
+        <p:txBody>
+          <a:bodyPr rtlCol="0" anchor="ctr"/>
+          <a:lstStyle/>
+          <a:p>
+            <a:pPr algn="ctr"/>
+            <a:endParaRPr lang="es-ES">
+              <a:solidFill>
+                <a:schemeClr val="tx1"/>
+              </a:solidFill>
+            </a:endParaRPr>
+          </a:p>
+        </p:txBody>
+      </p:sp>
+      <p:pic>
+        <p:nvPicPr>
+          <p:cNvPr id="6" name="Imagen 5">
+            <a:extLst>
+              <a:ext uri="{FF2B5EF4-FFF2-40B4-BE49-F238E27FC236}">
+                <a16:creationId xmlns:a16="http://schemas.microsoft.com/office/drawing/2014/main" id="{9ADAC8A0-F66D-4F35-8598-0B1BF26580ED}"/>
+              </a:ext>
+            </a:extLst>
+          </p:cNvPr>
+          <p:cNvPicPr>
+            <a:picLocks noChangeAspect="1"/>
+          </p:cNvPicPr>
+          <p:nvPr/>
+        </p:nvPicPr>
+        <p:blipFill>
+          <a:blip r:embed="rId5">
+            <a:extLst>
+              <a:ext uri="{28A0092B-C50C-407E-A947-70E740481C1C}">
+                <a14:useLocalDpi xmlns:a14="http://schemas.microsoft.com/office/drawing/2010/main" val="0"/>
+              </a:ext>
+            </a:extLst>
+          </a:blip>
+          <a:stretch>
+            <a:fillRect/>
+          </a:stretch>
+        </p:blipFill>
+        <p:spPr>
+          <a:xfrm rot="16200000">
+            <a:off x="1234392" y="7938178"/>
+            <a:ext cx="244706" cy="244706"/>
+          </a:xfrm>
+          <a:prstGeom prst="rect">
+            <a:avLst/>
+          </a:prstGeom>
+          <a:effectLst>
+            <a:glow rad="63500">
+              <a:schemeClr val="accent6">
+                <a:satMod val="175000"/>
+                <a:alpha val="40000"/>
+              </a:schemeClr>
+            </a:glow>
+            <a:outerShdw blurRad="50800" dist="38100" dir="2700000" algn="tl" rotWithShape="0">
+              <a:prstClr val="black">
+                <a:alpha val="40000"/>
+              </a:prstClr>
+            </a:outerShdw>
+          </a:effectLst>
+        </p:spPr>
+      </p:pic>
+      <p:pic>
+        <p:nvPicPr>
+          <p:cNvPr id="7" name="Imagen 6">
+            <a:extLst>
+              <a:ext uri="{FF2B5EF4-FFF2-40B4-BE49-F238E27FC236}">
+                <a16:creationId xmlns:a16="http://schemas.microsoft.com/office/drawing/2014/main" id="{A6BBB0B2-A18A-4D23-8F57-40FC44911EE2}"/>
+              </a:ext>
+            </a:extLst>
+          </p:cNvPr>
+          <p:cNvPicPr>
+            <a:picLocks noChangeAspect="1"/>
+          </p:cNvPicPr>
+          <p:nvPr/>
+        </p:nvPicPr>
+        <p:blipFill>
+          <a:blip r:embed="rId6"/>
+          <a:stretch>
+            <a:fillRect/>
+          </a:stretch>
+        </p:blipFill>
+        <p:spPr>
+          <a:xfrm>
+            <a:off x="384049" y="8468892"/>
+            <a:ext cx="6547104" cy="426862"/>
+          </a:xfrm>
+          <a:prstGeom prst="rect">
+            <a:avLst/>
+          </a:prstGeom>
+        </p:spPr>
+      </p:pic>
+      <p:cxnSp>
+        <p:nvCxnSpPr>
+          <p:cNvPr id="8" name="Conector recto 7">
+            <a:extLst>
+              <a:ext uri="{FF2B5EF4-FFF2-40B4-BE49-F238E27FC236}">
+                <a16:creationId xmlns:a16="http://schemas.microsoft.com/office/drawing/2014/main" id="{566D37E0-FFFB-46C0-B78D-CE23F9F18508}"/>
+              </a:ext>
+            </a:extLst>
+          </p:cNvPr>
+          <p:cNvCxnSpPr>
+            <a:cxnSpLocks/>
+          </p:cNvCxnSpPr>
+          <p:nvPr/>
+        </p:nvCxnSpPr>
+        <p:spPr>
+          <a:xfrm>
+            <a:off x="353536" y="9023000"/>
+            <a:ext cx="6492240" cy="0"/>
+          </a:xfrm>
+          <a:prstGeom prst="line">
+            <a:avLst/>
+          </a:prstGeom>
+          <a:effectLst>
+            <a:outerShdw blurRad="50800" dist="38100" dir="2700000" algn="tl" rotWithShape="0">
+              <a:prstClr val="black">
+                <a:alpha val="40000"/>
+              </a:prstClr>
+            </a:outerShdw>
+          </a:effectLst>
+        </p:spPr>
+        <p:style>
+          <a:lnRef idx="2">
+            <a:schemeClr val="accent3"/>
+          </a:lnRef>
+          <a:fillRef idx="0">
+            <a:schemeClr val="accent3"/>
+          </a:fillRef>
+          <a:effectRef idx="1">
+            <a:schemeClr val="accent3"/>
+          </a:effectRef>
+          <a:fontRef idx="minor">
+            <a:schemeClr val="tx1"/>
+          </a:fontRef>
+        </p:style>
+      </p:cxnSp>
+      <p:pic>
+        <p:nvPicPr>
+          <p:cNvPr id="9" name="Imagen 8">
+            <a:extLst>
+              <a:ext uri="{FF2B5EF4-FFF2-40B4-BE49-F238E27FC236}">
+                <a16:creationId xmlns:a16="http://schemas.microsoft.com/office/drawing/2014/main" id="{AE97C3D3-6F43-4F06-95E3-32F73D2CCDCC}"/>
+              </a:ext>
+            </a:extLst>
+          </p:cNvPr>
+          <p:cNvPicPr>
+            <a:picLocks noChangeAspect="1"/>
+          </p:cNvPicPr>
+          <p:nvPr/>
+        </p:nvPicPr>
+        <p:blipFill>
+          <a:blip r:embed="rId7"/>
+          <a:stretch>
+            <a:fillRect/>
+          </a:stretch>
+        </p:blipFill>
+        <p:spPr>
+          <a:xfrm>
+            <a:off x="3369093" y="1892081"/>
+            <a:ext cx="752580" cy="371527"/>
+          </a:xfrm>
+          <a:prstGeom prst="rect">
+            <a:avLst/>
+          </a:prstGeom>
+        </p:spPr>
+      </p:pic>
+      <p:sp>
+        <p:nvSpPr>
+          <p:cNvPr id="10" name="Marco 9">
+            <a:extLst>
+              <a:ext uri="{FF2B5EF4-FFF2-40B4-BE49-F238E27FC236}">
+                <a16:creationId xmlns:a16="http://schemas.microsoft.com/office/drawing/2014/main" id="{014219A5-490C-47FA-90E4-DA13A47B2A19}"/>
+              </a:ext>
+            </a:extLst>
+          </p:cNvPr>
+          <p:cNvSpPr/>
+          <p:nvPr/>
+        </p:nvSpPr>
+        <p:spPr>
+          <a:xfrm>
+            <a:off x="3356900" y="1910369"/>
+            <a:ext cx="752581" cy="371527"/>
+          </a:xfrm>
+          <a:prstGeom prst="frame">
+            <a:avLst>
+              <a:gd name="adj1" fmla="val 568"/>
+            </a:avLst>
+          </a:prstGeom>
+          <a:scene3d>
+            <a:camera prst="orthographicFront"/>
+            <a:lightRig rig="threePt" dir="t"/>
+          </a:scene3d>
+          <a:sp3d>
+            <a:bevelT prst="slope"/>
+          </a:sp3d>
+        </p:spPr>
+        <p:style>
+          <a:lnRef idx="2">
+            <a:schemeClr val="accent1">
+              <a:shade val="50000"/>
+            </a:schemeClr>
+          </a:lnRef>
+          <a:fillRef idx="1">
+            <a:schemeClr val="accent1"/>
+          </a:fillRef>
+          <a:effectRef idx="0">
+            <a:schemeClr val="accent1"/>
+          </a:effectRef>
+          <a:fontRef idx="minor">
+            <a:schemeClr val="lt1"/>
+          </a:fontRef>
+        </p:style>
+        <p:txBody>
+          <a:bodyPr rtlCol="0" anchor="ctr"/>
+          <a:lstStyle/>
+          <a:p>
+            <a:pPr algn="ctr"/>
+            <a:endParaRPr lang="es-ES">
+              <a:solidFill>
+                <a:schemeClr val="tx1"/>
+              </a:solidFill>
+            </a:endParaRPr>
+          </a:p>
+        </p:txBody>
+      </p:sp>
+      <p:pic>
+        <p:nvPicPr>
+          <p:cNvPr id="11" name="Imagen 10">
+            <a:extLst>
+              <a:ext uri="{FF2B5EF4-FFF2-40B4-BE49-F238E27FC236}">
+                <a16:creationId xmlns:a16="http://schemas.microsoft.com/office/drawing/2014/main" id="{F3805469-F31E-47FB-94F4-7BD6146245D5}"/>
+              </a:ext>
+            </a:extLst>
+          </p:cNvPr>
+          <p:cNvPicPr>
+            <a:picLocks noChangeAspect="1"/>
+          </p:cNvPicPr>
+          <p:nvPr/>
+        </p:nvPicPr>
+        <p:blipFill>
+          <a:blip r:embed="rId5">
+            <a:extLst>
+              <a:ext uri="{28A0092B-C50C-407E-A947-70E740481C1C}">
+                <a14:useLocalDpi xmlns:a14="http://schemas.microsoft.com/office/drawing/2010/main" val="0"/>
+              </a:ext>
+            </a:extLst>
+          </a:blip>
+          <a:stretch>
+            <a:fillRect/>
+          </a:stretch>
+        </p:blipFill>
+        <p:spPr>
+          <a:xfrm rot="16200000">
+            <a:off x="2935176" y="1915581"/>
+            <a:ext cx="348338" cy="348338"/>
+          </a:xfrm>
+          <a:prstGeom prst="rect">
+            <a:avLst/>
+          </a:prstGeom>
+          <a:effectLst>
+            <a:glow rad="63500">
+              <a:schemeClr val="accent6">
+                <a:satMod val="175000"/>
+                <a:alpha val="40000"/>
+              </a:schemeClr>
+            </a:glow>
+            <a:outerShdw blurRad="50800" dist="38100" dir="2700000" algn="tl" rotWithShape="0">
+              <a:prstClr val="black">
+                <a:alpha val="40000"/>
+              </a:prstClr>
+            </a:outerShdw>
+          </a:effectLst>
+        </p:spPr>
+      </p:pic>
+      <p:pic>
+        <p:nvPicPr>
+          <p:cNvPr id="12" name="Imagen 11">
+            <a:extLst>
+              <a:ext uri="{FF2B5EF4-FFF2-40B4-BE49-F238E27FC236}">
+                <a16:creationId xmlns:a16="http://schemas.microsoft.com/office/drawing/2014/main" id="{D12C323F-6FF7-4ACD-9A7D-BC09C96E5D33}"/>
+              </a:ext>
+            </a:extLst>
+          </p:cNvPr>
+          <p:cNvPicPr>
+            <a:picLocks noChangeAspect="1"/>
+          </p:cNvPicPr>
+          <p:nvPr/>
+        </p:nvPicPr>
+        <p:blipFill>
+          <a:blip r:embed="rId8"/>
+          <a:stretch>
+            <a:fillRect/>
+          </a:stretch>
+        </p:blipFill>
+        <p:spPr>
+          <a:xfrm>
+            <a:off x="2445856" y="2473137"/>
+            <a:ext cx="2691648" cy="1406163"/>
+          </a:xfrm>
+          <a:prstGeom prst="rect">
+            <a:avLst/>
+          </a:prstGeom>
+        </p:spPr>
+      </p:pic>
+      <p:sp>
+        <p:nvSpPr>
+          <p:cNvPr id="13" name="Marco 12">
+            <a:extLst>
+              <a:ext uri="{FF2B5EF4-FFF2-40B4-BE49-F238E27FC236}">
+                <a16:creationId xmlns:a16="http://schemas.microsoft.com/office/drawing/2014/main" id="{C04021F4-9280-4431-A71E-01A1E4E048D5}"/>
+              </a:ext>
+            </a:extLst>
+          </p:cNvPr>
+          <p:cNvSpPr/>
+          <p:nvPr/>
+        </p:nvSpPr>
+        <p:spPr>
+          <a:xfrm>
+            <a:off x="2445856" y="2473137"/>
+            <a:ext cx="2691648" cy="1406163"/>
+          </a:xfrm>
+          <a:prstGeom prst="frame">
+            <a:avLst>
+              <a:gd name="adj1" fmla="val 568"/>
+            </a:avLst>
+          </a:prstGeom>
+          <a:scene3d>
+            <a:camera prst="orthographicFront"/>
+            <a:lightRig rig="threePt" dir="t"/>
+          </a:scene3d>
+          <a:sp3d>
+            <a:bevelT prst="slope"/>
+          </a:sp3d>
+        </p:spPr>
+        <p:style>
+          <a:lnRef idx="2">
+            <a:schemeClr val="accent1">
+              <a:shade val="50000"/>
+            </a:schemeClr>
+          </a:lnRef>
+          <a:fillRef idx="1">
+            <a:schemeClr val="accent1"/>
+          </a:fillRef>
+          <a:effectRef idx="0">
+            <a:schemeClr val="accent1"/>
+          </a:effectRef>
+          <a:fontRef idx="minor">
+            <a:schemeClr val="lt1"/>
+          </a:fontRef>
+        </p:style>
+        <p:txBody>
+          <a:bodyPr rtlCol="0" anchor="ctr"/>
+          <a:lstStyle/>
+          <a:p>
+            <a:pPr algn="ctr"/>
+            <a:endParaRPr lang="es-ES">
+              <a:solidFill>
+                <a:schemeClr val="tx1"/>
+              </a:solidFill>
+            </a:endParaRPr>
+          </a:p>
+        </p:txBody>
+      </p:sp>
+      <p:pic>
+        <p:nvPicPr>
+          <p:cNvPr id="14" name="Imagen 13">
+            <a:extLst>
+              <a:ext uri="{FF2B5EF4-FFF2-40B4-BE49-F238E27FC236}">
+                <a16:creationId xmlns:a16="http://schemas.microsoft.com/office/drawing/2014/main" id="{AA610A89-A2DB-4F07-92DC-2D111F1DDBCA}"/>
+              </a:ext>
+            </a:extLst>
+          </p:cNvPr>
+          <p:cNvPicPr>
+            <a:picLocks noChangeAspect="1"/>
+          </p:cNvPicPr>
+          <p:nvPr/>
+        </p:nvPicPr>
+        <p:blipFill>
+          <a:blip r:embed="rId9"/>
+          <a:stretch>
+            <a:fillRect/>
+          </a:stretch>
+        </p:blipFill>
+        <p:spPr>
+          <a:xfrm>
+            <a:off x="384049" y="3984920"/>
+            <a:ext cx="6547104" cy="1726039"/>
+          </a:xfrm>
+          <a:prstGeom prst="rect">
+            <a:avLst/>
+          </a:prstGeom>
+        </p:spPr>
+      </p:pic>
+      <p:sp>
+        <p:nvSpPr>
+          <p:cNvPr id="15" name="Marco 14">
+            <a:extLst>
+              <a:ext uri="{FF2B5EF4-FFF2-40B4-BE49-F238E27FC236}">
+                <a16:creationId xmlns:a16="http://schemas.microsoft.com/office/drawing/2014/main" id="{9EE4DFBE-1616-436A-8570-C18258A58316}"/>
+              </a:ext>
+            </a:extLst>
+          </p:cNvPr>
+          <p:cNvSpPr/>
+          <p:nvPr/>
+        </p:nvSpPr>
+        <p:spPr>
+          <a:xfrm>
+            <a:off x="384048" y="4003208"/>
+            <a:ext cx="6547104" cy="1726039"/>
+          </a:xfrm>
+          <a:prstGeom prst="frame">
+            <a:avLst>
+              <a:gd name="adj1" fmla="val 568"/>
+            </a:avLst>
+          </a:prstGeom>
+          <a:scene3d>
+            <a:camera prst="orthographicFront"/>
+            <a:lightRig rig="threePt" dir="t"/>
+          </a:scene3d>
+          <a:sp3d>
+            <a:bevelT prst="slope"/>
+          </a:sp3d>
+        </p:spPr>
+        <p:style>
+          <a:lnRef idx="2">
+            <a:schemeClr val="accent1">
+              <a:shade val="50000"/>
+            </a:schemeClr>
+          </a:lnRef>
+          <a:fillRef idx="1">
+            <a:schemeClr val="accent1"/>
+          </a:fillRef>
+          <a:effectRef idx="0">
+            <a:schemeClr val="accent1"/>
+          </a:effectRef>
+          <a:fontRef idx="minor">
+            <a:schemeClr val="lt1"/>
+          </a:fontRef>
+        </p:style>
+        <p:txBody>
+          <a:bodyPr rtlCol="0" anchor="ctr"/>
+          <a:lstStyle/>
+          <a:p>
+            <a:pPr algn="ctr"/>
+            <a:endParaRPr lang="es-ES">
+              <a:solidFill>
+                <a:schemeClr val="tx1"/>
+              </a:solidFill>
+            </a:endParaRPr>
+          </a:p>
+        </p:txBody>
+      </p:sp>
+      <p:pic>
+        <p:nvPicPr>
+          <p:cNvPr id="16" name="Imagen 15">
+            <a:extLst>
+              <a:ext uri="{FF2B5EF4-FFF2-40B4-BE49-F238E27FC236}">
+                <a16:creationId xmlns:a16="http://schemas.microsoft.com/office/drawing/2014/main" id="{D04C162A-2487-4761-AF03-9A01398F4613}"/>
+              </a:ext>
+            </a:extLst>
+          </p:cNvPr>
+          <p:cNvPicPr>
+            <a:picLocks noChangeAspect="1"/>
+          </p:cNvPicPr>
+          <p:nvPr/>
+        </p:nvPicPr>
+        <p:blipFill>
+          <a:blip r:embed="rId5">
+            <a:extLst>
+              <a:ext uri="{28A0092B-C50C-407E-A947-70E740481C1C}">
+                <a14:useLocalDpi xmlns:a14="http://schemas.microsoft.com/office/drawing/2010/main" val="0"/>
+              </a:ext>
+            </a:extLst>
+          </a:blip>
+          <a:stretch>
+            <a:fillRect/>
+          </a:stretch>
+        </p:blipFill>
+        <p:spPr>
+          <a:xfrm rot="16200000">
+            <a:off x="2935176" y="3521089"/>
+            <a:ext cx="244706" cy="244706"/>
+          </a:xfrm>
+          <a:prstGeom prst="rect">
+            <a:avLst/>
+          </a:prstGeom>
+          <a:effectLst>
+            <a:glow rad="63500">
+              <a:schemeClr val="accent6">
+                <a:satMod val="175000"/>
+                <a:alpha val="40000"/>
+              </a:schemeClr>
+            </a:glow>
+            <a:outerShdw blurRad="50800" dist="38100" dir="2700000" algn="tl" rotWithShape="0">
+              <a:prstClr val="black">
+                <a:alpha val="40000"/>
+              </a:prstClr>
+            </a:outerShdw>
+          </a:effectLst>
+        </p:spPr>
+      </p:pic>
+      <p:pic>
+        <p:nvPicPr>
+          <p:cNvPr id="18" name="Imagen 17">
+            <a:extLst>
+              <a:ext uri="{FF2B5EF4-FFF2-40B4-BE49-F238E27FC236}">
+                <a16:creationId xmlns:a16="http://schemas.microsoft.com/office/drawing/2014/main" id="{86076163-38FE-4ED4-883A-6F1F80769DF5}"/>
+              </a:ext>
+            </a:extLst>
+          </p:cNvPr>
+          <p:cNvPicPr>
+            <a:picLocks noChangeAspect="1"/>
+          </p:cNvPicPr>
+          <p:nvPr/>
+        </p:nvPicPr>
+        <p:blipFill>
+          <a:blip r:embed="rId10"/>
+          <a:stretch>
+            <a:fillRect/>
+          </a:stretch>
+        </p:blipFill>
+        <p:spPr>
+          <a:xfrm>
+            <a:off x="353536" y="537617"/>
+            <a:ext cx="6845777" cy="1146949"/>
+          </a:xfrm>
+          <a:prstGeom prst="rect">
+            <a:avLst/>
+          </a:prstGeom>
+        </p:spPr>
+      </p:pic>
     </p:spTree>
     <p:extLst>
       <p:ext uri="{BB962C8B-B14F-4D97-AF65-F5344CB8AC3E}">
@@ -15299,6 +18729,1054 @@
           <a:chExt cx="0" cy="0"/>
         </a:xfrm>
       </p:grpSpPr>
+      <p:pic>
+        <p:nvPicPr>
+          <p:cNvPr id="3" name="Imagen 2">
+            <a:extLst>
+              <a:ext uri="{FF2B5EF4-FFF2-40B4-BE49-F238E27FC236}">
+                <a16:creationId xmlns:a16="http://schemas.microsoft.com/office/drawing/2014/main" id="{60CBA87D-5FFA-4B23-B9B8-C55A3A94A842}"/>
+              </a:ext>
+            </a:extLst>
+          </p:cNvPr>
+          <p:cNvPicPr>
+            <a:picLocks noChangeAspect="1"/>
+          </p:cNvPicPr>
+          <p:nvPr/>
+        </p:nvPicPr>
+        <p:blipFill>
+          <a:blip r:embed="rId2"/>
+          <a:stretch>
+            <a:fillRect/>
+          </a:stretch>
+        </p:blipFill>
+        <p:spPr>
+          <a:xfrm>
+            <a:off x="310896" y="479807"/>
+            <a:ext cx="6888417" cy="689545"/>
+          </a:xfrm>
+          <a:prstGeom prst="rect">
+            <a:avLst/>
+          </a:prstGeom>
+        </p:spPr>
+      </p:pic>
+      <p:pic>
+        <p:nvPicPr>
+          <p:cNvPr id="5" name="Imagen 4">
+            <a:extLst>
+              <a:ext uri="{FF2B5EF4-FFF2-40B4-BE49-F238E27FC236}">
+                <a16:creationId xmlns:a16="http://schemas.microsoft.com/office/drawing/2014/main" id="{173305B3-817A-4D39-8B3D-99583760B7F7}"/>
+              </a:ext>
+            </a:extLst>
+          </p:cNvPr>
+          <p:cNvPicPr>
+            <a:picLocks noChangeAspect="1"/>
+          </p:cNvPicPr>
+          <p:nvPr/>
+        </p:nvPicPr>
+        <p:blipFill>
+          <a:blip r:embed="rId3"/>
+          <a:stretch>
+            <a:fillRect/>
+          </a:stretch>
+        </p:blipFill>
+        <p:spPr>
+          <a:xfrm>
+            <a:off x="310896" y="1849017"/>
+            <a:ext cx="3828224" cy="2410812"/>
+          </a:xfrm>
+          <a:prstGeom prst="rect">
+            <a:avLst/>
+          </a:prstGeom>
+        </p:spPr>
+      </p:pic>
+      <p:pic>
+        <p:nvPicPr>
+          <p:cNvPr id="7" name="Imagen 6">
+            <a:extLst>
+              <a:ext uri="{FF2B5EF4-FFF2-40B4-BE49-F238E27FC236}">
+                <a16:creationId xmlns:a16="http://schemas.microsoft.com/office/drawing/2014/main" id="{99CB402B-B6C8-4C5E-ABA7-C6A6B3F5598A}"/>
+              </a:ext>
+            </a:extLst>
+          </p:cNvPr>
+          <p:cNvPicPr>
+            <a:picLocks noChangeAspect="1"/>
+          </p:cNvPicPr>
+          <p:nvPr/>
+        </p:nvPicPr>
+        <p:blipFill>
+          <a:blip r:embed="rId4"/>
+          <a:stretch>
+            <a:fillRect/>
+          </a:stretch>
+        </p:blipFill>
+        <p:spPr>
+          <a:xfrm>
+            <a:off x="4754880" y="1849017"/>
+            <a:ext cx="2261489" cy="2121603"/>
+          </a:xfrm>
+          <a:prstGeom prst="rect">
+            <a:avLst/>
+          </a:prstGeom>
+        </p:spPr>
+      </p:pic>
+      <p:pic>
+        <p:nvPicPr>
+          <p:cNvPr id="9" name="Imagen 8">
+            <a:extLst>
+              <a:ext uri="{FF2B5EF4-FFF2-40B4-BE49-F238E27FC236}">
+                <a16:creationId xmlns:a16="http://schemas.microsoft.com/office/drawing/2014/main" id="{D0DCB470-EE52-4B2E-AE6D-784F21DCAEC0}"/>
+              </a:ext>
+            </a:extLst>
+          </p:cNvPr>
+          <p:cNvPicPr>
+            <a:picLocks noChangeAspect="1"/>
+          </p:cNvPicPr>
+          <p:nvPr/>
+        </p:nvPicPr>
+        <p:blipFill>
+          <a:blip r:embed="rId5"/>
+          <a:stretch>
+            <a:fillRect/>
+          </a:stretch>
+        </p:blipFill>
+        <p:spPr>
+          <a:xfrm>
+            <a:off x="3199550" y="1274897"/>
+            <a:ext cx="800212" cy="342948"/>
+          </a:xfrm>
+          <a:prstGeom prst="rect">
+            <a:avLst/>
+          </a:prstGeom>
+        </p:spPr>
+      </p:pic>
+      <p:pic>
+        <p:nvPicPr>
+          <p:cNvPr id="10" name="Imagen 9">
+            <a:extLst>
+              <a:ext uri="{FF2B5EF4-FFF2-40B4-BE49-F238E27FC236}">
+                <a16:creationId xmlns:a16="http://schemas.microsoft.com/office/drawing/2014/main" id="{D19FD984-3B64-4B18-A6EA-11A7C57A3477}"/>
+              </a:ext>
+            </a:extLst>
+          </p:cNvPr>
+          <p:cNvPicPr>
+            <a:picLocks noChangeAspect="1"/>
+          </p:cNvPicPr>
+          <p:nvPr/>
+        </p:nvPicPr>
+        <p:blipFill>
+          <a:blip r:embed="rId6">
+            <a:extLst>
+              <a:ext uri="{28A0092B-C50C-407E-A947-70E740481C1C}">
+                <a14:useLocalDpi xmlns:a14="http://schemas.microsoft.com/office/drawing/2010/main" val="0"/>
+              </a:ext>
+            </a:extLst>
+          </a:blip>
+          <a:stretch>
+            <a:fillRect/>
+          </a:stretch>
+        </p:blipFill>
+        <p:spPr>
+          <a:xfrm rot="16200000">
+            <a:off x="2807160" y="1274897"/>
+            <a:ext cx="348338" cy="348338"/>
+          </a:xfrm>
+          <a:prstGeom prst="rect">
+            <a:avLst/>
+          </a:prstGeom>
+          <a:effectLst>
+            <a:glow rad="63500">
+              <a:schemeClr val="accent6">
+                <a:satMod val="175000"/>
+                <a:alpha val="40000"/>
+              </a:schemeClr>
+            </a:glow>
+            <a:outerShdw blurRad="50800" dist="38100" dir="2700000" algn="tl" rotWithShape="0">
+              <a:prstClr val="black">
+                <a:alpha val="40000"/>
+              </a:prstClr>
+            </a:outerShdw>
+          </a:effectLst>
+        </p:spPr>
+      </p:pic>
+      <p:sp>
+        <p:nvSpPr>
+          <p:cNvPr id="11" name="Marco 10">
+            <a:extLst>
+              <a:ext uri="{FF2B5EF4-FFF2-40B4-BE49-F238E27FC236}">
+                <a16:creationId xmlns:a16="http://schemas.microsoft.com/office/drawing/2014/main" id="{5A8DA532-B5CF-4971-8504-BC3363B60E7B}"/>
+              </a:ext>
+            </a:extLst>
+          </p:cNvPr>
+          <p:cNvSpPr/>
+          <p:nvPr/>
+        </p:nvSpPr>
+        <p:spPr>
+          <a:xfrm>
+            <a:off x="310896" y="1849017"/>
+            <a:ext cx="3828224" cy="2410812"/>
+          </a:xfrm>
+          <a:prstGeom prst="frame">
+            <a:avLst>
+              <a:gd name="adj1" fmla="val 568"/>
+            </a:avLst>
+          </a:prstGeom>
+          <a:scene3d>
+            <a:camera prst="orthographicFront"/>
+            <a:lightRig rig="threePt" dir="t"/>
+          </a:scene3d>
+          <a:sp3d>
+            <a:bevelT prst="slope"/>
+          </a:sp3d>
+        </p:spPr>
+        <p:style>
+          <a:lnRef idx="2">
+            <a:schemeClr val="accent1">
+              <a:shade val="50000"/>
+            </a:schemeClr>
+          </a:lnRef>
+          <a:fillRef idx="1">
+            <a:schemeClr val="accent1"/>
+          </a:fillRef>
+          <a:effectRef idx="0">
+            <a:schemeClr val="accent1"/>
+          </a:effectRef>
+          <a:fontRef idx="minor">
+            <a:schemeClr val="lt1"/>
+          </a:fontRef>
+        </p:style>
+        <p:txBody>
+          <a:bodyPr rtlCol="0" anchor="ctr"/>
+          <a:lstStyle/>
+          <a:p>
+            <a:pPr algn="ctr"/>
+            <a:endParaRPr lang="es-ES">
+              <a:solidFill>
+                <a:schemeClr val="tx1"/>
+              </a:solidFill>
+            </a:endParaRPr>
+          </a:p>
+        </p:txBody>
+      </p:sp>
+      <p:sp>
+        <p:nvSpPr>
+          <p:cNvPr id="12" name="Marco 11">
+            <a:extLst>
+              <a:ext uri="{FF2B5EF4-FFF2-40B4-BE49-F238E27FC236}">
+                <a16:creationId xmlns:a16="http://schemas.microsoft.com/office/drawing/2014/main" id="{EC719179-389D-4E4C-B534-1FC87C3C7E44}"/>
+              </a:ext>
+            </a:extLst>
+          </p:cNvPr>
+          <p:cNvSpPr/>
+          <p:nvPr/>
+        </p:nvSpPr>
+        <p:spPr>
+          <a:xfrm>
+            <a:off x="4798912" y="1849017"/>
+            <a:ext cx="1979840" cy="2121603"/>
+          </a:xfrm>
+          <a:prstGeom prst="frame">
+            <a:avLst>
+              <a:gd name="adj1" fmla="val 568"/>
+            </a:avLst>
+          </a:prstGeom>
+          <a:scene3d>
+            <a:camera prst="orthographicFront"/>
+            <a:lightRig rig="threePt" dir="t"/>
+          </a:scene3d>
+          <a:sp3d>
+            <a:bevelT prst="slope"/>
+          </a:sp3d>
+        </p:spPr>
+        <p:style>
+          <a:lnRef idx="2">
+            <a:schemeClr val="accent1">
+              <a:shade val="50000"/>
+            </a:schemeClr>
+          </a:lnRef>
+          <a:fillRef idx="1">
+            <a:schemeClr val="accent1"/>
+          </a:fillRef>
+          <a:effectRef idx="0">
+            <a:schemeClr val="accent1"/>
+          </a:effectRef>
+          <a:fontRef idx="minor">
+            <a:schemeClr val="lt1"/>
+          </a:fontRef>
+        </p:style>
+        <p:txBody>
+          <a:bodyPr rtlCol="0" anchor="ctr"/>
+          <a:lstStyle/>
+          <a:p>
+            <a:pPr algn="ctr"/>
+            <a:endParaRPr lang="es-ES">
+              <a:solidFill>
+                <a:schemeClr val="tx1"/>
+              </a:solidFill>
+            </a:endParaRPr>
+          </a:p>
+        </p:txBody>
+      </p:sp>
+      <p:pic>
+        <p:nvPicPr>
+          <p:cNvPr id="14" name="Imagen 13">
+            <a:extLst>
+              <a:ext uri="{FF2B5EF4-FFF2-40B4-BE49-F238E27FC236}">
+                <a16:creationId xmlns:a16="http://schemas.microsoft.com/office/drawing/2014/main" id="{F8F48368-9ABC-4128-9D5E-E8A559EEA221}"/>
+              </a:ext>
+            </a:extLst>
+          </p:cNvPr>
+          <p:cNvPicPr>
+            <a:picLocks noChangeAspect="1"/>
+          </p:cNvPicPr>
+          <p:nvPr/>
+        </p:nvPicPr>
+        <p:blipFill>
+          <a:blip r:embed="rId7"/>
+          <a:stretch>
+            <a:fillRect/>
+          </a:stretch>
+        </p:blipFill>
+        <p:spPr>
+          <a:xfrm>
+            <a:off x="310897" y="4540494"/>
+            <a:ext cx="6467856" cy="419818"/>
+          </a:xfrm>
+          <a:prstGeom prst="rect">
+            <a:avLst/>
+          </a:prstGeom>
+        </p:spPr>
+      </p:pic>
+      <p:cxnSp>
+        <p:nvCxnSpPr>
+          <p:cNvPr id="15" name="Conector recto 14">
+            <a:extLst>
+              <a:ext uri="{FF2B5EF4-FFF2-40B4-BE49-F238E27FC236}">
+                <a16:creationId xmlns:a16="http://schemas.microsoft.com/office/drawing/2014/main" id="{1557251B-50DE-4681-B0D6-12B37751B6C2}"/>
+              </a:ext>
+            </a:extLst>
+          </p:cNvPr>
+          <p:cNvCxnSpPr>
+            <a:cxnSpLocks/>
+          </p:cNvCxnSpPr>
+          <p:nvPr/>
+        </p:nvCxnSpPr>
+        <p:spPr>
+          <a:xfrm>
+            <a:off x="353536" y="5091080"/>
+            <a:ext cx="6492240" cy="0"/>
+          </a:xfrm>
+          <a:prstGeom prst="line">
+            <a:avLst/>
+          </a:prstGeom>
+          <a:effectLst>
+            <a:outerShdw blurRad="50800" dist="38100" dir="2700000" algn="tl" rotWithShape="0">
+              <a:prstClr val="black">
+                <a:alpha val="40000"/>
+              </a:prstClr>
+            </a:outerShdw>
+          </a:effectLst>
+        </p:spPr>
+        <p:style>
+          <a:lnRef idx="2">
+            <a:schemeClr val="accent3"/>
+          </a:lnRef>
+          <a:fillRef idx="0">
+            <a:schemeClr val="accent3"/>
+          </a:fillRef>
+          <a:effectRef idx="1">
+            <a:schemeClr val="accent3"/>
+          </a:effectRef>
+          <a:fontRef idx="minor">
+            <a:schemeClr val="tx1"/>
+          </a:fontRef>
+        </p:style>
+      </p:cxnSp>
+      <p:pic>
+        <p:nvPicPr>
+          <p:cNvPr id="17" name="Imagen 16">
+            <a:extLst>
+              <a:ext uri="{FF2B5EF4-FFF2-40B4-BE49-F238E27FC236}">
+                <a16:creationId xmlns:a16="http://schemas.microsoft.com/office/drawing/2014/main" id="{EF7E8B94-CB27-450D-9C28-E878057E5F92}"/>
+              </a:ext>
+            </a:extLst>
+          </p:cNvPr>
+          <p:cNvPicPr>
+            <a:picLocks noChangeAspect="1"/>
+          </p:cNvPicPr>
+          <p:nvPr/>
+        </p:nvPicPr>
+        <p:blipFill>
+          <a:blip r:embed="rId8"/>
+          <a:stretch>
+            <a:fillRect/>
+          </a:stretch>
+        </p:blipFill>
+        <p:spPr>
+          <a:xfrm>
+            <a:off x="1470383" y="6152387"/>
+            <a:ext cx="771633" cy="371527"/>
+          </a:xfrm>
+          <a:prstGeom prst="rect">
+            <a:avLst/>
+          </a:prstGeom>
+        </p:spPr>
+      </p:pic>
+      <p:sp>
+        <p:nvSpPr>
+          <p:cNvPr id="20" name="Marco 19">
+            <a:extLst>
+              <a:ext uri="{FF2B5EF4-FFF2-40B4-BE49-F238E27FC236}">
+                <a16:creationId xmlns:a16="http://schemas.microsoft.com/office/drawing/2014/main" id="{96461D7E-2563-4229-B482-DD80362228F4}"/>
+              </a:ext>
+            </a:extLst>
+          </p:cNvPr>
+          <p:cNvSpPr/>
+          <p:nvPr/>
+        </p:nvSpPr>
+        <p:spPr>
+          <a:xfrm>
+            <a:off x="3199550" y="1260608"/>
+            <a:ext cx="800211" cy="342948"/>
+          </a:xfrm>
+          <a:prstGeom prst="frame">
+            <a:avLst>
+              <a:gd name="adj1" fmla="val 568"/>
+            </a:avLst>
+          </a:prstGeom>
+          <a:scene3d>
+            <a:camera prst="orthographicFront"/>
+            <a:lightRig rig="threePt" dir="t"/>
+          </a:scene3d>
+          <a:sp3d>
+            <a:bevelT prst="slope"/>
+          </a:sp3d>
+        </p:spPr>
+        <p:style>
+          <a:lnRef idx="2">
+            <a:schemeClr val="accent1">
+              <a:shade val="50000"/>
+            </a:schemeClr>
+          </a:lnRef>
+          <a:fillRef idx="1">
+            <a:schemeClr val="accent1"/>
+          </a:fillRef>
+          <a:effectRef idx="0">
+            <a:schemeClr val="accent1"/>
+          </a:effectRef>
+          <a:fontRef idx="minor">
+            <a:schemeClr val="lt1"/>
+          </a:fontRef>
+        </p:style>
+        <p:txBody>
+          <a:bodyPr rtlCol="0" anchor="ctr"/>
+          <a:lstStyle/>
+          <a:p>
+            <a:pPr algn="ctr"/>
+            <a:endParaRPr lang="es-ES">
+              <a:solidFill>
+                <a:schemeClr val="tx1"/>
+              </a:solidFill>
+            </a:endParaRPr>
+          </a:p>
+        </p:txBody>
+      </p:sp>
+      <p:sp>
+        <p:nvSpPr>
+          <p:cNvPr id="21" name="Marco 20">
+            <a:extLst>
+              <a:ext uri="{FF2B5EF4-FFF2-40B4-BE49-F238E27FC236}">
+                <a16:creationId xmlns:a16="http://schemas.microsoft.com/office/drawing/2014/main" id="{257F4150-4786-4460-B519-F3238823AAA7}"/>
+              </a:ext>
+            </a:extLst>
+          </p:cNvPr>
+          <p:cNvSpPr/>
+          <p:nvPr/>
+        </p:nvSpPr>
+        <p:spPr>
+          <a:xfrm>
+            <a:off x="1450917" y="6180966"/>
+            <a:ext cx="800211" cy="342948"/>
+          </a:xfrm>
+          <a:prstGeom prst="frame">
+            <a:avLst>
+              <a:gd name="adj1" fmla="val 568"/>
+            </a:avLst>
+          </a:prstGeom>
+          <a:scene3d>
+            <a:camera prst="orthographicFront"/>
+            <a:lightRig rig="threePt" dir="t"/>
+          </a:scene3d>
+          <a:sp3d>
+            <a:bevelT prst="slope"/>
+          </a:sp3d>
+        </p:spPr>
+        <p:style>
+          <a:lnRef idx="2">
+            <a:schemeClr val="accent1">
+              <a:shade val="50000"/>
+            </a:schemeClr>
+          </a:lnRef>
+          <a:fillRef idx="1">
+            <a:schemeClr val="accent1"/>
+          </a:fillRef>
+          <a:effectRef idx="0">
+            <a:schemeClr val="accent1"/>
+          </a:effectRef>
+          <a:fontRef idx="minor">
+            <a:schemeClr val="lt1"/>
+          </a:fontRef>
+        </p:style>
+        <p:txBody>
+          <a:bodyPr rtlCol="0" anchor="ctr"/>
+          <a:lstStyle/>
+          <a:p>
+            <a:pPr algn="ctr"/>
+            <a:endParaRPr lang="es-ES">
+              <a:solidFill>
+                <a:schemeClr val="tx1"/>
+              </a:solidFill>
+            </a:endParaRPr>
+          </a:p>
+        </p:txBody>
+      </p:sp>
+      <p:pic>
+        <p:nvPicPr>
+          <p:cNvPr id="22" name="Imagen 21">
+            <a:extLst>
+              <a:ext uri="{FF2B5EF4-FFF2-40B4-BE49-F238E27FC236}">
+                <a16:creationId xmlns:a16="http://schemas.microsoft.com/office/drawing/2014/main" id="{1D53B3A6-9048-4247-97A3-E84DD950A688}"/>
+              </a:ext>
+            </a:extLst>
+          </p:cNvPr>
+          <p:cNvPicPr>
+            <a:picLocks noChangeAspect="1"/>
+          </p:cNvPicPr>
+          <p:nvPr/>
+        </p:nvPicPr>
+        <p:blipFill>
+          <a:blip r:embed="rId6">
+            <a:extLst>
+              <a:ext uri="{28A0092B-C50C-407E-A947-70E740481C1C}">
+                <a14:useLocalDpi xmlns:a14="http://schemas.microsoft.com/office/drawing/2010/main" val="0"/>
+              </a:ext>
+            </a:extLst>
+          </a:blip>
+          <a:stretch>
+            <a:fillRect/>
+          </a:stretch>
+        </p:blipFill>
+        <p:spPr>
+          <a:xfrm rot="16200000">
+            <a:off x="1021417" y="6181312"/>
+            <a:ext cx="348338" cy="348338"/>
+          </a:xfrm>
+          <a:prstGeom prst="rect">
+            <a:avLst/>
+          </a:prstGeom>
+          <a:effectLst>
+            <a:glow rad="63500">
+              <a:schemeClr val="accent6">
+                <a:satMod val="175000"/>
+                <a:alpha val="40000"/>
+              </a:schemeClr>
+            </a:glow>
+            <a:outerShdw blurRad="50800" dist="38100" dir="2700000" algn="tl" rotWithShape="0">
+              <a:prstClr val="black">
+                <a:alpha val="40000"/>
+              </a:prstClr>
+            </a:outerShdw>
+          </a:effectLst>
+        </p:spPr>
+      </p:pic>
+      <p:pic>
+        <p:nvPicPr>
+          <p:cNvPr id="26" name="Imagen 25">
+            <a:extLst>
+              <a:ext uri="{FF2B5EF4-FFF2-40B4-BE49-F238E27FC236}">
+                <a16:creationId xmlns:a16="http://schemas.microsoft.com/office/drawing/2014/main" id="{6823AEA5-7951-4511-8B42-C8EB355F4D96}"/>
+              </a:ext>
+            </a:extLst>
+          </p:cNvPr>
+          <p:cNvPicPr>
+            <a:picLocks noChangeAspect="1"/>
+          </p:cNvPicPr>
+          <p:nvPr/>
+        </p:nvPicPr>
+        <p:blipFill>
+          <a:blip r:embed="rId9"/>
+          <a:stretch>
+            <a:fillRect/>
+          </a:stretch>
+        </p:blipFill>
+        <p:spPr>
+          <a:xfrm>
+            <a:off x="310896" y="5324050"/>
+            <a:ext cx="6888417" cy="693699"/>
+          </a:xfrm>
+          <a:prstGeom prst="rect">
+            <a:avLst/>
+          </a:prstGeom>
+        </p:spPr>
+      </p:pic>
+      <p:pic>
+        <p:nvPicPr>
+          <p:cNvPr id="28" name="Imagen 27">
+            <a:extLst>
+              <a:ext uri="{FF2B5EF4-FFF2-40B4-BE49-F238E27FC236}">
+                <a16:creationId xmlns:a16="http://schemas.microsoft.com/office/drawing/2014/main" id="{DF41EA4D-D311-4CC1-956E-2F492AD1DCEB}"/>
+              </a:ext>
+            </a:extLst>
+          </p:cNvPr>
+          <p:cNvPicPr>
+            <a:picLocks noChangeAspect="1"/>
+          </p:cNvPicPr>
+          <p:nvPr/>
+        </p:nvPicPr>
+        <p:blipFill>
+          <a:blip r:embed="rId10"/>
+          <a:stretch>
+            <a:fillRect/>
+          </a:stretch>
+        </p:blipFill>
+        <p:spPr>
+          <a:xfrm>
+            <a:off x="3082536" y="6099992"/>
+            <a:ext cx="3696216" cy="504895"/>
+          </a:xfrm>
+          <a:prstGeom prst="rect">
+            <a:avLst/>
+          </a:prstGeom>
+        </p:spPr>
+      </p:pic>
+      <p:sp>
+        <p:nvSpPr>
+          <p:cNvPr id="29" name="Marco 28">
+            <a:extLst>
+              <a:ext uri="{FF2B5EF4-FFF2-40B4-BE49-F238E27FC236}">
+                <a16:creationId xmlns:a16="http://schemas.microsoft.com/office/drawing/2014/main" id="{4CC4B123-E633-4539-A3E9-140132A36E69}"/>
+              </a:ext>
+            </a:extLst>
+          </p:cNvPr>
+          <p:cNvSpPr/>
+          <p:nvPr/>
+        </p:nvSpPr>
+        <p:spPr>
+          <a:xfrm>
+            <a:off x="3082536" y="6108315"/>
+            <a:ext cx="3696216" cy="466091"/>
+          </a:xfrm>
+          <a:prstGeom prst="frame">
+            <a:avLst>
+              <a:gd name="adj1" fmla="val 568"/>
+            </a:avLst>
+          </a:prstGeom>
+          <a:scene3d>
+            <a:camera prst="orthographicFront"/>
+            <a:lightRig rig="threePt" dir="t"/>
+          </a:scene3d>
+          <a:sp3d>
+            <a:bevelT prst="slope"/>
+          </a:sp3d>
+        </p:spPr>
+        <p:style>
+          <a:lnRef idx="2">
+            <a:schemeClr val="accent1">
+              <a:shade val="50000"/>
+            </a:schemeClr>
+          </a:lnRef>
+          <a:fillRef idx="1">
+            <a:schemeClr val="accent1"/>
+          </a:fillRef>
+          <a:effectRef idx="0">
+            <a:schemeClr val="accent1"/>
+          </a:effectRef>
+          <a:fontRef idx="minor">
+            <a:schemeClr val="lt1"/>
+          </a:fontRef>
+        </p:style>
+        <p:txBody>
+          <a:bodyPr rtlCol="0" anchor="ctr"/>
+          <a:lstStyle/>
+          <a:p>
+            <a:pPr algn="ctr"/>
+            <a:endParaRPr lang="es-ES">
+              <a:solidFill>
+                <a:schemeClr val="tx1"/>
+              </a:solidFill>
+            </a:endParaRPr>
+          </a:p>
+        </p:txBody>
+      </p:sp>
+      <p:pic>
+        <p:nvPicPr>
+          <p:cNvPr id="30" name="Imagen 29">
+            <a:extLst>
+              <a:ext uri="{FF2B5EF4-FFF2-40B4-BE49-F238E27FC236}">
+                <a16:creationId xmlns:a16="http://schemas.microsoft.com/office/drawing/2014/main" id="{298E6EFF-0E5F-438B-8255-EDD4B2D74892}"/>
+              </a:ext>
+            </a:extLst>
+          </p:cNvPr>
+          <p:cNvPicPr>
+            <a:picLocks noChangeAspect="1"/>
+          </p:cNvPicPr>
+          <p:nvPr/>
+        </p:nvPicPr>
+        <p:blipFill>
+          <a:blip r:embed="rId6">
+            <a:extLst>
+              <a:ext uri="{28A0092B-C50C-407E-A947-70E740481C1C}">
+                <a14:useLocalDpi xmlns:a14="http://schemas.microsoft.com/office/drawing/2010/main" val="0"/>
+              </a:ext>
+            </a:extLst>
+          </a:blip>
+          <a:stretch>
+            <a:fillRect/>
+          </a:stretch>
+        </p:blipFill>
+        <p:spPr>
+          <a:xfrm rot="8242061">
+            <a:off x="6361975" y="6424492"/>
+            <a:ext cx="348338" cy="348338"/>
+          </a:xfrm>
+          <a:prstGeom prst="rect">
+            <a:avLst/>
+          </a:prstGeom>
+          <a:effectLst>
+            <a:glow rad="63500">
+              <a:schemeClr val="accent6">
+                <a:satMod val="175000"/>
+                <a:alpha val="40000"/>
+              </a:schemeClr>
+            </a:glow>
+            <a:outerShdw blurRad="50800" dist="38100" dir="2700000" algn="tl" rotWithShape="0">
+              <a:prstClr val="black">
+                <a:alpha val="40000"/>
+              </a:prstClr>
+            </a:outerShdw>
+          </a:effectLst>
+        </p:spPr>
+      </p:pic>
+      <p:pic>
+        <p:nvPicPr>
+          <p:cNvPr id="34" name="Imagen 33">
+            <a:extLst>
+              <a:ext uri="{FF2B5EF4-FFF2-40B4-BE49-F238E27FC236}">
+                <a16:creationId xmlns:a16="http://schemas.microsoft.com/office/drawing/2014/main" id="{11358E50-79BE-430E-AD65-5C494E7B23C8}"/>
+              </a:ext>
+            </a:extLst>
+          </p:cNvPr>
+          <p:cNvPicPr>
+            <a:picLocks noChangeAspect="1"/>
+          </p:cNvPicPr>
+          <p:nvPr/>
+        </p:nvPicPr>
+        <p:blipFill>
+          <a:blip r:embed="rId11"/>
+          <a:stretch>
+            <a:fillRect/>
+          </a:stretch>
+        </p:blipFill>
+        <p:spPr>
+          <a:xfrm>
+            <a:off x="1684569" y="6844763"/>
+            <a:ext cx="1944619" cy="2111131"/>
+          </a:xfrm>
+          <a:prstGeom prst="rect">
+            <a:avLst/>
+          </a:prstGeom>
+        </p:spPr>
+      </p:pic>
+      <p:pic>
+        <p:nvPicPr>
+          <p:cNvPr id="36" name="Imagen 35">
+            <a:extLst>
+              <a:ext uri="{FF2B5EF4-FFF2-40B4-BE49-F238E27FC236}">
+                <a16:creationId xmlns:a16="http://schemas.microsoft.com/office/drawing/2014/main" id="{6E2DFF0D-F878-49C8-BCDB-69108358BDDB}"/>
+              </a:ext>
+            </a:extLst>
+          </p:cNvPr>
+          <p:cNvPicPr>
+            <a:picLocks noChangeAspect="1"/>
+          </p:cNvPicPr>
+          <p:nvPr/>
+        </p:nvPicPr>
+        <p:blipFill>
+          <a:blip r:embed="rId12"/>
+          <a:stretch>
+            <a:fillRect/>
+          </a:stretch>
+        </p:blipFill>
+        <p:spPr>
+          <a:xfrm>
+            <a:off x="3748562" y="6846286"/>
+            <a:ext cx="1944619" cy="2109608"/>
+          </a:xfrm>
+          <a:prstGeom prst="rect">
+            <a:avLst/>
+          </a:prstGeom>
+        </p:spPr>
+      </p:pic>
+      <p:sp>
+        <p:nvSpPr>
+          <p:cNvPr id="37" name="Marco 36">
+            <a:extLst>
+              <a:ext uri="{FF2B5EF4-FFF2-40B4-BE49-F238E27FC236}">
+                <a16:creationId xmlns:a16="http://schemas.microsoft.com/office/drawing/2014/main" id="{0091238D-0197-44D7-B65C-46E1B9A6A433}"/>
+              </a:ext>
+            </a:extLst>
+          </p:cNvPr>
+          <p:cNvSpPr/>
+          <p:nvPr/>
+        </p:nvSpPr>
+        <p:spPr>
+          <a:xfrm>
+            <a:off x="1684569" y="6844763"/>
+            <a:ext cx="1944619" cy="2109608"/>
+          </a:xfrm>
+          <a:prstGeom prst="frame">
+            <a:avLst>
+              <a:gd name="adj1" fmla="val 568"/>
+            </a:avLst>
+          </a:prstGeom>
+          <a:scene3d>
+            <a:camera prst="orthographicFront"/>
+            <a:lightRig rig="threePt" dir="t"/>
+          </a:scene3d>
+          <a:sp3d>
+            <a:bevelT prst="slope"/>
+          </a:sp3d>
+        </p:spPr>
+        <p:style>
+          <a:lnRef idx="2">
+            <a:schemeClr val="accent1">
+              <a:shade val="50000"/>
+            </a:schemeClr>
+          </a:lnRef>
+          <a:fillRef idx="1">
+            <a:schemeClr val="accent1"/>
+          </a:fillRef>
+          <a:effectRef idx="0">
+            <a:schemeClr val="accent1"/>
+          </a:effectRef>
+          <a:fontRef idx="minor">
+            <a:schemeClr val="lt1"/>
+          </a:fontRef>
+        </p:style>
+        <p:txBody>
+          <a:bodyPr rtlCol="0" anchor="ctr"/>
+          <a:lstStyle/>
+          <a:p>
+            <a:pPr algn="ctr"/>
+            <a:endParaRPr lang="es-ES">
+              <a:solidFill>
+                <a:schemeClr val="tx1"/>
+              </a:solidFill>
+            </a:endParaRPr>
+          </a:p>
+        </p:txBody>
+      </p:sp>
+      <p:sp>
+        <p:nvSpPr>
+          <p:cNvPr id="38" name="Marco 37">
+            <a:extLst>
+              <a:ext uri="{FF2B5EF4-FFF2-40B4-BE49-F238E27FC236}">
+                <a16:creationId xmlns:a16="http://schemas.microsoft.com/office/drawing/2014/main" id="{F7DA3F4A-6F8B-495A-B3CA-E4A3707A95FC}"/>
+              </a:ext>
+            </a:extLst>
+          </p:cNvPr>
+          <p:cNvSpPr/>
+          <p:nvPr/>
+        </p:nvSpPr>
+        <p:spPr>
+          <a:xfrm>
+            <a:off x="3755104" y="6836099"/>
+            <a:ext cx="1944619" cy="2118272"/>
+          </a:xfrm>
+          <a:prstGeom prst="frame">
+            <a:avLst>
+              <a:gd name="adj1" fmla="val 568"/>
+            </a:avLst>
+          </a:prstGeom>
+          <a:scene3d>
+            <a:camera prst="orthographicFront"/>
+            <a:lightRig rig="threePt" dir="t"/>
+          </a:scene3d>
+          <a:sp3d>
+            <a:bevelT prst="slope"/>
+          </a:sp3d>
+        </p:spPr>
+        <p:style>
+          <a:lnRef idx="2">
+            <a:schemeClr val="accent1">
+              <a:shade val="50000"/>
+            </a:schemeClr>
+          </a:lnRef>
+          <a:fillRef idx="1">
+            <a:schemeClr val="accent1"/>
+          </a:fillRef>
+          <a:effectRef idx="0">
+            <a:schemeClr val="accent1"/>
+          </a:effectRef>
+          <a:fontRef idx="minor">
+            <a:schemeClr val="lt1"/>
+          </a:fontRef>
+        </p:style>
+        <p:txBody>
+          <a:bodyPr rtlCol="0" anchor="ctr"/>
+          <a:lstStyle/>
+          <a:p>
+            <a:pPr algn="ctr"/>
+            <a:endParaRPr lang="es-ES">
+              <a:solidFill>
+                <a:schemeClr val="tx1"/>
+              </a:solidFill>
+            </a:endParaRPr>
+          </a:p>
+        </p:txBody>
+      </p:sp>
+      <p:pic>
+        <p:nvPicPr>
+          <p:cNvPr id="39" name="Imagen 38">
+            <a:extLst>
+              <a:ext uri="{FF2B5EF4-FFF2-40B4-BE49-F238E27FC236}">
+                <a16:creationId xmlns:a16="http://schemas.microsoft.com/office/drawing/2014/main" id="{5D4BD8A1-6129-4765-8EF6-E9B704458AA9}"/>
+              </a:ext>
+            </a:extLst>
+          </p:cNvPr>
+          <p:cNvPicPr>
+            <a:picLocks noChangeAspect="1"/>
+          </p:cNvPicPr>
+          <p:nvPr/>
+        </p:nvPicPr>
+        <p:blipFill>
+          <a:blip r:embed="rId6">
+            <a:extLst>
+              <a:ext uri="{28A0092B-C50C-407E-A947-70E740481C1C}">
+                <a14:useLocalDpi xmlns:a14="http://schemas.microsoft.com/office/drawing/2010/main" val="0"/>
+              </a:ext>
+            </a:extLst>
+          </a:blip>
+          <a:stretch>
+            <a:fillRect/>
+          </a:stretch>
+        </p:blipFill>
+        <p:spPr>
+          <a:xfrm rot="12793496">
+            <a:off x="1809710" y="8078036"/>
+            <a:ext cx="348338" cy="348338"/>
+          </a:xfrm>
+          <a:prstGeom prst="rect">
+            <a:avLst/>
+          </a:prstGeom>
+          <a:effectLst>
+            <a:glow rad="63500">
+              <a:schemeClr val="accent6">
+                <a:satMod val="175000"/>
+                <a:alpha val="40000"/>
+              </a:schemeClr>
+            </a:glow>
+            <a:outerShdw blurRad="50800" dist="38100" dir="2700000" algn="tl" rotWithShape="0">
+              <a:prstClr val="black">
+                <a:alpha val="40000"/>
+              </a:prstClr>
+            </a:outerShdw>
+          </a:effectLst>
+        </p:spPr>
+      </p:pic>
+      <p:pic>
+        <p:nvPicPr>
+          <p:cNvPr id="40" name="Imagen 39">
+            <a:extLst>
+              <a:ext uri="{FF2B5EF4-FFF2-40B4-BE49-F238E27FC236}">
+                <a16:creationId xmlns:a16="http://schemas.microsoft.com/office/drawing/2014/main" id="{6517C805-F87C-47DA-82B7-5AFB5494DBFE}"/>
+              </a:ext>
+            </a:extLst>
+          </p:cNvPr>
+          <p:cNvPicPr>
+            <a:picLocks noChangeAspect="1"/>
+          </p:cNvPicPr>
+          <p:nvPr/>
+        </p:nvPicPr>
+        <p:blipFill>
+          <a:blip r:embed="rId6">
+            <a:extLst>
+              <a:ext uri="{28A0092B-C50C-407E-A947-70E740481C1C}">
+                <a14:useLocalDpi xmlns:a14="http://schemas.microsoft.com/office/drawing/2010/main" val="0"/>
+              </a:ext>
+            </a:extLst>
+          </a:blip>
+          <a:stretch>
+            <a:fillRect/>
+          </a:stretch>
+        </p:blipFill>
+        <p:spPr>
+          <a:xfrm rot="12793496">
+            <a:off x="3858373" y="7965108"/>
+            <a:ext cx="348338" cy="348338"/>
+          </a:xfrm>
+          <a:prstGeom prst="rect">
+            <a:avLst/>
+          </a:prstGeom>
+          <a:effectLst>
+            <a:glow rad="63500">
+              <a:schemeClr val="accent6">
+                <a:satMod val="175000"/>
+                <a:alpha val="40000"/>
+              </a:schemeClr>
+            </a:glow>
+            <a:outerShdw blurRad="50800" dist="38100" dir="2700000" algn="tl" rotWithShape="0">
+              <a:prstClr val="black">
+                <a:alpha val="40000"/>
+              </a:prstClr>
+            </a:outerShdw>
+          </a:effectLst>
+        </p:spPr>
+      </p:pic>
+      <p:cxnSp>
+        <p:nvCxnSpPr>
+          <p:cNvPr id="41" name="Conector recto 40">
+            <a:extLst>
+              <a:ext uri="{FF2B5EF4-FFF2-40B4-BE49-F238E27FC236}">
+                <a16:creationId xmlns:a16="http://schemas.microsoft.com/office/drawing/2014/main" id="{1BF7981E-EC8C-4CC4-A014-F1C0DF6483B4}"/>
+              </a:ext>
+            </a:extLst>
+          </p:cNvPr>
+          <p:cNvCxnSpPr>
+            <a:cxnSpLocks/>
+          </p:cNvCxnSpPr>
+          <p:nvPr/>
+        </p:nvCxnSpPr>
+        <p:spPr>
+          <a:xfrm>
+            <a:off x="310896" y="9096152"/>
+            <a:ext cx="6492240" cy="0"/>
+          </a:xfrm>
+          <a:prstGeom prst="line">
+            <a:avLst/>
+          </a:prstGeom>
+          <a:effectLst>
+            <a:outerShdw blurRad="50800" dist="38100" dir="2700000" algn="tl" rotWithShape="0">
+              <a:prstClr val="black">
+                <a:alpha val="40000"/>
+              </a:prstClr>
+            </a:outerShdw>
+          </a:effectLst>
+        </p:spPr>
+        <p:style>
+          <a:lnRef idx="2">
+            <a:schemeClr val="accent3"/>
+          </a:lnRef>
+          <a:fillRef idx="0">
+            <a:schemeClr val="accent3"/>
+          </a:fillRef>
+          <a:effectRef idx="1">
+            <a:schemeClr val="accent3"/>
+          </a:effectRef>
+          <a:fontRef idx="minor">
+            <a:schemeClr val="tx1"/>
+          </a:fontRef>
+        </p:style>
+      </p:cxnSp>
     </p:spTree>
     <p:extLst>
       <p:ext uri="{BB962C8B-B14F-4D97-AF65-F5344CB8AC3E}">
@@ -15337,6 +19815,752 @@
           <a:chExt cx="0" cy="0"/>
         </a:xfrm>
       </p:grpSpPr>
+      <p:pic>
+        <p:nvPicPr>
+          <p:cNvPr id="3" name="Imagen 2">
+            <a:extLst>
+              <a:ext uri="{FF2B5EF4-FFF2-40B4-BE49-F238E27FC236}">
+                <a16:creationId xmlns:a16="http://schemas.microsoft.com/office/drawing/2014/main" id="{4E33CAD2-60CE-4B3F-8CE6-D78215D86B39}"/>
+              </a:ext>
+            </a:extLst>
+          </p:cNvPr>
+          <p:cNvPicPr>
+            <a:picLocks noChangeAspect="1"/>
+          </p:cNvPicPr>
+          <p:nvPr/>
+        </p:nvPicPr>
+        <p:blipFill>
+          <a:blip r:embed="rId2"/>
+          <a:stretch>
+            <a:fillRect/>
+          </a:stretch>
+        </p:blipFill>
+        <p:spPr>
+          <a:xfrm>
+            <a:off x="304800" y="288070"/>
+            <a:ext cx="6894513" cy="1133979"/>
+          </a:xfrm>
+          <a:prstGeom prst="rect">
+            <a:avLst/>
+          </a:prstGeom>
+        </p:spPr>
+      </p:pic>
+      <p:pic>
+        <p:nvPicPr>
+          <p:cNvPr id="5" name="Imagen 4">
+            <a:extLst>
+              <a:ext uri="{FF2B5EF4-FFF2-40B4-BE49-F238E27FC236}">
+                <a16:creationId xmlns:a16="http://schemas.microsoft.com/office/drawing/2014/main" id="{27FD50C1-F7CB-4934-9EDD-67A939A6DB5B}"/>
+              </a:ext>
+            </a:extLst>
+          </p:cNvPr>
+          <p:cNvPicPr>
+            <a:picLocks noChangeAspect="1"/>
+          </p:cNvPicPr>
+          <p:nvPr/>
+        </p:nvPicPr>
+        <p:blipFill>
+          <a:blip r:embed="rId3"/>
+          <a:stretch>
+            <a:fillRect/>
+          </a:stretch>
+        </p:blipFill>
+        <p:spPr>
+          <a:xfrm>
+            <a:off x="1991620" y="1961694"/>
+            <a:ext cx="3216072" cy="2194201"/>
+          </a:xfrm>
+          <a:prstGeom prst="rect">
+            <a:avLst/>
+          </a:prstGeom>
+        </p:spPr>
+      </p:pic>
+      <p:pic>
+        <p:nvPicPr>
+          <p:cNvPr id="7" name="Imagen 6">
+            <a:extLst>
+              <a:ext uri="{FF2B5EF4-FFF2-40B4-BE49-F238E27FC236}">
+                <a16:creationId xmlns:a16="http://schemas.microsoft.com/office/drawing/2014/main" id="{E57EC748-A505-4538-A537-65B505A7282E}"/>
+              </a:ext>
+            </a:extLst>
+          </p:cNvPr>
+          <p:cNvPicPr>
+            <a:picLocks noChangeAspect="1"/>
+          </p:cNvPicPr>
+          <p:nvPr/>
+        </p:nvPicPr>
+        <p:blipFill>
+          <a:blip r:embed="rId4"/>
+          <a:stretch>
+            <a:fillRect/>
+          </a:stretch>
+        </p:blipFill>
+        <p:spPr>
+          <a:xfrm>
+            <a:off x="3213839" y="1537134"/>
+            <a:ext cx="771633" cy="362001"/>
+          </a:xfrm>
+          <a:prstGeom prst="rect">
+            <a:avLst/>
+          </a:prstGeom>
+        </p:spPr>
+      </p:pic>
+      <p:sp>
+        <p:nvSpPr>
+          <p:cNvPr id="8" name="Marco 7">
+            <a:extLst>
+              <a:ext uri="{FF2B5EF4-FFF2-40B4-BE49-F238E27FC236}">
+                <a16:creationId xmlns:a16="http://schemas.microsoft.com/office/drawing/2014/main" id="{C20146B4-FA1D-4608-88C8-7E11B4066E3F}"/>
+              </a:ext>
+            </a:extLst>
+          </p:cNvPr>
+          <p:cNvSpPr/>
+          <p:nvPr/>
+        </p:nvSpPr>
+        <p:spPr>
+          <a:xfrm>
+            <a:off x="3209645" y="1546660"/>
+            <a:ext cx="800211" cy="342948"/>
+          </a:xfrm>
+          <a:prstGeom prst="frame">
+            <a:avLst>
+              <a:gd name="adj1" fmla="val 568"/>
+            </a:avLst>
+          </a:prstGeom>
+          <a:scene3d>
+            <a:camera prst="orthographicFront"/>
+            <a:lightRig rig="threePt" dir="t"/>
+          </a:scene3d>
+          <a:sp3d>
+            <a:bevelT prst="slope"/>
+          </a:sp3d>
+        </p:spPr>
+        <p:style>
+          <a:lnRef idx="2">
+            <a:schemeClr val="accent1">
+              <a:shade val="50000"/>
+            </a:schemeClr>
+          </a:lnRef>
+          <a:fillRef idx="1">
+            <a:schemeClr val="accent1"/>
+          </a:fillRef>
+          <a:effectRef idx="0">
+            <a:schemeClr val="accent1"/>
+          </a:effectRef>
+          <a:fontRef idx="minor">
+            <a:schemeClr val="lt1"/>
+          </a:fontRef>
+        </p:style>
+        <p:txBody>
+          <a:bodyPr rtlCol="0" anchor="ctr"/>
+          <a:lstStyle/>
+          <a:p>
+            <a:pPr algn="ctr"/>
+            <a:endParaRPr lang="es-ES">
+              <a:solidFill>
+                <a:schemeClr val="tx1"/>
+              </a:solidFill>
+            </a:endParaRPr>
+          </a:p>
+        </p:txBody>
+      </p:sp>
+      <p:pic>
+        <p:nvPicPr>
+          <p:cNvPr id="9" name="Imagen 8">
+            <a:extLst>
+              <a:ext uri="{FF2B5EF4-FFF2-40B4-BE49-F238E27FC236}">
+                <a16:creationId xmlns:a16="http://schemas.microsoft.com/office/drawing/2014/main" id="{45B8A405-B4CB-491F-AA2C-2DF93266DCE2}"/>
+              </a:ext>
+            </a:extLst>
+          </p:cNvPr>
+          <p:cNvPicPr>
+            <a:picLocks noChangeAspect="1"/>
+          </p:cNvPicPr>
+          <p:nvPr/>
+        </p:nvPicPr>
+        <p:blipFill>
+          <a:blip r:embed="rId5">
+            <a:extLst>
+              <a:ext uri="{28A0092B-C50C-407E-A947-70E740481C1C}">
+                <a14:useLocalDpi xmlns:a14="http://schemas.microsoft.com/office/drawing/2010/main" val="0"/>
+              </a:ext>
+            </a:extLst>
+          </a:blip>
+          <a:stretch>
+            <a:fillRect/>
+          </a:stretch>
+        </p:blipFill>
+        <p:spPr>
+          <a:xfrm rot="16200000">
+            <a:off x="2818635" y="1537134"/>
+            <a:ext cx="348338" cy="348338"/>
+          </a:xfrm>
+          <a:prstGeom prst="rect">
+            <a:avLst/>
+          </a:prstGeom>
+          <a:effectLst>
+            <a:glow rad="63500">
+              <a:schemeClr val="accent6">
+                <a:satMod val="175000"/>
+                <a:alpha val="40000"/>
+              </a:schemeClr>
+            </a:glow>
+            <a:outerShdw blurRad="50800" dist="38100" dir="2700000" algn="tl" rotWithShape="0">
+              <a:prstClr val="black">
+                <a:alpha val="40000"/>
+              </a:prstClr>
+            </a:outerShdw>
+          </a:effectLst>
+        </p:spPr>
+      </p:pic>
+      <p:sp>
+        <p:nvSpPr>
+          <p:cNvPr id="10" name="Marco 9">
+            <a:extLst>
+              <a:ext uri="{FF2B5EF4-FFF2-40B4-BE49-F238E27FC236}">
+                <a16:creationId xmlns:a16="http://schemas.microsoft.com/office/drawing/2014/main" id="{C84AB3CF-051D-4EC6-BC84-C6808DCB732E}"/>
+              </a:ext>
+            </a:extLst>
+          </p:cNvPr>
+          <p:cNvSpPr/>
+          <p:nvPr/>
+        </p:nvSpPr>
+        <p:spPr>
+          <a:xfrm>
+            <a:off x="1991620" y="1975357"/>
+            <a:ext cx="3216072" cy="2194201"/>
+          </a:xfrm>
+          <a:prstGeom prst="frame">
+            <a:avLst>
+              <a:gd name="adj1" fmla="val 568"/>
+            </a:avLst>
+          </a:prstGeom>
+          <a:scene3d>
+            <a:camera prst="orthographicFront"/>
+            <a:lightRig rig="threePt" dir="t"/>
+          </a:scene3d>
+          <a:sp3d>
+            <a:bevelT prst="slope"/>
+          </a:sp3d>
+        </p:spPr>
+        <p:style>
+          <a:lnRef idx="2">
+            <a:schemeClr val="accent1">
+              <a:shade val="50000"/>
+            </a:schemeClr>
+          </a:lnRef>
+          <a:fillRef idx="1">
+            <a:schemeClr val="accent1"/>
+          </a:fillRef>
+          <a:effectRef idx="0">
+            <a:schemeClr val="accent1"/>
+          </a:effectRef>
+          <a:fontRef idx="minor">
+            <a:schemeClr val="lt1"/>
+          </a:fontRef>
+        </p:style>
+        <p:txBody>
+          <a:bodyPr rtlCol="0" anchor="ctr"/>
+          <a:lstStyle/>
+          <a:p>
+            <a:pPr algn="ctr"/>
+            <a:endParaRPr lang="es-ES">
+              <a:solidFill>
+                <a:schemeClr val="tx1"/>
+              </a:solidFill>
+            </a:endParaRPr>
+          </a:p>
+        </p:txBody>
+      </p:sp>
+      <p:pic>
+        <p:nvPicPr>
+          <p:cNvPr id="14" name="Imagen 13">
+            <a:extLst>
+              <a:ext uri="{FF2B5EF4-FFF2-40B4-BE49-F238E27FC236}">
+                <a16:creationId xmlns:a16="http://schemas.microsoft.com/office/drawing/2014/main" id="{9648DAA0-3B0A-44EC-97E5-48F9CAC4F74E}"/>
+              </a:ext>
+            </a:extLst>
+          </p:cNvPr>
+          <p:cNvPicPr>
+            <a:picLocks noChangeAspect="1"/>
+          </p:cNvPicPr>
+          <p:nvPr/>
+        </p:nvPicPr>
+        <p:blipFill>
+          <a:blip r:embed="rId6"/>
+          <a:stretch>
+            <a:fillRect/>
+          </a:stretch>
+        </p:blipFill>
+        <p:spPr>
+          <a:xfrm>
+            <a:off x="304801" y="4256053"/>
+            <a:ext cx="6583680" cy="1754603"/>
+          </a:xfrm>
+          <a:prstGeom prst="rect">
+            <a:avLst/>
+          </a:prstGeom>
+        </p:spPr>
+      </p:pic>
+      <p:sp>
+        <p:nvSpPr>
+          <p:cNvPr id="15" name="Marco 14">
+            <a:extLst>
+              <a:ext uri="{FF2B5EF4-FFF2-40B4-BE49-F238E27FC236}">
+                <a16:creationId xmlns:a16="http://schemas.microsoft.com/office/drawing/2014/main" id="{A55F1AD3-F1AA-4AD6-ABBF-29666B40D8DC}"/>
+              </a:ext>
+            </a:extLst>
+          </p:cNvPr>
+          <p:cNvSpPr/>
+          <p:nvPr/>
+        </p:nvSpPr>
+        <p:spPr>
+          <a:xfrm>
+            <a:off x="304800" y="4256053"/>
+            <a:ext cx="6583680" cy="1754603"/>
+          </a:xfrm>
+          <a:prstGeom prst="frame">
+            <a:avLst>
+              <a:gd name="adj1" fmla="val 568"/>
+            </a:avLst>
+          </a:prstGeom>
+          <a:scene3d>
+            <a:camera prst="orthographicFront"/>
+            <a:lightRig rig="threePt" dir="t"/>
+          </a:scene3d>
+          <a:sp3d>
+            <a:bevelT prst="slope"/>
+          </a:sp3d>
+        </p:spPr>
+        <p:style>
+          <a:lnRef idx="2">
+            <a:schemeClr val="accent1">
+              <a:shade val="50000"/>
+            </a:schemeClr>
+          </a:lnRef>
+          <a:fillRef idx="1">
+            <a:schemeClr val="accent1"/>
+          </a:fillRef>
+          <a:effectRef idx="0">
+            <a:schemeClr val="accent1"/>
+          </a:effectRef>
+          <a:fontRef idx="minor">
+            <a:schemeClr val="lt1"/>
+          </a:fontRef>
+        </p:style>
+        <p:txBody>
+          <a:bodyPr rtlCol="0" anchor="ctr"/>
+          <a:lstStyle/>
+          <a:p>
+            <a:pPr algn="ctr"/>
+            <a:endParaRPr lang="es-ES">
+              <a:solidFill>
+                <a:schemeClr val="tx1"/>
+              </a:solidFill>
+            </a:endParaRPr>
+          </a:p>
+        </p:txBody>
+      </p:sp>
+      <p:cxnSp>
+        <p:nvCxnSpPr>
+          <p:cNvPr id="16" name="Conector recto 15">
+            <a:extLst>
+              <a:ext uri="{FF2B5EF4-FFF2-40B4-BE49-F238E27FC236}">
+                <a16:creationId xmlns:a16="http://schemas.microsoft.com/office/drawing/2014/main" id="{8E6B3E0C-DC3B-4724-9E43-908AD6318224}"/>
+              </a:ext>
+            </a:extLst>
+          </p:cNvPr>
+          <p:cNvCxnSpPr>
+            <a:cxnSpLocks/>
+          </p:cNvCxnSpPr>
+          <p:nvPr/>
+        </p:nvCxnSpPr>
+        <p:spPr>
+          <a:xfrm>
+            <a:off x="353536" y="6218840"/>
+            <a:ext cx="6492240" cy="0"/>
+          </a:xfrm>
+          <a:prstGeom prst="line">
+            <a:avLst/>
+          </a:prstGeom>
+          <a:effectLst>
+            <a:outerShdw blurRad="50800" dist="38100" dir="2700000" algn="tl" rotWithShape="0">
+              <a:prstClr val="black">
+                <a:alpha val="40000"/>
+              </a:prstClr>
+            </a:outerShdw>
+          </a:effectLst>
+        </p:spPr>
+        <p:style>
+          <a:lnRef idx="2">
+            <a:schemeClr val="accent3"/>
+          </a:lnRef>
+          <a:fillRef idx="0">
+            <a:schemeClr val="accent3"/>
+          </a:fillRef>
+          <a:effectRef idx="1">
+            <a:schemeClr val="accent3"/>
+          </a:effectRef>
+          <a:fontRef idx="minor">
+            <a:schemeClr val="tx1"/>
+          </a:fontRef>
+        </p:style>
+      </p:cxnSp>
+      <p:pic>
+        <p:nvPicPr>
+          <p:cNvPr id="17" name="Imagen 16">
+            <a:extLst>
+              <a:ext uri="{FF2B5EF4-FFF2-40B4-BE49-F238E27FC236}">
+                <a16:creationId xmlns:a16="http://schemas.microsoft.com/office/drawing/2014/main" id="{92858721-952E-4366-BCA8-C44F5806F9BA}"/>
+              </a:ext>
+            </a:extLst>
+          </p:cNvPr>
+          <p:cNvPicPr>
+            <a:picLocks noChangeAspect="1"/>
+          </p:cNvPicPr>
+          <p:nvPr/>
+        </p:nvPicPr>
+        <p:blipFill>
+          <a:blip r:embed="rId5">
+            <a:extLst>
+              <a:ext uri="{28A0092B-C50C-407E-A947-70E740481C1C}">
+                <a14:useLocalDpi xmlns:a14="http://schemas.microsoft.com/office/drawing/2010/main" val="0"/>
+              </a:ext>
+            </a:extLst>
+          </a:blip>
+          <a:stretch>
+            <a:fillRect/>
+          </a:stretch>
+        </p:blipFill>
+        <p:spPr>
+          <a:xfrm rot="16200000">
+            <a:off x="2532123" y="3691876"/>
+            <a:ext cx="348338" cy="348338"/>
+          </a:xfrm>
+          <a:prstGeom prst="rect">
+            <a:avLst/>
+          </a:prstGeom>
+          <a:effectLst>
+            <a:glow rad="63500">
+              <a:schemeClr val="accent6">
+                <a:satMod val="175000"/>
+                <a:alpha val="40000"/>
+              </a:schemeClr>
+            </a:glow>
+            <a:outerShdw blurRad="50800" dist="38100" dir="2700000" algn="tl" rotWithShape="0">
+              <a:prstClr val="black">
+                <a:alpha val="40000"/>
+              </a:prstClr>
+            </a:outerShdw>
+          </a:effectLst>
+        </p:spPr>
+      </p:pic>
+      <p:pic>
+        <p:nvPicPr>
+          <p:cNvPr id="18" name="Imagen 17">
+            <a:extLst>
+              <a:ext uri="{FF2B5EF4-FFF2-40B4-BE49-F238E27FC236}">
+                <a16:creationId xmlns:a16="http://schemas.microsoft.com/office/drawing/2014/main" id="{EF154111-2146-470A-BA22-B3E760824ABE}"/>
+              </a:ext>
+            </a:extLst>
+          </p:cNvPr>
+          <p:cNvPicPr>
+            <a:picLocks noChangeAspect="1"/>
+          </p:cNvPicPr>
+          <p:nvPr/>
+        </p:nvPicPr>
+        <p:blipFill>
+          <a:blip r:embed="rId5">
+            <a:extLst>
+              <a:ext uri="{28A0092B-C50C-407E-A947-70E740481C1C}">
+                <a14:useLocalDpi xmlns:a14="http://schemas.microsoft.com/office/drawing/2010/main" val="0"/>
+              </a:ext>
+            </a:extLst>
+          </a:blip>
+          <a:stretch>
+            <a:fillRect/>
+          </a:stretch>
+        </p:blipFill>
+        <p:spPr>
+          <a:xfrm rot="10800000">
+            <a:off x="3577887" y="5534144"/>
+            <a:ext cx="348338" cy="348338"/>
+          </a:xfrm>
+          <a:prstGeom prst="rect">
+            <a:avLst/>
+          </a:prstGeom>
+          <a:effectLst>
+            <a:glow rad="63500">
+              <a:schemeClr val="accent6">
+                <a:satMod val="175000"/>
+                <a:alpha val="40000"/>
+              </a:schemeClr>
+            </a:glow>
+            <a:outerShdw blurRad="50800" dist="38100" dir="2700000" algn="tl" rotWithShape="0">
+              <a:prstClr val="black">
+                <a:alpha val="40000"/>
+              </a:prstClr>
+            </a:outerShdw>
+          </a:effectLst>
+        </p:spPr>
+      </p:pic>
+      <p:pic>
+        <p:nvPicPr>
+          <p:cNvPr id="20" name="Imagen 19">
+            <a:extLst>
+              <a:ext uri="{FF2B5EF4-FFF2-40B4-BE49-F238E27FC236}">
+                <a16:creationId xmlns:a16="http://schemas.microsoft.com/office/drawing/2014/main" id="{E78C81B9-AF58-4A89-92D6-62204551C519}"/>
+              </a:ext>
+            </a:extLst>
+          </p:cNvPr>
+          <p:cNvPicPr>
+            <a:picLocks noChangeAspect="1"/>
+          </p:cNvPicPr>
+          <p:nvPr/>
+        </p:nvPicPr>
+        <p:blipFill>
+          <a:blip r:embed="rId7"/>
+          <a:stretch>
+            <a:fillRect/>
+          </a:stretch>
+        </p:blipFill>
+        <p:spPr>
+          <a:xfrm>
+            <a:off x="304800" y="6440684"/>
+            <a:ext cx="6894513" cy="740334"/>
+          </a:xfrm>
+          <a:prstGeom prst="rect">
+            <a:avLst/>
+          </a:prstGeom>
+        </p:spPr>
+      </p:pic>
+      <p:pic>
+        <p:nvPicPr>
+          <p:cNvPr id="22" name="Imagen 21">
+            <a:extLst>
+              <a:ext uri="{FF2B5EF4-FFF2-40B4-BE49-F238E27FC236}">
+                <a16:creationId xmlns:a16="http://schemas.microsoft.com/office/drawing/2014/main" id="{1A3FE14E-E35A-46D5-AAB4-7D5F778D25DF}"/>
+              </a:ext>
+            </a:extLst>
+          </p:cNvPr>
+          <p:cNvPicPr>
+            <a:picLocks noChangeAspect="1"/>
+          </p:cNvPicPr>
+          <p:nvPr/>
+        </p:nvPicPr>
+        <p:blipFill>
+          <a:blip r:embed="rId8"/>
+          <a:stretch>
+            <a:fillRect/>
+          </a:stretch>
+        </p:blipFill>
+        <p:spPr>
+          <a:xfrm>
+            <a:off x="3090874" y="7257773"/>
+            <a:ext cx="828791" cy="352474"/>
+          </a:xfrm>
+          <a:prstGeom prst="rect">
+            <a:avLst/>
+          </a:prstGeom>
+        </p:spPr>
+      </p:pic>
+      <p:sp>
+        <p:nvSpPr>
+          <p:cNvPr id="23" name="Marco 22">
+            <a:extLst>
+              <a:ext uri="{FF2B5EF4-FFF2-40B4-BE49-F238E27FC236}">
+                <a16:creationId xmlns:a16="http://schemas.microsoft.com/office/drawing/2014/main" id="{64E91BA1-7AC7-4A99-9E3B-EEE1EBF213DC}"/>
+              </a:ext>
+            </a:extLst>
+          </p:cNvPr>
+          <p:cNvSpPr/>
+          <p:nvPr/>
+        </p:nvSpPr>
+        <p:spPr>
+          <a:xfrm>
+            <a:off x="3090875" y="7267299"/>
+            <a:ext cx="843080" cy="342948"/>
+          </a:xfrm>
+          <a:prstGeom prst="frame">
+            <a:avLst>
+              <a:gd name="adj1" fmla="val 568"/>
+            </a:avLst>
+          </a:prstGeom>
+          <a:scene3d>
+            <a:camera prst="orthographicFront"/>
+            <a:lightRig rig="threePt" dir="t"/>
+          </a:scene3d>
+          <a:sp3d>
+            <a:bevelT prst="slope"/>
+          </a:sp3d>
+        </p:spPr>
+        <p:style>
+          <a:lnRef idx="2">
+            <a:schemeClr val="accent1">
+              <a:shade val="50000"/>
+            </a:schemeClr>
+          </a:lnRef>
+          <a:fillRef idx="1">
+            <a:schemeClr val="accent1"/>
+          </a:fillRef>
+          <a:effectRef idx="0">
+            <a:schemeClr val="accent1"/>
+          </a:effectRef>
+          <a:fontRef idx="minor">
+            <a:schemeClr val="lt1"/>
+          </a:fontRef>
+        </p:style>
+        <p:txBody>
+          <a:bodyPr rtlCol="0" anchor="ctr"/>
+          <a:lstStyle/>
+          <a:p>
+            <a:pPr algn="ctr"/>
+            <a:endParaRPr lang="es-ES">
+              <a:solidFill>
+                <a:schemeClr val="tx1"/>
+              </a:solidFill>
+            </a:endParaRPr>
+          </a:p>
+        </p:txBody>
+      </p:sp>
+      <p:pic>
+        <p:nvPicPr>
+          <p:cNvPr id="24" name="Imagen 23">
+            <a:extLst>
+              <a:ext uri="{FF2B5EF4-FFF2-40B4-BE49-F238E27FC236}">
+                <a16:creationId xmlns:a16="http://schemas.microsoft.com/office/drawing/2014/main" id="{54709C71-0D75-44D6-B597-D352C5662069}"/>
+              </a:ext>
+            </a:extLst>
+          </p:cNvPr>
+          <p:cNvPicPr>
+            <a:picLocks noChangeAspect="1"/>
+          </p:cNvPicPr>
+          <p:nvPr/>
+        </p:nvPicPr>
+        <p:blipFill>
+          <a:blip r:embed="rId5">
+            <a:extLst>
+              <a:ext uri="{28A0092B-C50C-407E-A947-70E740481C1C}">
+                <a14:useLocalDpi xmlns:a14="http://schemas.microsoft.com/office/drawing/2010/main" val="0"/>
+              </a:ext>
+            </a:extLst>
+          </a:blip>
+          <a:stretch>
+            <a:fillRect/>
+          </a:stretch>
+        </p:blipFill>
+        <p:spPr>
+          <a:xfrm rot="16200000">
+            <a:off x="2635423" y="7257773"/>
+            <a:ext cx="348338" cy="348338"/>
+          </a:xfrm>
+          <a:prstGeom prst="rect">
+            <a:avLst/>
+          </a:prstGeom>
+          <a:effectLst>
+            <a:glow rad="63500">
+              <a:schemeClr val="accent6">
+                <a:satMod val="175000"/>
+                <a:alpha val="40000"/>
+              </a:schemeClr>
+            </a:glow>
+            <a:outerShdw blurRad="50800" dist="38100" dir="2700000" algn="tl" rotWithShape="0">
+              <a:prstClr val="black">
+                <a:alpha val="40000"/>
+              </a:prstClr>
+            </a:outerShdw>
+          </a:effectLst>
+        </p:spPr>
+      </p:pic>
+      <p:pic>
+        <p:nvPicPr>
+          <p:cNvPr id="26" name="Imagen 25">
+            <a:extLst>
+              <a:ext uri="{FF2B5EF4-FFF2-40B4-BE49-F238E27FC236}">
+                <a16:creationId xmlns:a16="http://schemas.microsoft.com/office/drawing/2014/main" id="{059CBF3D-BC49-4140-828C-06D5DF156FF3}"/>
+              </a:ext>
+            </a:extLst>
+          </p:cNvPr>
+          <p:cNvPicPr>
+            <a:picLocks noChangeAspect="1"/>
+          </p:cNvPicPr>
+          <p:nvPr/>
+        </p:nvPicPr>
+        <p:blipFill>
+          <a:blip r:embed="rId9"/>
+          <a:stretch>
+            <a:fillRect/>
+          </a:stretch>
+        </p:blipFill>
+        <p:spPr>
+          <a:xfrm>
+            <a:off x="1991620" y="7679321"/>
+            <a:ext cx="3111612" cy="1673624"/>
+          </a:xfrm>
+          <a:prstGeom prst="rect">
+            <a:avLst/>
+          </a:prstGeom>
+        </p:spPr>
+      </p:pic>
+      <p:sp>
+        <p:nvSpPr>
+          <p:cNvPr id="27" name="Marco 26">
+            <a:extLst>
+              <a:ext uri="{FF2B5EF4-FFF2-40B4-BE49-F238E27FC236}">
+                <a16:creationId xmlns:a16="http://schemas.microsoft.com/office/drawing/2014/main" id="{CCB41EB3-5C64-49FB-B3C7-15883F3D06B0}"/>
+              </a:ext>
+            </a:extLst>
+          </p:cNvPr>
+          <p:cNvSpPr/>
+          <p:nvPr/>
+        </p:nvSpPr>
+        <p:spPr>
+          <a:xfrm>
+            <a:off x="1991620" y="7692392"/>
+            <a:ext cx="3111612" cy="1660553"/>
+          </a:xfrm>
+          <a:prstGeom prst="frame">
+            <a:avLst>
+              <a:gd name="adj1" fmla="val 568"/>
+            </a:avLst>
+          </a:prstGeom>
+          <a:scene3d>
+            <a:camera prst="orthographicFront"/>
+            <a:lightRig rig="threePt" dir="t"/>
+          </a:scene3d>
+          <a:sp3d>
+            <a:bevelT prst="slope"/>
+          </a:sp3d>
+        </p:spPr>
+        <p:style>
+          <a:lnRef idx="2">
+            <a:schemeClr val="accent1">
+              <a:shade val="50000"/>
+            </a:schemeClr>
+          </a:lnRef>
+          <a:fillRef idx="1">
+            <a:schemeClr val="accent1"/>
+          </a:fillRef>
+          <a:effectRef idx="0">
+            <a:schemeClr val="accent1"/>
+          </a:effectRef>
+          <a:fontRef idx="minor">
+            <a:schemeClr val="lt1"/>
+          </a:fontRef>
+        </p:style>
+        <p:txBody>
+          <a:bodyPr rtlCol="0" anchor="ctr"/>
+          <a:lstStyle/>
+          <a:p>
+            <a:pPr algn="ctr"/>
+            <a:endParaRPr lang="es-ES">
+              <a:solidFill>
+                <a:schemeClr val="tx1"/>
+              </a:solidFill>
+            </a:endParaRPr>
+          </a:p>
+        </p:txBody>
+      </p:sp>
     </p:spTree>
     <p:extLst>
       <p:ext uri="{BB962C8B-B14F-4D97-AF65-F5344CB8AC3E}">
